--- a/进程文件/小论文/绘图/算法框架图.pptx
+++ b/进程文件/小论文/绘图/算法框架图.pptx
@@ -5,14 +5,15 @@
     <p:sldMasterId id="2147483648" r:id="rId1"/>
   </p:sldMasterIdLst>
   <p:notesMasterIdLst>
-    <p:notesMasterId r:id="rId7"/>
+    <p:notesMasterId r:id="rId8"/>
   </p:notesMasterIdLst>
   <p:sldIdLst>
     <p:sldId id="256" r:id="rId2"/>
     <p:sldId id="258" r:id="rId3"/>
     <p:sldId id="260" r:id="rId4"/>
     <p:sldId id="257" r:id="rId5"/>
-    <p:sldId id="259" r:id="rId6"/>
+    <p:sldId id="261" r:id="rId6"/>
+    <p:sldId id="259" r:id="rId7"/>
   </p:sldIdLst>
   <p:sldSz cx="12192000" cy="6858000"/>
   <p:notesSz cx="6858000" cy="9144000"/>
@@ -213,7 +214,7 @@
           <a:p>
             <a:fld id="{619DAC9E-D7E9-472A-B521-2CB21AAE0F05}" type="datetimeFigureOut">
               <a:rPr lang="zh-CN" altLang="en-US" smtClean="0"/>
-              <a:t>2025/10/30</a:t>
+              <a:t>2025/11/19</a:t>
             </a:fld>
             <a:endParaRPr lang="zh-CN" altLang="en-US"/>
           </a:p>
@@ -816,6 +817,90 @@
 </p:notes>
 </file>
 
+<file path=ppt/notesSlides/notesSlide5.xml><?xml version="1.0" encoding="utf-8"?>
+<p:notes xmlns:a="http://schemas.openxmlformats.org/drawingml/2006/main" xmlns:r="http://schemas.openxmlformats.org/officeDocument/2006/relationships" xmlns:p="http://schemas.openxmlformats.org/presentationml/2006/main">
+  <p:cSld>
+    <p:spTree>
+      <p:nvGrpSpPr>
+        <p:cNvPr id="1" name=""/>
+        <p:cNvGrpSpPr/>
+        <p:nvPr/>
+      </p:nvGrpSpPr>
+      <p:grpSpPr>
+        <a:xfrm>
+          <a:off x="0" y="0"/>
+          <a:ext cx="0" cy="0"/>
+          <a:chOff x="0" y="0"/>
+          <a:chExt cx="0" cy="0"/>
+        </a:xfrm>
+      </p:grpSpPr>
+      <p:sp>
+        <p:nvSpPr>
+          <p:cNvPr id="2" name="幻灯片图像占位符 1"/>
+          <p:cNvSpPr>
+            <a:spLocks noGrp="1" noRot="1" noChangeAspect="1"/>
+          </p:cNvSpPr>
+          <p:nvPr>
+            <p:ph type="sldImg"/>
+          </p:nvPr>
+        </p:nvSpPr>
+        <p:spPr/>
+      </p:sp>
+      <p:sp>
+        <p:nvSpPr>
+          <p:cNvPr id="3" name="备注占位符 2"/>
+          <p:cNvSpPr>
+            <a:spLocks noGrp="1"/>
+          </p:cNvSpPr>
+          <p:nvPr>
+            <p:ph type="body" idx="1"/>
+          </p:nvPr>
+        </p:nvSpPr>
+        <p:spPr/>
+        <p:txBody>
+          <a:bodyPr/>
+          <a:lstStyle/>
+          <a:p>
+            <a:endParaRPr lang="zh-CN" altLang="en-US" dirty="0"/>
+          </a:p>
+        </p:txBody>
+      </p:sp>
+      <p:sp>
+        <p:nvSpPr>
+          <p:cNvPr id="4" name="灯片编号占位符 3"/>
+          <p:cNvSpPr>
+            <a:spLocks noGrp="1"/>
+          </p:cNvSpPr>
+          <p:nvPr>
+            <p:ph type="sldNum" sz="quarter" idx="5"/>
+          </p:nvPr>
+        </p:nvSpPr>
+        <p:spPr/>
+        <p:txBody>
+          <a:bodyPr/>
+          <a:lstStyle/>
+          <a:p>
+            <a:fld id="{7F56FDD7-5042-4045-BD97-ECFA875697C0}" type="slidenum">
+              <a:rPr lang="zh-CN" altLang="en-US" smtClean="0"/>
+              <a:t>5</a:t>
+            </a:fld>
+            <a:endParaRPr lang="zh-CN" altLang="en-US"/>
+          </a:p>
+        </p:txBody>
+      </p:sp>
+    </p:spTree>
+    <p:extLst>
+      <p:ext uri="{BB962C8B-B14F-4D97-AF65-F5344CB8AC3E}">
+        <p14:creationId xmlns:p14="http://schemas.microsoft.com/office/powerpoint/2010/main" val="361373347"/>
+      </p:ext>
+    </p:extLst>
+  </p:cSld>
+  <p:clrMapOvr>
+    <a:masterClrMapping/>
+  </p:clrMapOvr>
+</p:notes>
+</file>
+
 <file path=ppt/slideLayouts/slideLayout1.xml><?xml version="1.0" encoding="utf-8"?>
 <p:sldLayout xmlns:a="http://schemas.openxmlformats.org/drawingml/2006/main" xmlns:r="http://schemas.openxmlformats.org/officeDocument/2006/relationships" xmlns:p="http://schemas.openxmlformats.org/presentationml/2006/main" type="title" preserve="1">
   <p:cSld name="标题幻灯片">
@@ -963,7 +1048,7 @@
           <a:p>
             <a:fld id="{7CF61761-81BA-480B-845B-C480831166E8}" type="datetimeFigureOut">
               <a:rPr lang="zh-CN" altLang="en-US" smtClean="0"/>
-              <a:t>2025/10/30</a:t>
+              <a:t>2025/11/19</a:t>
             </a:fld>
             <a:endParaRPr lang="zh-CN" altLang="en-US"/>
           </a:p>
@@ -1161,7 +1246,7 @@
           <a:p>
             <a:fld id="{7CF61761-81BA-480B-845B-C480831166E8}" type="datetimeFigureOut">
               <a:rPr lang="zh-CN" altLang="en-US" smtClean="0"/>
-              <a:t>2025/10/30</a:t>
+              <a:t>2025/11/19</a:t>
             </a:fld>
             <a:endParaRPr lang="zh-CN" altLang="en-US"/>
           </a:p>
@@ -1369,7 +1454,7 @@
           <a:p>
             <a:fld id="{7CF61761-81BA-480B-845B-C480831166E8}" type="datetimeFigureOut">
               <a:rPr lang="zh-CN" altLang="en-US" smtClean="0"/>
-              <a:t>2025/10/30</a:t>
+              <a:t>2025/11/19</a:t>
             </a:fld>
             <a:endParaRPr lang="zh-CN" altLang="en-US"/>
           </a:p>
@@ -1567,7 +1652,7 @@
           <a:p>
             <a:fld id="{7CF61761-81BA-480B-845B-C480831166E8}" type="datetimeFigureOut">
               <a:rPr lang="zh-CN" altLang="en-US" smtClean="0"/>
-              <a:t>2025/10/30</a:t>
+              <a:t>2025/11/19</a:t>
             </a:fld>
             <a:endParaRPr lang="zh-CN" altLang="en-US"/>
           </a:p>
@@ -1842,7 +1927,7 @@
           <a:p>
             <a:fld id="{7CF61761-81BA-480B-845B-C480831166E8}" type="datetimeFigureOut">
               <a:rPr lang="zh-CN" altLang="en-US" smtClean="0"/>
-              <a:t>2025/10/30</a:t>
+              <a:t>2025/11/19</a:t>
             </a:fld>
             <a:endParaRPr lang="zh-CN" altLang="en-US"/>
           </a:p>
@@ -2107,7 +2192,7 @@
           <a:p>
             <a:fld id="{7CF61761-81BA-480B-845B-C480831166E8}" type="datetimeFigureOut">
               <a:rPr lang="zh-CN" altLang="en-US" smtClean="0"/>
-              <a:t>2025/10/30</a:t>
+              <a:t>2025/11/19</a:t>
             </a:fld>
             <a:endParaRPr lang="zh-CN" altLang="en-US"/>
           </a:p>
@@ -2519,7 +2604,7 @@
           <a:p>
             <a:fld id="{7CF61761-81BA-480B-845B-C480831166E8}" type="datetimeFigureOut">
               <a:rPr lang="zh-CN" altLang="en-US" smtClean="0"/>
-              <a:t>2025/10/30</a:t>
+              <a:t>2025/11/19</a:t>
             </a:fld>
             <a:endParaRPr lang="zh-CN" altLang="en-US"/>
           </a:p>
@@ -2660,7 +2745,7 @@
           <a:p>
             <a:fld id="{7CF61761-81BA-480B-845B-C480831166E8}" type="datetimeFigureOut">
               <a:rPr lang="zh-CN" altLang="en-US" smtClean="0"/>
-              <a:t>2025/10/30</a:t>
+              <a:t>2025/11/19</a:t>
             </a:fld>
             <a:endParaRPr lang="zh-CN" altLang="en-US"/>
           </a:p>
@@ -2773,7 +2858,7 @@
           <a:p>
             <a:fld id="{7CF61761-81BA-480B-845B-C480831166E8}" type="datetimeFigureOut">
               <a:rPr lang="zh-CN" altLang="en-US" smtClean="0"/>
-              <a:t>2025/10/30</a:t>
+              <a:t>2025/11/19</a:t>
             </a:fld>
             <a:endParaRPr lang="zh-CN" altLang="en-US"/>
           </a:p>
@@ -3084,7 +3169,7 @@
           <a:p>
             <a:fld id="{7CF61761-81BA-480B-845B-C480831166E8}" type="datetimeFigureOut">
               <a:rPr lang="zh-CN" altLang="en-US" smtClean="0"/>
-              <a:t>2025/10/30</a:t>
+              <a:t>2025/11/19</a:t>
             </a:fld>
             <a:endParaRPr lang="zh-CN" altLang="en-US"/>
           </a:p>
@@ -3372,7 +3457,7 @@
           <a:p>
             <a:fld id="{7CF61761-81BA-480B-845B-C480831166E8}" type="datetimeFigureOut">
               <a:rPr lang="zh-CN" altLang="en-US" smtClean="0"/>
-              <a:t>2025/10/30</a:t>
+              <a:t>2025/11/19</a:t>
             </a:fld>
             <a:endParaRPr lang="zh-CN" altLang="en-US"/>
           </a:p>
@@ -3613,7 +3698,7 @@
           <a:p>
             <a:fld id="{7CF61761-81BA-480B-845B-C480831166E8}" type="datetimeFigureOut">
               <a:rPr lang="zh-CN" altLang="en-US" smtClean="0"/>
-              <a:t>2025/10/30</a:t>
+              <a:t>2025/11/19</a:t>
             </a:fld>
             <a:endParaRPr lang="zh-CN" altLang="en-US"/>
           </a:p>
@@ -44178,6 +44263,8200 @@
       </p:grpSpPr>
       <p:grpSp>
         <p:nvGrpSpPr>
+          <p:cNvPr id="192" name="组合 191">
+            <a:extLst>
+              <a:ext uri="{FF2B5EF4-FFF2-40B4-BE49-F238E27FC236}">
+                <a16:creationId xmlns:a16="http://schemas.microsoft.com/office/drawing/2014/main" id="{D8C74D9D-7834-4989-863E-E61A24194CB4}"/>
+              </a:ext>
+            </a:extLst>
+          </p:cNvPr>
+          <p:cNvGrpSpPr/>
+          <p:nvPr/>
+        </p:nvGrpSpPr>
+        <p:grpSpPr>
+          <a:xfrm>
+            <a:off x="233076" y="654841"/>
+            <a:ext cx="10576691" cy="5442544"/>
+            <a:chOff x="233076" y="654841"/>
+            <a:chExt cx="10576691" cy="5442544"/>
+          </a:xfrm>
+        </p:grpSpPr>
+        <p:grpSp>
+          <p:nvGrpSpPr>
+            <p:cNvPr id="74" name="组合 73">
+              <a:extLst>
+                <a:ext uri="{FF2B5EF4-FFF2-40B4-BE49-F238E27FC236}">
+                  <a16:creationId xmlns:a16="http://schemas.microsoft.com/office/drawing/2014/main" id="{3D90AE7E-2879-42DD-9A23-D83CDC7DD5C1}"/>
+                </a:ext>
+              </a:extLst>
+            </p:cNvPr>
+            <p:cNvGrpSpPr/>
+            <p:nvPr/>
+          </p:nvGrpSpPr>
+          <p:grpSpPr>
+            <a:xfrm>
+              <a:off x="233076" y="654841"/>
+              <a:ext cx="10576691" cy="5442544"/>
+              <a:chOff x="233076" y="654841"/>
+              <a:chExt cx="10576691" cy="5442544"/>
+            </a:xfrm>
+          </p:grpSpPr>
+          <p:sp>
+            <p:nvSpPr>
+              <p:cNvPr id="4" name="矩形: 圆角 3">
+                <a:extLst>
+                  <a:ext uri="{FF2B5EF4-FFF2-40B4-BE49-F238E27FC236}">
+                    <a16:creationId xmlns:a16="http://schemas.microsoft.com/office/drawing/2014/main" id="{E2A91DBF-43F5-4F2D-9D61-6DB9180B3CAF}"/>
+                  </a:ext>
+                </a:extLst>
+              </p:cNvPr>
+              <p:cNvSpPr/>
+              <p:nvPr/>
+            </p:nvSpPr>
+            <p:spPr>
+              <a:xfrm>
+                <a:off x="6734664" y="662738"/>
+                <a:ext cx="4075103" cy="2407443"/>
+              </a:xfrm>
+              <a:prstGeom prst="roundRect">
+                <a:avLst>
+                  <a:gd name="adj" fmla="val 8398"/>
+                </a:avLst>
+              </a:prstGeom>
+              <a:solidFill>
+                <a:schemeClr val="bg1">
+                  <a:lumMod val="95000"/>
+                </a:schemeClr>
+              </a:solidFill>
+              <a:ln cap="rnd">
+                <a:solidFill>
+                  <a:srgbClr val="C00000"/>
+                </a:solidFill>
+                <a:prstDash val="dash"/>
+                <a:round/>
+              </a:ln>
+            </p:spPr>
+            <p:style>
+              <a:lnRef idx="2">
+                <a:schemeClr val="accent1">
+                  <a:shade val="50000"/>
+                </a:schemeClr>
+              </a:lnRef>
+              <a:fillRef idx="1">
+                <a:schemeClr val="accent1"/>
+              </a:fillRef>
+              <a:effectRef idx="0">
+                <a:schemeClr val="accent1"/>
+              </a:effectRef>
+              <a:fontRef idx="minor">
+                <a:schemeClr val="lt1"/>
+              </a:fontRef>
+            </p:style>
+            <p:txBody>
+              <a:bodyPr rtlCol="0" anchor="ctr"/>
+              <a:lstStyle/>
+              <a:p>
+                <a:pPr algn="ctr"/>
+                <a:endParaRPr lang="zh-CN" altLang="en-US" dirty="0"/>
+              </a:p>
+            </p:txBody>
+          </p:sp>
+          <p:sp>
+            <p:nvSpPr>
+              <p:cNvPr id="7" name="矩形: 圆角 6">
+                <a:extLst>
+                  <a:ext uri="{FF2B5EF4-FFF2-40B4-BE49-F238E27FC236}">
+                    <a16:creationId xmlns:a16="http://schemas.microsoft.com/office/drawing/2014/main" id="{258E4C17-8E72-49F6-8BE2-56F017C6983E}"/>
+                  </a:ext>
+                </a:extLst>
+              </p:cNvPr>
+              <p:cNvSpPr/>
+              <p:nvPr/>
+            </p:nvSpPr>
+            <p:spPr>
+              <a:xfrm>
+                <a:off x="6704826" y="3670733"/>
+                <a:ext cx="4097854" cy="2400300"/>
+              </a:xfrm>
+              <a:prstGeom prst="roundRect">
+                <a:avLst>
+                  <a:gd name="adj" fmla="val 8398"/>
+                </a:avLst>
+              </a:prstGeom>
+              <a:solidFill>
+                <a:schemeClr val="bg1">
+                  <a:lumMod val="95000"/>
+                </a:schemeClr>
+              </a:solidFill>
+              <a:ln cap="rnd">
+                <a:solidFill>
+                  <a:srgbClr val="0070C0"/>
+                </a:solidFill>
+                <a:prstDash val="dash"/>
+                <a:round/>
+              </a:ln>
+            </p:spPr>
+            <p:style>
+              <a:lnRef idx="2">
+                <a:schemeClr val="accent1">
+                  <a:shade val="50000"/>
+                </a:schemeClr>
+              </a:lnRef>
+              <a:fillRef idx="1">
+                <a:schemeClr val="accent1"/>
+              </a:fillRef>
+              <a:effectRef idx="0">
+                <a:schemeClr val="accent1"/>
+              </a:effectRef>
+              <a:fontRef idx="minor">
+                <a:schemeClr val="lt1"/>
+              </a:fontRef>
+            </p:style>
+            <p:txBody>
+              <a:bodyPr rtlCol="0" anchor="ctr"/>
+              <a:lstStyle/>
+              <a:p>
+                <a:pPr algn="ctr"/>
+                <a:endParaRPr lang="zh-CN" altLang="en-US" dirty="0"/>
+              </a:p>
+            </p:txBody>
+          </p:sp>
+          <p:grpSp>
+            <p:nvGrpSpPr>
+              <p:cNvPr id="33" name="组合 32">
+                <a:extLst>
+                  <a:ext uri="{FF2B5EF4-FFF2-40B4-BE49-F238E27FC236}">
+                    <a16:creationId xmlns:a16="http://schemas.microsoft.com/office/drawing/2014/main" id="{BC0ACF3A-16D0-4818-83C2-58234A934322}"/>
+                  </a:ext>
+                </a:extLst>
+              </p:cNvPr>
+              <p:cNvGrpSpPr/>
+              <p:nvPr/>
+            </p:nvGrpSpPr>
+            <p:grpSpPr>
+              <a:xfrm>
+                <a:off x="6826613" y="1240909"/>
+                <a:ext cx="1667113" cy="610751"/>
+                <a:chOff x="3769625" y="770071"/>
+                <a:chExt cx="1514533" cy="646038"/>
+              </a:xfrm>
+            </p:grpSpPr>
+            <p:sp>
+              <p:nvSpPr>
+                <p:cNvPr id="8" name="矩形: 圆角 7">
+                  <a:extLst>
+                    <a:ext uri="{FF2B5EF4-FFF2-40B4-BE49-F238E27FC236}">
+                      <a16:creationId xmlns:a16="http://schemas.microsoft.com/office/drawing/2014/main" id="{8EDEDC3E-65C2-4C62-A027-CA3DCBD4E5CA}"/>
+                    </a:ext>
+                  </a:extLst>
+                </p:cNvPr>
+                <p:cNvSpPr/>
+                <p:nvPr/>
+              </p:nvSpPr>
+              <p:spPr>
+                <a:xfrm>
+                  <a:off x="3790315" y="770071"/>
+                  <a:ext cx="1493843" cy="646038"/>
+                </a:xfrm>
+                <a:prstGeom prst="roundRect">
+                  <a:avLst/>
+                </a:prstGeom>
+                <a:solidFill>
+                  <a:schemeClr val="bg1"/>
+                </a:solidFill>
+                <a:ln>
+                  <a:solidFill>
+                    <a:schemeClr val="tx1"/>
+                  </a:solidFill>
+                </a:ln>
+              </p:spPr>
+              <p:style>
+                <a:lnRef idx="2">
+                  <a:schemeClr val="accent1">
+                    <a:shade val="50000"/>
+                  </a:schemeClr>
+                </a:lnRef>
+                <a:fillRef idx="1">
+                  <a:schemeClr val="accent1"/>
+                </a:fillRef>
+                <a:effectRef idx="0">
+                  <a:schemeClr val="accent1"/>
+                </a:effectRef>
+                <a:fontRef idx="minor">
+                  <a:schemeClr val="lt1"/>
+                </a:fontRef>
+              </p:style>
+              <p:txBody>
+                <a:bodyPr rtlCol="0" anchor="ctr"/>
+                <a:lstStyle/>
+                <a:p>
+                  <a:pPr algn="ctr"/>
+                  <a:endParaRPr lang="zh-CN" altLang="en-US" dirty="0"/>
+                </a:p>
+              </p:txBody>
+            </p:sp>
+            <p:sp>
+              <p:nvSpPr>
+                <p:cNvPr id="9" name="文本框 8">
+                  <a:extLst>
+                    <a:ext uri="{FF2B5EF4-FFF2-40B4-BE49-F238E27FC236}">
+                      <a16:creationId xmlns:a16="http://schemas.microsoft.com/office/drawing/2014/main" id="{B634F6D6-316A-4890-A8A5-3DEF27414910}"/>
+                    </a:ext>
+                  </a:extLst>
+                </p:cNvPr>
+                <p:cNvSpPr txBox="1"/>
+                <p:nvPr/>
+              </p:nvSpPr>
+              <p:spPr>
+                <a:xfrm>
+                  <a:off x="3769625" y="808308"/>
+                  <a:ext cx="1434936" cy="488339"/>
+                </a:xfrm>
+                <a:prstGeom prst="rect">
+                  <a:avLst/>
+                </a:prstGeom>
+                <a:noFill/>
+              </p:spPr>
+              <p:txBody>
+                <a:bodyPr wrap="square" rtlCol="0">
+                  <a:spAutoFit/>
+                </a:bodyPr>
+                <a:lstStyle/>
+                <a:p>
+                  <a:r>
+                    <a:rPr lang="zh-CN" altLang="en-US" sz="1200" b="1" dirty="0"/>
+                    <a:t>①</a:t>
+                  </a:r>
+                  <a:r>
+                    <a:rPr lang="zh-CN" altLang="en-US" sz="1200" dirty="0"/>
+                    <a:t>初始化满足约束的各簇</a:t>
+                  </a:r>
+                  <a:r>
+                    <a:rPr lang="en-US" altLang="zh-CN" sz="1200" dirty="0"/>
+                    <a:t>RRT*</a:t>
+                  </a:r>
+                  <a:r>
+                    <a:rPr lang="zh-CN" altLang="en-US" sz="1200" dirty="0"/>
+                    <a:t>全局路径</a:t>
+                  </a:r>
+                </a:p>
+              </p:txBody>
+            </p:sp>
+          </p:grpSp>
+          <p:grpSp>
+            <p:nvGrpSpPr>
+              <p:cNvPr id="36" name="组合 35">
+                <a:extLst>
+                  <a:ext uri="{FF2B5EF4-FFF2-40B4-BE49-F238E27FC236}">
+                    <a16:creationId xmlns:a16="http://schemas.microsoft.com/office/drawing/2014/main" id="{AFA4CA34-2DF5-426D-B355-65EAC6AC5487}"/>
+                  </a:ext>
+                </a:extLst>
+              </p:cNvPr>
+              <p:cNvGrpSpPr/>
+              <p:nvPr/>
+            </p:nvGrpSpPr>
+            <p:grpSpPr>
+              <a:xfrm>
+                <a:off x="8808744" y="1264921"/>
+                <a:ext cx="1698193" cy="541020"/>
+                <a:chOff x="6286839" y="587892"/>
+                <a:chExt cx="1661732" cy="541020"/>
+              </a:xfrm>
+            </p:grpSpPr>
+            <p:sp>
+              <p:nvSpPr>
+                <p:cNvPr id="21" name="矩形: 圆角 20">
+                  <a:extLst>
+                    <a:ext uri="{FF2B5EF4-FFF2-40B4-BE49-F238E27FC236}">
+                      <a16:creationId xmlns:a16="http://schemas.microsoft.com/office/drawing/2014/main" id="{997B6BCF-401A-492A-9B43-624AFB8EB604}"/>
+                    </a:ext>
+                  </a:extLst>
+                </p:cNvPr>
+                <p:cNvSpPr/>
+                <p:nvPr/>
+              </p:nvSpPr>
+              <p:spPr>
+                <a:xfrm>
+                  <a:off x="6286839" y="587892"/>
+                  <a:ext cx="1535498" cy="541020"/>
+                </a:xfrm>
+                <a:prstGeom prst="roundRect">
+                  <a:avLst/>
+                </a:prstGeom>
+                <a:solidFill>
+                  <a:schemeClr val="bg1"/>
+                </a:solidFill>
+                <a:ln>
+                  <a:solidFill>
+                    <a:schemeClr val="tx1"/>
+                  </a:solidFill>
+                </a:ln>
+              </p:spPr>
+              <p:style>
+                <a:lnRef idx="2">
+                  <a:schemeClr val="accent1">
+                    <a:shade val="50000"/>
+                  </a:schemeClr>
+                </a:lnRef>
+                <a:fillRef idx="1">
+                  <a:schemeClr val="accent1"/>
+                </a:fillRef>
+                <a:effectRef idx="0">
+                  <a:schemeClr val="accent1"/>
+                </a:effectRef>
+                <a:fontRef idx="minor">
+                  <a:schemeClr val="lt1"/>
+                </a:fontRef>
+              </p:style>
+              <p:txBody>
+                <a:bodyPr rtlCol="0" anchor="ctr"/>
+                <a:lstStyle/>
+                <a:p>
+                  <a:pPr algn="ctr"/>
+                  <a:endParaRPr lang="zh-CN" altLang="en-US" dirty="0"/>
+                </a:p>
+              </p:txBody>
+            </p:sp>
+            <p:sp>
+              <p:nvSpPr>
+                <p:cNvPr id="366" name="文本框 365">
+                  <a:extLst>
+                    <a:ext uri="{FF2B5EF4-FFF2-40B4-BE49-F238E27FC236}">
+                      <a16:creationId xmlns:a16="http://schemas.microsoft.com/office/drawing/2014/main" id="{BCE11F1C-E7C5-4EE7-A3FE-51831C28D147}"/>
+                    </a:ext>
+                  </a:extLst>
+                </p:cNvPr>
+                <p:cNvSpPr txBox="1"/>
+                <p:nvPr/>
+              </p:nvSpPr>
+              <p:spPr>
+                <a:xfrm>
+                  <a:off x="6295539" y="622450"/>
+                  <a:ext cx="1653032" cy="461665"/>
+                </a:xfrm>
+                <a:prstGeom prst="rect">
+                  <a:avLst/>
+                </a:prstGeom>
+                <a:noFill/>
+              </p:spPr>
+              <p:txBody>
+                <a:bodyPr wrap="square" rtlCol="0">
+                  <a:spAutoFit/>
+                </a:bodyPr>
+                <a:lstStyle/>
+                <a:p>
+                  <a:r>
+                    <a:rPr lang="zh-CN" altLang="en-US" sz="1200" dirty="0"/>
+                    <a:t>⑤重规划满足</a:t>
+                  </a:r>
+                  <a:r>
+                    <a:rPr lang="en-US" altLang="zh-CN" sz="1200" dirty="0"/>
+                    <a:t>Fréchet</a:t>
+                  </a:r>
+                  <a:r>
+                    <a:rPr lang="zh-CN" altLang="en-US" sz="1200" dirty="0"/>
+                    <a:t>约束的全局路径</a:t>
+                  </a:r>
+                </a:p>
+              </p:txBody>
+            </p:sp>
+          </p:grpSp>
+          <p:grpSp>
+            <p:nvGrpSpPr>
+              <p:cNvPr id="30" name="组合 29">
+                <a:extLst>
+                  <a:ext uri="{FF2B5EF4-FFF2-40B4-BE49-F238E27FC236}">
+                    <a16:creationId xmlns:a16="http://schemas.microsoft.com/office/drawing/2014/main" id="{62C123F5-D00B-4627-8F8A-22891D530D67}"/>
+                  </a:ext>
+                </a:extLst>
+              </p:cNvPr>
+              <p:cNvGrpSpPr/>
+              <p:nvPr/>
+            </p:nvGrpSpPr>
+            <p:grpSpPr>
+              <a:xfrm>
+                <a:off x="7041910" y="3960290"/>
+                <a:ext cx="1835389" cy="558370"/>
+                <a:chOff x="1549009" y="4013485"/>
+                <a:chExt cx="1782981" cy="761410"/>
+              </a:xfrm>
+            </p:grpSpPr>
+            <p:sp>
+              <p:nvSpPr>
+                <p:cNvPr id="23" name="矩形: 圆角 22">
+                  <a:extLst>
+                    <a:ext uri="{FF2B5EF4-FFF2-40B4-BE49-F238E27FC236}">
+                      <a16:creationId xmlns:a16="http://schemas.microsoft.com/office/drawing/2014/main" id="{7F48C4FB-9A14-4A24-8636-637D638F7FF8}"/>
+                    </a:ext>
+                  </a:extLst>
+                </p:cNvPr>
+                <p:cNvSpPr/>
+                <p:nvPr/>
+              </p:nvSpPr>
+              <p:spPr>
+                <a:xfrm>
+                  <a:off x="1549009" y="4013485"/>
+                  <a:ext cx="1650272" cy="761410"/>
+                </a:xfrm>
+                <a:prstGeom prst="roundRect">
+                  <a:avLst/>
+                </a:prstGeom>
+                <a:solidFill>
+                  <a:schemeClr val="bg1"/>
+                </a:solidFill>
+                <a:ln>
+                  <a:solidFill>
+                    <a:schemeClr val="tx1"/>
+                  </a:solidFill>
+                </a:ln>
+              </p:spPr>
+              <p:style>
+                <a:lnRef idx="2">
+                  <a:schemeClr val="accent1">
+                    <a:shade val="50000"/>
+                  </a:schemeClr>
+                </a:lnRef>
+                <a:fillRef idx="1">
+                  <a:schemeClr val="accent1"/>
+                </a:fillRef>
+                <a:effectRef idx="0">
+                  <a:schemeClr val="accent1"/>
+                </a:effectRef>
+                <a:fontRef idx="minor">
+                  <a:schemeClr val="lt1"/>
+                </a:fontRef>
+              </p:style>
+              <p:txBody>
+                <a:bodyPr rtlCol="0" anchor="ctr"/>
+                <a:lstStyle/>
+                <a:p>
+                  <a:pPr algn="ctr"/>
+                  <a:endParaRPr lang="zh-CN" altLang="en-US" dirty="0"/>
+                </a:p>
+              </p:txBody>
+            </p:sp>
+            <p:sp>
+              <p:nvSpPr>
+                <p:cNvPr id="369" name="文本框 368">
+                  <a:extLst>
+                    <a:ext uri="{FF2B5EF4-FFF2-40B4-BE49-F238E27FC236}">
+                      <a16:creationId xmlns:a16="http://schemas.microsoft.com/office/drawing/2014/main" id="{B6B57562-D4EE-4516-ABDD-5B3444C5C1F2}"/>
+                    </a:ext>
+                  </a:extLst>
+                </p:cNvPr>
+                <p:cNvSpPr txBox="1"/>
+                <p:nvPr/>
+              </p:nvSpPr>
+              <p:spPr>
+                <a:xfrm>
+                  <a:off x="1599831" y="4083625"/>
+                  <a:ext cx="1732159" cy="629541"/>
+                </a:xfrm>
+                <a:prstGeom prst="rect">
+                  <a:avLst/>
+                </a:prstGeom>
+                <a:noFill/>
+              </p:spPr>
+              <p:txBody>
+                <a:bodyPr wrap="square" rtlCol="0">
+                  <a:spAutoFit/>
+                </a:bodyPr>
+                <a:lstStyle/>
+                <a:p>
+                  <a:r>
+                    <a:rPr lang="zh-CN" altLang="en-US" sz="1200" b="1" dirty="0"/>
+                    <a:t>②</a:t>
+                  </a:r>
+                  <a:r>
+                    <a:rPr lang="zh-CN" altLang="en-US" sz="1200" dirty="0"/>
+                    <a:t>计算</a:t>
+                  </a:r>
+                  <a:r>
+                    <a:rPr lang="en-US" altLang="zh-CN" sz="1200" dirty="0"/>
+                    <a:t>SINR,</a:t>
+                  </a:r>
+                  <a:r>
+                    <a:rPr lang="zh-CN" altLang="en-US" sz="1200" dirty="0"/>
+                    <a:t>构建</a:t>
+                  </a:r>
+                  <a:r>
+                    <a:rPr lang="en-US" altLang="zh-CN" sz="1200" dirty="0"/>
+                    <a:t>MBST</a:t>
+                  </a:r>
+                  <a:r>
+                    <a:rPr lang="zh-CN" altLang="en-US" sz="1200" dirty="0"/>
+                    <a:t>通信保持网络</a:t>
+                  </a:r>
+                </a:p>
+              </p:txBody>
+            </p:sp>
+          </p:grpSp>
+          <p:grpSp>
+            <p:nvGrpSpPr>
+              <p:cNvPr id="31" name="组合 30">
+                <a:extLst>
+                  <a:ext uri="{FF2B5EF4-FFF2-40B4-BE49-F238E27FC236}">
+                    <a16:creationId xmlns:a16="http://schemas.microsoft.com/office/drawing/2014/main" id="{0A87FB2A-9FA0-4801-918D-F2DFF71C8694}"/>
+                  </a:ext>
+                </a:extLst>
+              </p:cNvPr>
+              <p:cNvGrpSpPr/>
+              <p:nvPr/>
+            </p:nvGrpSpPr>
+            <p:grpSpPr>
+              <a:xfrm>
+                <a:off x="9120249" y="4068851"/>
+                <a:ext cx="1524888" cy="661748"/>
+                <a:chOff x="1050738" y="5295115"/>
+                <a:chExt cx="1278488" cy="955772"/>
+              </a:xfrm>
+            </p:grpSpPr>
+            <p:sp>
+              <p:nvSpPr>
+                <p:cNvPr id="370" name="矩形: 圆角 369">
+                  <a:extLst>
+                    <a:ext uri="{FF2B5EF4-FFF2-40B4-BE49-F238E27FC236}">
+                      <a16:creationId xmlns:a16="http://schemas.microsoft.com/office/drawing/2014/main" id="{E9F576A4-23C4-4A13-A8A7-50BDA342CCDF}"/>
+                    </a:ext>
+                  </a:extLst>
+                </p:cNvPr>
+                <p:cNvSpPr/>
+                <p:nvPr/>
+              </p:nvSpPr>
+              <p:spPr>
+                <a:xfrm>
+                  <a:off x="1056669" y="5295115"/>
+                  <a:ext cx="1189506" cy="955772"/>
+                </a:xfrm>
+                <a:prstGeom prst="roundRect">
+                  <a:avLst/>
+                </a:prstGeom>
+                <a:solidFill>
+                  <a:schemeClr val="bg1"/>
+                </a:solidFill>
+                <a:ln>
+                  <a:solidFill>
+                    <a:schemeClr val="tx1"/>
+                  </a:solidFill>
+                </a:ln>
+              </p:spPr>
+              <p:style>
+                <a:lnRef idx="2">
+                  <a:schemeClr val="accent1">
+                    <a:shade val="50000"/>
+                  </a:schemeClr>
+                </a:lnRef>
+                <a:fillRef idx="1">
+                  <a:schemeClr val="accent1"/>
+                </a:fillRef>
+                <a:effectRef idx="0">
+                  <a:schemeClr val="accent1"/>
+                </a:effectRef>
+                <a:fontRef idx="minor">
+                  <a:schemeClr val="lt1"/>
+                </a:fontRef>
+              </p:style>
+              <p:txBody>
+                <a:bodyPr rtlCol="0" anchor="ctr"/>
+                <a:lstStyle/>
+                <a:p>
+                  <a:pPr algn="ctr"/>
+                  <a:endParaRPr lang="zh-CN" altLang="en-US" dirty="0"/>
+                </a:p>
+              </p:txBody>
+            </p:sp>
+            <p:sp>
+              <p:nvSpPr>
+                <p:cNvPr id="371" name="文本框 370">
+                  <a:extLst>
+                    <a:ext uri="{FF2B5EF4-FFF2-40B4-BE49-F238E27FC236}">
+                      <a16:creationId xmlns:a16="http://schemas.microsoft.com/office/drawing/2014/main" id="{6877346C-DB75-4046-B661-82247BF9C74A}"/>
+                    </a:ext>
+                  </a:extLst>
+                </p:cNvPr>
+                <p:cNvSpPr txBox="1"/>
+                <p:nvPr/>
+              </p:nvSpPr>
+              <p:spPr>
+                <a:xfrm>
+                  <a:off x="1050738" y="5410925"/>
+                  <a:ext cx="1278488" cy="666789"/>
+                </a:xfrm>
+                <a:prstGeom prst="rect">
+                  <a:avLst/>
+                </a:prstGeom>
+                <a:noFill/>
+              </p:spPr>
+              <p:txBody>
+                <a:bodyPr wrap="square" rtlCol="0">
+                  <a:spAutoFit/>
+                </a:bodyPr>
+                <a:lstStyle/>
+                <a:p>
+                  <a:r>
+                    <a:rPr lang="zh-CN" altLang="en-US" sz="1200" b="1" dirty="0"/>
+                    <a:t>④</a:t>
+                  </a:r>
+                  <a:r>
+                    <a:rPr lang="zh-CN" altLang="en-US" sz="1200" dirty="0"/>
+                    <a:t>检测更新建筑物干扰等信息</a:t>
+                  </a:r>
+                </a:p>
+              </p:txBody>
+            </p:sp>
+          </p:grpSp>
+          <p:sp>
+            <p:nvSpPr>
+              <p:cNvPr id="67" name="文本框 66">
+                <a:extLst>
+                  <a:ext uri="{FF2B5EF4-FFF2-40B4-BE49-F238E27FC236}">
+                    <a16:creationId xmlns:a16="http://schemas.microsoft.com/office/drawing/2014/main" id="{57D06EE6-192F-45DC-B502-6DC8ACDC767C}"/>
+                  </a:ext>
+                </a:extLst>
+              </p:cNvPr>
+              <p:cNvSpPr txBox="1"/>
+              <p:nvPr/>
+            </p:nvSpPr>
+            <p:spPr>
+              <a:xfrm>
+                <a:off x="7818821" y="697589"/>
+                <a:ext cx="2105668" cy="369332"/>
+              </a:xfrm>
+              <a:prstGeom prst="rect">
+                <a:avLst/>
+              </a:prstGeom>
+              <a:noFill/>
+            </p:spPr>
+            <p:txBody>
+              <a:bodyPr wrap="square" rtlCol="0">
+                <a:spAutoFit/>
+              </a:bodyPr>
+              <a:lstStyle/>
+              <a:p>
+                <a:r>
+                  <a:rPr lang="zh-CN" altLang="en-US" b="1" dirty="0"/>
+                  <a:t>全局</a:t>
+                </a:r>
+                <a:r>
+                  <a:rPr lang="en-US" altLang="zh-CN" b="1" dirty="0"/>
+                  <a:t>C-RRT*</a:t>
+                </a:r>
+                <a:r>
+                  <a:rPr lang="zh-CN" altLang="en-US" b="1" dirty="0"/>
+                  <a:t>规划</a:t>
+                </a:r>
+              </a:p>
+            </p:txBody>
+          </p:sp>
+          <p:sp>
+            <p:nvSpPr>
+              <p:cNvPr id="68" name="文本框 67">
+                <a:extLst>
+                  <a:ext uri="{FF2B5EF4-FFF2-40B4-BE49-F238E27FC236}">
+                    <a16:creationId xmlns:a16="http://schemas.microsoft.com/office/drawing/2014/main" id="{0D776B5B-7D47-4A58-97E1-148B4D750841}"/>
+                  </a:ext>
+                </a:extLst>
+              </p:cNvPr>
+              <p:cNvSpPr txBox="1"/>
+              <p:nvPr/>
+            </p:nvSpPr>
+            <p:spPr>
+              <a:xfrm>
+                <a:off x="7875358" y="5540781"/>
+                <a:ext cx="2438400" cy="369332"/>
+              </a:xfrm>
+              <a:prstGeom prst="rect">
+                <a:avLst/>
+              </a:prstGeom>
+              <a:noFill/>
+            </p:spPr>
+            <p:txBody>
+              <a:bodyPr wrap="square" rtlCol="0">
+                <a:spAutoFit/>
+              </a:bodyPr>
+              <a:lstStyle/>
+              <a:p>
+                <a:r>
+                  <a:rPr lang="zh-CN" altLang="en-US" b="1" dirty="0"/>
+                  <a:t>局部</a:t>
+                </a:r>
+                <a:r>
+                  <a:rPr lang="en-US" altLang="zh-CN" b="1" dirty="0"/>
+                  <a:t>MBST-APF</a:t>
+                </a:r>
+                <a:r>
+                  <a:rPr lang="zh-CN" altLang="en-US" b="1" dirty="0"/>
+                  <a:t>规划</a:t>
+                </a:r>
+              </a:p>
+            </p:txBody>
+          </p:sp>
+          <p:sp>
+            <p:nvSpPr>
+              <p:cNvPr id="314" name="文本框 313">
+                <a:extLst>
+                  <a:ext uri="{FF2B5EF4-FFF2-40B4-BE49-F238E27FC236}">
+                    <a16:creationId xmlns:a16="http://schemas.microsoft.com/office/drawing/2014/main" id="{5FF2C4F5-F156-4FC5-8C4C-8CB74C236C08}"/>
+                  </a:ext>
+                </a:extLst>
+              </p:cNvPr>
+              <p:cNvSpPr txBox="1"/>
+              <p:nvPr/>
+            </p:nvSpPr>
+            <p:spPr>
+              <a:xfrm>
+                <a:off x="9585027" y="1703999"/>
+                <a:ext cx="184731" cy="230832"/>
+              </a:xfrm>
+              <a:prstGeom prst="rect">
+                <a:avLst/>
+              </a:prstGeom>
+              <a:noFill/>
+            </p:spPr>
+            <p:txBody>
+              <a:bodyPr wrap="none" rtlCol="0">
+                <a:spAutoFit/>
+              </a:bodyPr>
+              <a:lstStyle/>
+              <a:p>
+                <a:pPr/>
+                <a:endParaRPr lang="zh-CN" altLang="en-US" sz="900" dirty="0"/>
+              </a:p>
+            </p:txBody>
+          </p:sp>
+          <p:grpSp>
+            <p:nvGrpSpPr>
+              <p:cNvPr id="32" name="组合 31">
+                <a:extLst>
+                  <a:ext uri="{FF2B5EF4-FFF2-40B4-BE49-F238E27FC236}">
+                    <a16:creationId xmlns:a16="http://schemas.microsoft.com/office/drawing/2014/main" id="{3C477CEE-B424-43C9-AC58-2FFDB5D7B69A}"/>
+                  </a:ext>
+                </a:extLst>
+              </p:cNvPr>
+              <p:cNvGrpSpPr/>
+              <p:nvPr/>
+            </p:nvGrpSpPr>
+            <p:grpSpPr>
+              <a:xfrm>
+                <a:off x="7088511" y="4909056"/>
+                <a:ext cx="1605579" cy="571501"/>
+                <a:chOff x="588051" y="5959685"/>
+                <a:chExt cx="943567" cy="223748"/>
+              </a:xfrm>
+            </p:grpSpPr>
+            <p:sp>
+              <p:nvSpPr>
+                <p:cNvPr id="26" name="矩形: 圆角 25">
+                  <a:extLst>
+                    <a:ext uri="{FF2B5EF4-FFF2-40B4-BE49-F238E27FC236}">
+                      <a16:creationId xmlns:a16="http://schemas.microsoft.com/office/drawing/2014/main" id="{27E0080A-BF62-49E5-A290-7AE6CCFAE50F}"/>
+                    </a:ext>
+                  </a:extLst>
+                </p:cNvPr>
+                <p:cNvSpPr/>
+                <p:nvPr/>
+              </p:nvSpPr>
+              <p:spPr>
+                <a:xfrm>
+                  <a:off x="588051" y="5959685"/>
+                  <a:ext cx="943567" cy="223748"/>
+                </a:xfrm>
+                <a:prstGeom prst="roundRect">
+                  <a:avLst/>
+                </a:prstGeom>
+                <a:solidFill>
+                  <a:schemeClr val="bg1"/>
+                </a:solidFill>
+                <a:ln>
+                  <a:solidFill>
+                    <a:schemeClr val="tx1"/>
+                  </a:solidFill>
+                </a:ln>
+              </p:spPr>
+              <p:style>
+                <a:lnRef idx="2">
+                  <a:schemeClr val="accent1">
+                    <a:shade val="50000"/>
+                  </a:schemeClr>
+                </a:lnRef>
+                <a:fillRef idx="1">
+                  <a:schemeClr val="accent1"/>
+                </a:fillRef>
+                <a:effectRef idx="0">
+                  <a:schemeClr val="accent1"/>
+                </a:effectRef>
+                <a:fontRef idx="minor">
+                  <a:schemeClr val="lt1"/>
+                </a:fontRef>
+              </p:style>
+              <p:txBody>
+                <a:bodyPr rtlCol="0" anchor="ctr"/>
+                <a:lstStyle/>
+                <a:p>
+                  <a:pPr algn="ctr"/>
+                  <a:endParaRPr lang="zh-CN" altLang="en-US" dirty="0"/>
+                </a:p>
+              </p:txBody>
+            </p:sp>
+            <p:sp>
+              <p:nvSpPr>
+                <p:cNvPr id="367" name="文本框 366">
+                  <a:extLst>
+                    <a:ext uri="{FF2B5EF4-FFF2-40B4-BE49-F238E27FC236}">
+                      <a16:creationId xmlns:a16="http://schemas.microsoft.com/office/drawing/2014/main" id="{1B1ACAB4-017D-4B59-AE48-809480DF3C15}"/>
+                    </a:ext>
+                  </a:extLst>
+                </p:cNvPr>
+                <p:cNvSpPr txBox="1"/>
+                <p:nvPr/>
+              </p:nvSpPr>
+              <p:spPr>
+                <a:xfrm>
+                  <a:off x="600003" y="5984255"/>
+                  <a:ext cx="927331" cy="180746"/>
+                </a:xfrm>
+                <a:prstGeom prst="rect">
+                  <a:avLst/>
+                </a:prstGeom>
+                <a:noFill/>
+              </p:spPr>
+              <p:txBody>
+                <a:bodyPr wrap="square" rtlCol="0">
+                  <a:spAutoFit/>
+                </a:bodyPr>
+                <a:lstStyle/>
+                <a:p>
+                  <a:r>
+                    <a:rPr lang="zh-CN" altLang="en-US" sz="1200" b="1" dirty="0"/>
+                    <a:t>③</a:t>
+                  </a:r>
+                  <a:r>
+                    <a:rPr lang="zh-CN" altLang="en-US" sz="1200" dirty="0"/>
+                    <a:t>计算并执行</a:t>
+                  </a:r>
+                  <a:r>
+                    <a:rPr lang="en-US" altLang="zh-CN" sz="1200" dirty="0"/>
+                    <a:t>MBST-APF</a:t>
+                  </a:r>
+                  <a:r>
+                    <a:rPr lang="zh-CN" altLang="en-US" sz="1200" dirty="0"/>
+                    <a:t>单步规划移动</a:t>
+                  </a:r>
+                </a:p>
+              </p:txBody>
+            </p:sp>
+          </p:grpSp>
+          <p:sp>
+            <p:nvSpPr>
+              <p:cNvPr id="483" name="文本框 482">
+                <a:extLst>
+                  <a:ext uri="{FF2B5EF4-FFF2-40B4-BE49-F238E27FC236}">
+                    <a16:creationId xmlns:a16="http://schemas.microsoft.com/office/drawing/2014/main" id="{E11A632F-599E-4335-B56D-7EA07DD37E62}"/>
+                  </a:ext>
+                </a:extLst>
+              </p:cNvPr>
+              <p:cNvSpPr txBox="1"/>
+              <p:nvPr/>
+            </p:nvSpPr>
+            <p:spPr>
+              <a:xfrm>
+                <a:off x="9345465" y="2239126"/>
+                <a:ext cx="360998" cy="276999"/>
+              </a:xfrm>
+              <a:prstGeom prst="rect">
+                <a:avLst/>
+              </a:prstGeom>
+              <a:noFill/>
+            </p:spPr>
+            <p:txBody>
+              <a:bodyPr wrap="square" rtlCol="0">
+                <a:spAutoFit/>
+              </a:bodyPr>
+              <a:lstStyle/>
+              <a:p>
+                <a:endParaRPr lang="zh-CN" altLang="en-US" sz="1200" dirty="0"/>
+              </a:p>
+            </p:txBody>
+          </p:sp>
+          <p:cxnSp>
+            <p:nvCxnSpPr>
+              <p:cNvPr id="530" name="直接连接符 529">
+                <a:extLst>
+                  <a:ext uri="{FF2B5EF4-FFF2-40B4-BE49-F238E27FC236}">
+                    <a16:creationId xmlns:a16="http://schemas.microsoft.com/office/drawing/2014/main" id="{B3C9DAEF-8513-42E4-A490-5FAE0BA739FA}"/>
+                  </a:ext>
+                </a:extLst>
+              </p:cNvPr>
+              <p:cNvCxnSpPr>
+                <a:cxnSpLocks/>
+                <a:stCxn id="515" idx="2"/>
+                <a:endCxn id="606" idx="4"/>
+              </p:cNvCxnSpPr>
+              <p:nvPr/>
+            </p:nvCxnSpPr>
+            <p:spPr>
+              <a:xfrm flipH="1">
+                <a:off x="613339" y="2857695"/>
+                <a:ext cx="287655" cy="2978211"/>
+              </a:xfrm>
+              <a:prstGeom prst="line">
+                <a:avLst/>
+              </a:prstGeom>
+              <a:ln>
+                <a:solidFill>
+                  <a:srgbClr val="FFC000"/>
+                </a:solidFill>
+              </a:ln>
+            </p:spPr>
+            <p:style>
+              <a:lnRef idx="1">
+                <a:schemeClr val="accent1"/>
+              </a:lnRef>
+              <a:fillRef idx="0">
+                <a:schemeClr val="accent1"/>
+              </a:fillRef>
+              <a:effectRef idx="0">
+                <a:schemeClr val="accent1"/>
+              </a:effectRef>
+              <a:fontRef idx="minor">
+                <a:schemeClr val="tx1"/>
+              </a:fontRef>
+            </p:style>
+          </p:cxnSp>
+          <p:grpSp>
+            <p:nvGrpSpPr>
+              <p:cNvPr id="623" name="组合 622">
+                <a:extLst>
+                  <a:ext uri="{FF2B5EF4-FFF2-40B4-BE49-F238E27FC236}">
+                    <a16:creationId xmlns:a16="http://schemas.microsoft.com/office/drawing/2014/main" id="{54FFE5ED-064A-4585-A70F-40D28E9DEE9F}"/>
+                  </a:ext>
+                </a:extLst>
+              </p:cNvPr>
+              <p:cNvGrpSpPr/>
+              <p:nvPr/>
+            </p:nvGrpSpPr>
+            <p:grpSpPr>
+              <a:xfrm>
+                <a:off x="233076" y="654841"/>
+                <a:ext cx="6310057" cy="4845341"/>
+                <a:chOff x="-243662" y="1238924"/>
+                <a:chExt cx="6310057" cy="4845341"/>
+              </a:xfrm>
+            </p:grpSpPr>
+            <p:sp>
+              <p:nvSpPr>
+                <p:cNvPr id="509" name="平行四边形 508">
+                  <a:extLst>
+                    <a:ext uri="{FF2B5EF4-FFF2-40B4-BE49-F238E27FC236}">
+                      <a16:creationId xmlns:a16="http://schemas.microsoft.com/office/drawing/2014/main" id="{495D0F38-C2C4-420A-9851-5F9B8A1B9F9C}"/>
+                    </a:ext>
+                  </a:extLst>
+                </p:cNvPr>
+                <p:cNvSpPr/>
+                <p:nvPr/>
+              </p:nvSpPr>
+              <p:spPr>
+                <a:xfrm>
+                  <a:off x="-243662" y="1238924"/>
+                  <a:ext cx="6310057" cy="2289489"/>
+                </a:xfrm>
+                <a:prstGeom prst="parallelogram">
+                  <a:avLst>
+                    <a:gd name="adj" fmla="val 88318"/>
+                  </a:avLst>
+                </a:prstGeom>
+                <a:solidFill>
+                  <a:schemeClr val="accent4">
+                    <a:lumMod val="20000"/>
+                    <a:lumOff val="80000"/>
+                  </a:schemeClr>
+                </a:solidFill>
+                <a:ln>
+                  <a:solidFill>
+                    <a:schemeClr val="accent4">
+                      <a:lumMod val="20000"/>
+                      <a:lumOff val="80000"/>
+                    </a:schemeClr>
+                  </a:solidFill>
+                </a:ln>
+              </p:spPr>
+              <p:style>
+                <a:lnRef idx="2">
+                  <a:schemeClr val="accent1">
+                    <a:shade val="50000"/>
+                  </a:schemeClr>
+                </a:lnRef>
+                <a:fillRef idx="1">
+                  <a:schemeClr val="accent1"/>
+                </a:fillRef>
+                <a:effectRef idx="0">
+                  <a:schemeClr val="accent1"/>
+                </a:effectRef>
+                <a:fontRef idx="minor">
+                  <a:schemeClr val="lt1"/>
+                </a:fontRef>
+              </p:style>
+              <p:txBody>
+                <a:bodyPr rtlCol="0" anchor="ctr"/>
+                <a:lstStyle/>
+                <a:p>
+                  <a:pPr algn="ctr"/>
+                  <a:endParaRPr lang="zh-CN" altLang="en-US" dirty="0"/>
+                </a:p>
+              </p:txBody>
+            </p:sp>
+            <p:pic>
+              <p:nvPicPr>
+                <p:cNvPr id="513" name="图片 512">
+                  <a:extLst>
+                    <a:ext uri="{FF2B5EF4-FFF2-40B4-BE49-F238E27FC236}">
+                      <a16:creationId xmlns:a16="http://schemas.microsoft.com/office/drawing/2014/main" id="{B6C3CDCB-7E7D-4EC2-B213-0DE569033EBF}"/>
+                    </a:ext>
+                  </a:extLst>
+                </p:cNvPr>
+                <p:cNvPicPr>
+                  <a:picLocks noChangeAspect="1"/>
+                </p:cNvPicPr>
+                <p:nvPr/>
+              </p:nvPicPr>
+              <p:blipFill>
+                <a:blip r:embed="rId3">
+                  <a:extLst>
+                    <a:ext uri="{28A0092B-C50C-407E-A947-70E740481C1C}">
+                      <a14:useLocalDpi xmlns:a14="http://schemas.microsoft.com/office/drawing/2010/main" val="0"/>
+                    </a:ext>
+                  </a:extLst>
+                </a:blip>
+                <a:stretch>
+                  <a:fillRect/>
+                </a:stretch>
+              </p:blipFill>
+              <p:spPr>
+                <a:xfrm>
+                  <a:off x="707482" y="2624961"/>
+                  <a:ext cx="304800" cy="304800"/>
+                </a:xfrm>
+                <a:prstGeom prst="rect">
+                  <a:avLst/>
+                </a:prstGeom>
+              </p:spPr>
+            </p:pic>
+            <p:pic>
+              <p:nvPicPr>
+                <p:cNvPr id="515" name="图片 514">
+                  <a:extLst>
+                    <a:ext uri="{FF2B5EF4-FFF2-40B4-BE49-F238E27FC236}">
+                      <a16:creationId xmlns:a16="http://schemas.microsoft.com/office/drawing/2014/main" id="{450A2A86-7142-43A1-85D0-0F1487AEA48C}"/>
+                    </a:ext>
+                  </a:extLst>
+                </p:cNvPr>
+                <p:cNvPicPr>
+                  <a:picLocks noChangeAspect="1"/>
+                </p:cNvPicPr>
+                <p:nvPr/>
+              </p:nvPicPr>
+              <p:blipFill>
+                <a:blip r:embed="rId3">
+                  <a:extLst>
+                    <a:ext uri="{28A0092B-C50C-407E-A947-70E740481C1C}">
+                      <a14:useLocalDpi xmlns:a14="http://schemas.microsoft.com/office/drawing/2010/main" val="0"/>
+                    </a:ext>
+                  </a:extLst>
+                </a:blip>
+                <a:stretch>
+                  <a:fillRect/>
+                </a:stretch>
+              </p:blipFill>
+              <p:spPr>
+                <a:xfrm>
+                  <a:off x="271856" y="3136978"/>
+                  <a:ext cx="304800" cy="304800"/>
+                </a:xfrm>
+                <a:prstGeom prst="rect">
+                  <a:avLst/>
+                </a:prstGeom>
+              </p:spPr>
+            </p:pic>
+            <p:pic>
+              <p:nvPicPr>
+                <p:cNvPr id="516" name="图片 515">
+                  <a:extLst>
+                    <a:ext uri="{FF2B5EF4-FFF2-40B4-BE49-F238E27FC236}">
+                      <a16:creationId xmlns:a16="http://schemas.microsoft.com/office/drawing/2014/main" id="{FD79633A-0ACD-46DF-8619-FC8F2747372F}"/>
+                    </a:ext>
+                  </a:extLst>
+                </p:cNvPr>
+                <p:cNvPicPr>
+                  <a:picLocks noChangeAspect="1"/>
+                </p:cNvPicPr>
+                <p:nvPr/>
+              </p:nvPicPr>
+              <p:blipFill>
+                <a:blip r:embed="rId3">
+                  <a:extLst>
+                    <a:ext uri="{28A0092B-C50C-407E-A947-70E740481C1C}">
+                      <a14:useLocalDpi xmlns:a14="http://schemas.microsoft.com/office/drawing/2010/main" val="0"/>
+                    </a:ext>
+                  </a:extLst>
+                </a:blip>
+                <a:stretch>
+                  <a:fillRect/>
+                </a:stretch>
+              </p:blipFill>
+              <p:spPr>
+                <a:xfrm>
+                  <a:off x="1127401" y="3063454"/>
+                  <a:ext cx="304800" cy="304800"/>
+                </a:xfrm>
+                <a:prstGeom prst="rect">
+                  <a:avLst/>
+                </a:prstGeom>
+              </p:spPr>
+            </p:pic>
+            <p:sp>
+              <p:nvSpPr>
+                <p:cNvPr id="519" name="平行四边形 518">
+                  <a:extLst>
+                    <a:ext uri="{FF2B5EF4-FFF2-40B4-BE49-F238E27FC236}">
+                      <a16:creationId xmlns:a16="http://schemas.microsoft.com/office/drawing/2014/main" id="{D1BC4AB5-56F8-4BC6-B4C4-008A67EBA2D9}"/>
+                    </a:ext>
+                  </a:extLst>
+                </p:cNvPr>
+                <p:cNvSpPr/>
+                <p:nvPr/>
+              </p:nvSpPr>
+              <p:spPr>
+                <a:xfrm>
+                  <a:off x="1743416" y="3282587"/>
+                  <a:ext cx="525780" cy="251460"/>
+                </a:xfrm>
+                <a:prstGeom prst="parallelogram">
+                  <a:avLst>
+                    <a:gd name="adj" fmla="val 73160"/>
+                  </a:avLst>
+                </a:prstGeom>
+                <a:solidFill>
+                  <a:schemeClr val="accent1">
+                    <a:lumMod val="40000"/>
+                    <a:lumOff val="60000"/>
+                  </a:schemeClr>
+                </a:solidFill>
+                <a:ln>
+                  <a:solidFill>
+                    <a:schemeClr val="accent1">
+                      <a:lumMod val="40000"/>
+                      <a:lumOff val="60000"/>
+                    </a:schemeClr>
+                  </a:solidFill>
+                </a:ln>
+              </p:spPr>
+              <p:style>
+                <a:lnRef idx="2">
+                  <a:schemeClr val="accent1">
+                    <a:shade val="50000"/>
+                  </a:schemeClr>
+                </a:lnRef>
+                <a:fillRef idx="1">
+                  <a:schemeClr val="accent1"/>
+                </a:fillRef>
+                <a:effectRef idx="0">
+                  <a:schemeClr val="accent1"/>
+                </a:effectRef>
+                <a:fontRef idx="minor">
+                  <a:schemeClr val="lt1"/>
+                </a:fontRef>
+              </p:style>
+              <p:txBody>
+                <a:bodyPr rtlCol="0" anchor="ctr"/>
+                <a:lstStyle/>
+                <a:p>
+                  <a:pPr algn="ctr"/>
+                  <a:endParaRPr lang="zh-CN" altLang="en-US" dirty="0"/>
+                </a:p>
+              </p:txBody>
+            </p:sp>
+            <p:sp>
+              <p:nvSpPr>
+                <p:cNvPr id="520" name="平行四边形 519">
+                  <a:extLst>
+                    <a:ext uri="{FF2B5EF4-FFF2-40B4-BE49-F238E27FC236}">
+                      <a16:creationId xmlns:a16="http://schemas.microsoft.com/office/drawing/2014/main" id="{4EB1949E-3B9F-445B-93B6-EDD7BD6E0B2B}"/>
+                    </a:ext>
+                  </a:extLst>
+                </p:cNvPr>
+                <p:cNvSpPr/>
+                <p:nvPr/>
+              </p:nvSpPr>
+              <p:spPr>
+                <a:xfrm>
+                  <a:off x="3640796" y="3023507"/>
+                  <a:ext cx="510540" cy="236220"/>
+                </a:xfrm>
+                <a:prstGeom prst="parallelogram">
+                  <a:avLst>
+                    <a:gd name="adj" fmla="val 75724"/>
+                  </a:avLst>
+                </a:prstGeom>
+                <a:solidFill>
+                  <a:schemeClr val="accent1">
+                    <a:lumMod val="40000"/>
+                    <a:lumOff val="60000"/>
+                  </a:schemeClr>
+                </a:solidFill>
+                <a:ln>
+                  <a:solidFill>
+                    <a:schemeClr val="accent1">
+                      <a:lumMod val="40000"/>
+                      <a:lumOff val="60000"/>
+                    </a:schemeClr>
+                  </a:solidFill>
+                </a:ln>
+              </p:spPr>
+              <p:style>
+                <a:lnRef idx="2">
+                  <a:schemeClr val="accent1">
+                    <a:shade val="50000"/>
+                  </a:schemeClr>
+                </a:lnRef>
+                <a:fillRef idx="1">
+                  <a:schemeClr val="accent1"/>
+                </a:fillRef>
+                <a:effectRef idx="0">
+                  <a:schemeClr val="accent1"/>
+                </a:effectRef>
+                <a:fontRef idx="minor">
+                  <a:schemeClr val="lt1"/>
+                </a:fontRef>
+              </p:style>
+              <p:txBody>
+                <a:bodyPr rtlCol="0" anchor="ctr"/>
+                <a:lstStyle/>
+                <a:p>
+                  <a:pPr algn="ctr"/>
+                  <a:endParaRPr lang="zh-CN" altLang="en-US"/>
+                </a:p>
+              </p:txBody>
+            </p:sp>
+            <p:sp>
+              <p:nvSpPr>
+                <p:cNvPr id="521" name="平行四边形 520">
+                  <a:extLst>
+                    <a:ext uri="{FF2B5EF4-FFF2-40B4-BE49-F238E27FC236}">
+                      <a16:creationId xmlns:a16="http://schemas.microsoft.com/office/drawing/2014/main" id="{252C5B35-42C1-44F7-8A8F-2A2E8A1C18E2}"/>
+                    </a:ext>
+                  </a:extLst>
+                </p:cNvPr>
+                <p:cNvSpPr/>
+                <p:nvPr/>
+              </p:nvSpPr>
+              <p:spPr>
+                <a:xfrm>
+                  <a:off x="1065236" y="2025287"/>
+                  <a:ext cx="373380" cy="205740"/>
+                </a:xfrm>
+                <a:prstGeom prst="parallelogram">
+                  <a:avLst>
+                    <a:gd name="adj" fmla="val 75958"/>
+                  </a:avLst>
+                </a:prstGeom>
+                <a:solidFill>
+                  <a:schemeClr val="accent1">
+                    <a:lumMod val="40000"/>
+                    <a:lumOff val="60000"/>
+                  </a:schemeClr>
+                </a:solidFill>
+                <a:ln>
+                  <a:solidFill>
+                    <a:schemeClr val="accent1">
+                      <a:lumMod val="40000"/>
+                      <a:lumOff val="60000"/>
+                    </a:schemeClr>
+                  </a:solidFill>
+                </a:ln>
+              </p:spPr>
+              <p:style>
+                <a:lnRef idx="2">
+                  <a:schemeClr val="accent1">
+                    <a:shade val="50000"/>
+                  </a:schemeClr>
+                </a:lnRef>
+                <a:fillRef idx="1">
+                  <a:schemeClr val="accent1"/>
+                </a:fillRef>
+                <a:effectRef idx="0">
+                  <a:schemeClr val="accent1"/>
+                </a:effectRef>
+                <a:fontRef idx="minor">
+                  <a:schemeClr val="lt1"/>
+                </a:fontRef>
+              </p:style>
+              <p:txBody>
+                <a:bodyPr rtlCol="0" anchor="ctr"/>
+                <a:lstStyle/>
+                <a:p>
+                  <a:pPr algn="ctr"/>
+                  <a:endParaRPr lang="zh-CN" altLang="en-US"/>
+                </a:p>
+              </p:txBody>
+            </p:sp>
+            <p:sp>
+              <p:nvSpPr>
+                <p:cNvPr id="522" name="平行四边形 521">
+                  <a:extLst>
+                    <a:ext uri="{FF2B5EF4-FFF2-40B4-BE49-F238E27FC236}">
+                      <a16:creationId xmlns:a16="http://schemas.microsoft.com/office/drawing/2014/main" id="{6E7E4B67-F912-450E-AC84-47BEC84DA7AA}"/>
+                    </a:ext>
+                  </a:extLst>
+                </p:cNvPr>
+                <p:cNvSpPr/>
+                <p:nvPr/>
+              </p:nvSpPr>
+              <p:spPr>
+                <a:xfrm>
+                  <a:off x="4559006" y="2208167"/>
+                  <a:ext cx="632460" cy="251460"/>
+                </a:xfrm>
+                <a:prstGeom prst="parallelogram">
+                  <a:avLst>
+                    <a:gd name="adj" fmla="val 87845"/>
+                  </a:avLst>
+                </a:prstGeom>
+                <a:solidFill>
+                  <a:schemeClr val="accent1">
+                    <a:lumMod val="40000"/>
+                    <a:lumOff val="60000"/>
+                  </a:schemeClr>
+                </a:solidFill>
+                <a:ln>
+                  <a:solidFill>
+                    <a:schemeClr val="accent1">
+                      <a:lumMod val="40000"/>
+                      <a:lumOff val="60000"/>
+                    </a:schemeClr>
+                  </a:solidFill>
+                </a:ln>
+              </p:spPr>
+              <p:style>
+                <a:lnRef idx="2">
+                  <a:schemeClr val="accent1">
+                    <a:shade val="50000"/>
+                  </a:schemeClr>
+                </a:lnRef>
+                <a:fillRef idx="1">
+                  <a:schemeClr val="accent1"/>
+                </a:fillRef>
+                <a:effectRef idx="0">
+                  <a:schemeClr val="accent1"/>
+                </a:effectRef>
+                <a:fontRef idx="minor">
+                  <a:schemeClr val="lt1"/>
+                </a:fontRef>
+              </p:style>
+              <p:txBody>
+                <a:bodyPr rtlCol="0" anchor="ctr"/>
+                <a:lstStyle/>
+                <a:p>
+                  <a:pPr algn="ctr"/>
+                  <a:endParaRPr lang="zh-CN" altLang="en-US"/>
+                </a:p>
+              </p:txBody>
+            </p:sp>
+            <p:sp>
+              <p:nvSpPr>
+                <p:cNvPr id="523" name="平行四边形 522">
+                  <a:extLst>
+                    <a:ext uri="{FF2B5EF4-FFF2-40B4-BE49-F238E27FC236}">
+                      <a16:creationId xmlns:a16="http://schemas.microsoft.com/office/drawing/2014/main" id="{D7A203F1-C8A7-434A-9F29-113E6A6BC0C8}"/>
+                    </a:ext>
+                  </a:extLst>
+                </p:cNvPr>
+                <p:cNvSpPr/>
+                <p:nvPr/>
+              </p:nvSpPr>
+              <p:spPr>
+                <a:xfrm>
+                  <a:off x="2147276" y="1834787"/>
+                  <a:ext cx="464820" cy="251460"/>
+                </a:xfrm>
+                <a:prstGeom prst="parallelogram">
+                  <a:avLst>
+                    <a:gd name="adj" fmla="val 65468"/>
+                  </a:avLst>
+                </a:prstGeom>
+                <a:solidFill>
+                  <a:schemeClr val="accent1">
+                    <a:lumMod val="40000"/>
+                    <a:lumOff val="60000"/>
+                  </a:schemeClr>
+                </a:solidFill>
+                <a:ln>
+                  <a:solidFill>
+                    <a:schemeClr val="accent1">
+                      <a:lumMod val="40000"/>
+                      <a:lumOff val="60000"/>
+                    </a:schemeClr>
+                  </a:solidFill>
+                </a:ln>
+              </p:spPr>
+              <p:style>
+                <a:lnRef idx="2">
+                  <a:schemeClr val="accent1">
+                    <a:shade val="50000"/>
+                  </a:schemeClr>
+                </a:lnRef>
+                <a:fillRef idx="1">
+                  <a:schemeClr val="accent1"/>
+                </a:fillRef>
+                <a:effectRef idx="0">
+                  <a:schemeClr val="accent1"/>
+                </a:effectRef>
+                <a:fontRef idx="minor">
+                  <a:schemeClr val="lt1"/>
+                </a:fontRef>
+              </p:style>
+              <p:txBody>
+                <a:bodyPr rtlCol="0" anchor="ctr"/>
+                <a:lstStyle/>
+                <a:p>
+                  <a:pPr algn="ctr"/>
+                  <a:endParaRPr lang="zh-CN" altLang="en-US" dirty="0"/>
+                </a:p>
+              </p:txBody>
+            </p:sp>
+            <p:sp>
+              <p:nvSpPr>
+                <p:cNvPr id="524" name="平行四边形 523">
+                  <a:extLst>
+                    <a:ext uri="{FF2B5EF4-FFF2-40B4-BE49-F238E27FC236}">
+                      <a16:creationId xmlns:a16="http://schemas.microsoft.com/office/drawing/2014/main" id="{75DD4F33-C659-446A-ACEC-A55EAF8221EA}"/>
+                    </a:ext>
+                  </a:extLst>
+                </p:cNvPr>
+                <p:cNvSpPr/>
+                <p:nvPr/>
+              </p:nvSpPr>
+              <p:spPr>
+                <a:xfrm>
+                  <a:off x="3473156" y="1529987"/>
+                  <a:ext cx="236220" cy="137160"/>
+                </a:xfrm>
+                <a:prstGeom prst="parallelogram">
+                  <a:avLst>
+                    <a:gd name="adj" fmla="val 70516"/>
+                  </a:avLst>
+                </a:prstGeom>
+                <a:solidFill>
+                  <a:schemeClr val="accent1">
+                    <a:lumMod val="40000"/>
+                    <a:lumOff val="60000"/>
+                  </a:schemeClr>
+                </a:solidFill>
+                <a:ln>
+                  <a:solidFill>
+                    <a:schemeClr val="accent1">
+                      <a:lumMod val="40000"/>
+                      <a:lumOff val="60000"/>
+                    </a:schemeClr>
+                  </a:solidFill>
+                </a:ln>
+              </p:spPr>
+              <p:style>
+                <a:lnRef idx="2">
+                  <a:schemeClr val="accent1">
+                    <a:shade val="50000"/>
+                  </a:schemeClr>
+                </a:lnRef>
+                <a:fillRef idx="1">
+                  <a:schemeClr val="accent1"/>
+                </a:fillRef>
+                <a:effectRef idx="0">
+                  <a:schemeClr val="accent1"/>
+                </a:effectRef>
+                <a:fontRef idx="minor">
+                  <a:schemeClr val="lt1"/>
+                </a:fontRef>
+              </p:style>
+              <p:txBody>
+                <a:bodyPr rtlCol="0" anchor="ctr"/>
+                <a:lstStyle/>
+                <a:p>
+                  <a:pPr algn="ctr"/>
+                  <a:endParaRPr lang="zh-CN" altLang="en-US"/>
+                </a:p>
+              </p:txBody>
+            </p:sp>
+            <p:sp>
+              <p:nvSpPr>
+                <p:cNvPr id="525" name="椭圆 524">
+                  <a:extLst>
+                    <a:ext uri="{FF2B5EF4-FFF2-40B4-BE49-F238E27FC236}">
+                      <a16:creationId xmlns:a16="http://schemas.microsoft.com/office/drawing/2014/main" id="{B9FB6CEA-2A36-45F9-9A4C-17CA32CDD5E8}"/>
+                    </a:ext>
+                  </a:extLst>
+                </p:cNvPr>
+                <p:cNvSpPr/>
+                <p:nvPr/>
+              </p:nvSpPr>
+              <p:spPr>
+                <a:xfrm rot="21014316">
+                  <a:off x="1952904" y="1797016"/>
+                  <a:ext cx="1790162" cy="1095951"/>
+                </a:xfrm>
+                <a:prstGeom prst="ellipse">
+                  <a:avLst/>
+                </a:prstGeom>
+                <a:noFill/>
+                <a:ln>
+                  <a:solidFill>
+                    <a:srgbClr val="C00000"/>
+                  </a:solidFill>
+                  <a:prstDash val="sysDash"/>
+                </a:ln>
+              </p:spPr>
+              <p:style>
+                <a:lnRef idx="2">
+                  <a:schemeClr val="accent1">
+                    <a:shade val="50000"/>
+                  </a:schemeClr>
+                </a:lnRef>
+                <a:fillRef idx="1">
+                  <a:schemeClr val="accent1"/>
+                </a:fillRef>
+                <a:effectRef idx="0">
+                  <a:schemeClr val="accent1"/>
+                </a:effectRef>
+                <a:fontRef idx="minor">
+                  <a:schemeClr val="lt1"/>
+                </a:fontRef>
+              </p:style>
+              <p:txBody>
+                <a:bodyPr rtlCol="0" anchor="ctr"/>
+                <a:lstStyle/>
+                <a:p>
+                  <a:pPr algn="ctr"/>
+                  <a:endParaRPr lang="zh-CN" altLang="en-US"/>
+                </a:p>
+              </p:txBody>
+            </p:sp>
+            <p:sp>
+              <p:nvSpPr>
+                <p:cNvPr id="526" name="等腰三角形 525">
+                  <a:extLst>
+                    <a:ext uri="{FF2B5EF4-FFF2-40B4-BE49-F238E27FC236}">
+                      <a16:creationId xmlns:a16="http://schemas.microsoft.com/office/drawing/2014/main" id="{D070F142-A2D6-4346-A177-17F0D7D5DCA4}"/>
+                    </a:ext>
+                  </a:extLst>
+                </p:cNvPr>
+                <p:cNvSpPr/>
+                <p:nvPr/>
+              </p:nvSpPr>
+              <p:spPr>
+                <a:xfrm>
+                  <a:off x="2794976" y="2284367"/>
+                  <a:ext cx="99060" cy="99060"/>
+                </a:xfrm>
+                <a:prstGeom prst="triangle">
+                  <a:avLst/>
+                </a:prstGeom>
+                <a:solidFill>
+                  <a:srgbClr val="C00000"/>
+                </a:solidFill>
+                <a:ln>
+                  <a:solidFill>
+                    <a:srgbClr val="C00000"/>
+                  </a:solidFill>
+                </a:ln>
+              </p:spPr>
+              <p:style>
+                <a:lnRef idx="2">
+                  <a:schemeClr val="accent1">
+                    <a:shade val="50000"/>
+                  </a:schemeClr>
+                </a:lnRef>
+                <a:fillRef idx="1">
+                  <a:schemeClr val="accent1"/>
+                </a:fillRef>
+                <a:effectRef idx="0">
+                  <a:schemeClr val="accent1"/>
+                </a:effectRef>
+                <a:fontRef idx="minor">
+                  <a:schemeClr val="lt1"/>
+                </a:fontRef>
+              </p:style>
+              <p:txBody>
+                <a:bodyPr rtlCol="0" anchor="ctr"/>
+                <a:lstStyle/>
+                <a:p>
+                  <a:pPr algn="ctr"/>
+                  <a:endParaRPr lang="zh-CN" altLang="en-US"/>
+                </a:p>
+              </p:txBody>
+            </p:sp>
+            <p:sp>
+              <p:nvSpPr>
+                <p:cNvPr id="527" name="等腰三角形 526">
+                  <a:extLst>
+                    <a:ext uri="{FF2B5EF4-FFF2-40B4-BE49-F238E27FC236}">
+                      <a16:creationId xmlns:a16="http://schemas.microsoft.com/office/drawing/2014/main" id="{0A8CA655-7784-41DC-9519-29D2974A776C}"/>
+                    </a:ext>
+                  </a:extLst>
+                </p:cNvPr>
+                <p:cNvSpPr/>
+                <p:nvPr/>
+              </p:nvSpPr>
+              <p:spPr>
+                <a:xfrm>
+                  <a:off x="5637236" y="1282337"/>
+                  <a:ext cx="99060" cy="99060"/>
+                </a:xfrm>
+                <a:prstGeom prst="triangle">
+                  <a:avLst/>
+                </a:prstGeom>
+                <a:solidFill>
+                  <a:srgbClr val="92D050"/>
+                </a:solidFill>
+                <a:ln>
+                  <a:solidFill>
+                    <a:srgbClr val="92D050"/>
+                  </a:solidFill>
+                </a:ln>
+              </p:spPr>
+              <p:style>
+                <a:lnRef idx="2">
+                  <a:schemeClr val="accent1">
+                    <a:shade val="50000"/>
+                  </a:schemeClr>
+                </a:lnRef>
+                <a:fillRef idx="1">
+                  <a:schemeClr val="accent1"/>
+                </a:fillRef>
+                <a:effectRef idx="0">
+                  <a:schemeClr val="accent1"/>
+                </a:effectRef>
+                <a:fontRef idx="minor">
+                  <a:schemeClr val="lt1"/>
+                </a:fontRef>
+              </p:style>
+              <p:txBody>
+                <a:bodyPr rtlCol="0" anchor="ctr"/>
+                <a:lstStyle/>
+                <a:p>
+                  <a:pPr algn="ctr"/>
+                  <a:endParaRPr lang="zh-CN" altLang="en-US"/>
+                </a:p>
+              </p:txBody>
+            </p:sp>
+            <p:sp>
+              <p:nvSpPr>
+                <p:cNvPr id="528" name="平行四边形 527">
+                  <a:extLst>
+                    <a:ext uri="{FF2B5EF4-FFF2-40B4-BE49-F238E27FC236}">
+                      <a16:creationId xmlns:a16="http://schemas.microsoft.com/office/drawing/2014/main" id="{7DB1E4C7-D72F-4B32-9118-10FAF9DEC06E}"/>
+                    </a:ext>
+                  </a:extLst>
+                </p:cNvPr>
+                <p:cNvSpPr/>
+                <p:nvPr/>
+              </p:nvSpPr>
+              <p:spPr>
+                <a:xfrm>
+                  <a:off x="2619716" y="2688227"/>
+                  <a:ext cx="388620" cy="220980"/>
+                </a:xfrm>
+                <a:prstGeom prst="parallelogram">
+                  <a:avLst>
+                    <a:gd name="adj" fmla="val 55212"/>
+                  </a:avLst>
+                </a:prstGeom>
+                <a:solidFill>
+                  <a:schemeClr val="accent1">
+                    <a:lumMod val="40000"/>
+                    <a:lumOff val="60000"/>
+                  </a:schemeClr>
+                </a:solidFill>
+                <a:ln>
+                  <a:solidFill>
+                    <a:schemeClr val="accent1">
+                      <a:lumMod val="40000"/>
+                      <a:lumOff val="60000"/>
+                    </a:schemeClr>
+                  </a:solidFill>
+                </a:ln>
+              </p:spPr>
+              <p:style>
+                <a:lnRef idx="2">
+                  <a:schemeClr val="accent1">
+                    <a:shade val="50000"/>
+                  </a:schemeClr>
+                </a:lnRef>
+                <a:fillRef idx="1">
+                  <a:schemeClr val="accent1"/>
+                </a:fillRef>
+                <a:effectRef idx="0">
+                  <a:schemeClr val="accent1"/>
+                </a:effectRef>
+                <a:fontRef idx="minor">
+                  <a:schemeClr val="lt1"/>
+                </a:fontRef>
+              </p:style>
+              <p:txBody>
+                <a:bodyPr rtlCol="0" anchor="ctr"/>
+                <a:lstStyle/>
+                <a:p>
+                  <a:pPr algn="ctr"/>
+                  <a:endParaRPr lang="zh-CN" altLang="en-US" dirty="0"/>
+                </a:p>
+              </p:txBody>
+            </p:sp>
+            <p:sp>
+              <p:nvSpPr>
+                <p:cNvPr id="536" name="星形: 五角 535">
+                  <a:extLst>
+                    <a:ext uri="{FF2B5EF4-FFF2-40B4-BE49-F238E27FC236}">
+                      <a16:creationId xmlns:a16="http://schemas.microsoft.com/office/drawing/2014/main" id="{46A3CE48-94DA-40B0-BA23-E6B6766C34E0}"/>
+                    </a:ext>
+                  </a:extLst>
+                </p:cNvPr>
+                <p:cNvSpPr/>
+                <p:nvPr/>
+              </p:nvSpPr>
+              <p:spPr>
+                <a:xfrm rot="1976744">
+                  <a:off x="3194551" y="3236867"/>
+                  <a:ext cx="137160" cy="137160"/>
+                </a:xfrm>
+                <a:prstGeom prst="star5">
+                  <a:avLst/>
+                </a:prstGeom>
+                <a:solidFill>
+                  <a:schemeClr val="accent6">
+                    <a:lumMod val="75000"/>
+                  </a:schemeClr>
+                </a:solidFill>
+                <a:ln>
+                  <a:solidFill>
+                    <a:schemeClr val="accent6">
+                      <a:lumMod val="75000"/>
+                    </a:schemeClr>
+                  </a:solidFill>
+                </a:ln>
+              </p:spPr>
+              <p:style>
+                <a:lnRef idx="2">
+                  <a:schemeClr val="accent1">
+                    <a:shade val="50000"/>
+                  </a:schemeClr>
+                </a:lnRef>
+                <a:fillRef idx="1">
+                  <a:schemeClr val="accent1"/>
+                </a:fillRef>
+                <a:effectRef idx="0">
+                  <a:schemeClr val="accent1"/>
+                </a:effectRef>
+                <a:fontRef idx="minor">
+                  <a:schemeClr val="lt1"/>
+                </a:fontRef>
+              </p:style>
+              <p:txBody>
+                <a:bodyPr rtlCol="0" anchor="ctr"/>
+                <a:lstStyle/>
+                <a:p>
+                  <a:pPr algn="ctr"/>
+                  <a:endParaRPr lang="zh-CN" altLang="en-US"/>
+                </a:p>
+              </p:txBody>
+            </p:sp>
+            <p:sp>
+              <p:nvSpPr>
+                <p:cNvPr id="537" name="星形: 五角 536">
+                  <a:extLst>
+                    <a:ext uri="{FF2B5EF4-FFF2-40B4-BE49-F238E27FC236}">
+                      <a16:creationId xmlns:a16="http://schemas.microsoft.com/office/drawing/2014/main" id="{845B4B5B-FF61-4583-BBCF-D59AAB9FCA3F}"/>
+                    </a:ext>
+                  </a:extLst>
+                </p:cNvPr>
+                <p:cNvSpPr/>
+                <p:nvPr/>
+              </p:nvSpPr>
+              <p:spPr>
+                <a:xfrm>
+                  <a:off x="3971791" y="2619647"/>
+                  <a:ext cx="137160" cy="137160"/>
+                </a:xfrm>
+                <a:prstGeom prst="star5">
+                  <a:avLst/>
+                </a:prstGeom>
+                <a:solidFill>
+                  <a:schemeClr val="accent6">
+                    <a:lumMod val="75000"/>
+                  </a:schemeClr>
+                </a:solidFill>
+                <a:ln>
+                  <a:solidFill>
+                    <a:schemeClr val="accent6">
+                      <a:lumMod val="75000"/>
+                    </a:schemeClr>
+                  </a:solidFill>
+                </a:ln>
+              </p:spPr>
+              <p:style>
+                <a:lnRef idx="2">
+                  <a:schemeClr val="accent1">
+                    <a:shade val="50000"/>
+                  </a:schemeClr>
+                </a:lnRef>
+                <a:fillRef idx="1">
+                  <a:schemeClr val="accent1"/>
+                </a:fillRef>
+                <a:effectRef idx="0">
+                  <a:schemeClr val="accent1"/>
+                </a:effectRef>
+                <a:fontRef idx="minor">
+                  <a:schemeClr val="lt1"/>
+                </a:fontRef>
+              </p:style>
+              <p:txBody>
+                <a:bodyPr rtlCol="0" anchor="ctr"/>
+                <a:lstStyle/>
+                <a:p>
+                  <a:pPr algn="ctr"/>
+                  <a:endParaRPr lang="zh-CN" altLang="en-US"/>
+                </a:p>
+              </p:txBody>
+            </p:sp>
+            <p:sp>
+              <p:nvSpPr>
+                <p:cNvPr id="538" name="星形: 五角 537">
+                  <a:extLst>
+                    <a:ext uri="{FF2B5EF4-FFF2-40B4-BE49-F238E27FC236}">
+                      <a16:creationId xmlns:a16="http://schemas.microsoft.com/office/drawing/2014/main" id="{B7389E18-E6D0-49AA-B308-0D4F418F0679}"/>
+                    </a:ext>
+                  </a:extLst>
+                </p:cNvPr>
+                <p:cNvSpPr/>
+                <p:nvPr/>
+              </p:nvSpPr>
+              <p:spPr>
+                <a:xfrm>
+                  <a:off x="4566151" y="1979567"/>
+                  <a:ext cx="137160" cy="137160"/>
+                </a:xfrm>
+                <a:prstGeom prst="star5">
+                  <a:avLst/>
+                </a:prstGeom>
+                <a:solidFill>
+                  <a:schemeClr val="accent6">
+                    <a:lumMod val="75000"/>
+                  </a:schemeClr>
+                </a:solidFill>
+                <a:ln>
+                  <a:solidFill>
+                    <a:schemeClr val="accent6">
+                      <a:lumMod val="75000"/>
+                    </a:schemeClr>
+                  </a:solidFill>
+                </a:ln>
+              </p:spPr>
+              <p:style>
+                <a:lnRef idx="2">
+                  <a:schemeClr val="accent1">
+                    <a:shade val="50000"/>
+                  </a:schemeClr>
+                </a:lnRef>
+                <a:fillRef idx="1">
+                  <a:schemeClr val="accent1"/>
+                </a:fillRef>
+                <a:effectRef idx="0">
+                  <a:schemeClr val="accent1"/>
+                </a:effectRef>
+                <a:fontRef idx="minor">
+                  <a:schemeClr val="lt1"/>
+                </a:fontRef>
+              </p:style>
+              <p:txBody>
+                <a:bodyPr rtlCol="0" anchor="ctr"/>
+                <a:lstStyle/>
+                <a:p>
+                  <a:pPr algn="ctr"/>
+                  <a:endParaRPr lang="zh-CN" altLang="en-US"/>
+                </a:p>
+              </p:txBody>
+            </p:sp>
+            <p:sp>
+              <p:nvSpPr>
+                <p:cNvPr id="540" name="星形: 五角 539">
+                  <a:extLst>
+                    <a:ext uri="{FF2B5EF4-FFF2-40B4-BE49-F238E27FC236}">
+                      <a16:creationId xmlns:a16="http://schemas.microsoft.com/office/drawing/2014/main" id="{A9E37E7C-CDDD-4323-858B-D9F2B1378320}"/>
+                    </a:ext>
+                  </a:extLst>
+                </p:cNvPr>
+                <p:cNvSpPr/>
+                <p:nvPr/>
+              </p:nvSpPr>
+              <p:spPr>
+                <a:xfrm rot="3684013">
+                  <a:off x="2371627" y="2950590"/>
+                  <a:ext cx="137160" cy="137160"/>
+                </a:xfrm>
+                <a:prstGeom prst="star5">
+                  <a:avLst/>
+                </a:prstGeom>
+                <a:solidFill>
+                  <a:schemeClr val="accent6">
+                    <a:lumMod val="75000"/>
+                  </a:schemeClr>
+                </a:solidFill>
+                <a:ln>
+                  <a:solidFill>
+                    <a:schemeClr val="accent6">
+                      <a:lumMod val="75000"/>
+                    </a:schemeClr>
+                  </a:solidFill>
+                </a:ln>
+              </p:spPr>
+              <p:style>
+                <a:lnRef idx="2">
+                  <a:schemeClr val="accent1">
+                    <a:shade val="50000"/>
+                  </a:schemeClr>
+                </a:lnRef>
+                <a:fillRef idx="1">
+                  <a:schemeClr val="accent1"/>
+                </a:fillRef>
+                <a:effectRef idx="0">
+                  <a:schemeClr val="accent1"/>
+                </a:effectRef>
+                <a:fontRef idx="minor">
+                  <a:schemeClr val="lt1"/>
+                </a:fontRef>
+              </p:style>
+              <p:txBody>
+                <a:bodyPr rtlCol="0" anchor="ctr"/>
+                <a:lstStyle/>
+                <a:p>
+                  <a:pPr algn="ctr"/>
+                  <a:endParaRPr lang="zh-CN" altLang="en-US" dirty="0"/>
+                </a:p>
+              </p:txBody>
+            </p:sp>
+            <p:sp>
+              <p:nvSpPr>
+                <p:cNvPr id="541" name="星形: 五角 540">
+                  <a:extLst>
+                    <a:ext uri="{FF2B5EF4-FFF2-40B4-BE49-F238E27FC236}">
+                      <a16:creationId xmlns:a16="http://schemas.microsoft.com/office/drawing/2014/main" id="{3417FB1D-0BD5-4EAC-9079-B442A4F86D42}"/>
+                    </a:ext>
+                  </a:extLst>
+                </p:cNvPr>
+                <p:cNvSpPr/>
+                <p:nvPr/>
+              </p:nvSpPr>
+              <p:spPr>
+                <a:xfrm rot="3880281">
+                  <a:off x="3972267" y="2224676"/>
+                  <a:ext cx="137160" cy="137160"/>
+                </a:xfrm>
+                <a:prstGeom prst="star5">
+                  <a:avLst/>
+                </a:prstGeom>
+                <a:solidFill>
+                  <a:schemeClr val="accent6">
+                    <a:lumMod val="75000"/>
+                  </a:schemeClr>
+                </a:solidFill>
+                <a:ln>
+                  <a:solidFill>
+                    <a:schemeClr val="accent6">
+                      <a:lumMod val="75000"/>
+                    </a:schemeClr>
+                  </a:solidFill>
+                </a:ln>
+              </p:spPr>
+              <p:style>
+                <a:lnRef idx="2">
+                  <a:schemeClr val="accent1">
+                    <a:shade val="50000"/>
+                  </a:schemeClr>
+                </a:lnRef>
+                <a:fillRef idx="1">
+                  <a:schemeClr val="accent1"/>
+                </a:fillRef>
+                <a:effectRef idx="0">
+                  <a:schemeClr val="accent1"/>
+                </a:effectRef>
+                <a:fontRef idx="minor">
+                  <a:schemeClr val="lt1"/>
+                </a:fontRef>
+              </p:style>
+              <p:txBody>
+                <a:bodyPr rtlCol="0" anchor="ctr"/>
+                <a:lstStyle/>
+                <a:p>
+                  <a:pPr algn="ctr"/>
+                  <a:endParaRPr lang="zh-CN" altLang="en-US"/>
+                </a:p>
+              </p:txBody>
+            </p:sp>
+            <p:sp>
+              <p:nvSpPr>
+                <p:cNvPr id="542" name="星形: 五角 541">
+                  <a:extLst>
+                    <a:ext uri="{FF2B5EF4-FFF2-40B4-BE49-F238E27FC236}">
+                      <a16:creationId xmlns:a16="http://schemas.microsoft.com/office/drawing/2014/main" id="{FD8E6C77-3019-43CF-A7EC-F29CCDA883CF}"/>
+                    </a:ext>
+                  </a:extLst>
+                </p:cNvPr>
+                <p:cNvSpPr/>
+                <p:nvPr/>
+              </p:nvSpPr>
+              <p:spPr>
+                <a:xfrm>
+                  <a:off x="4490746" y="1757317"/>
+                  <a:ext cx="137160" cy="137160"/>
+                </a:xfrm>
+                <a:prstGeom prst="star5">
+                  <a:avLst/>
+                </a:prstGeom>
+                <a:solidFill>
+                  <a:schemeClr val="accent6">
+                    <a:lumMod val="75000"/>
+                  </a:schemeClr>
+                </a:solidFill>
+                <a:ln>
+                  <a:solidFill>
+                    <a:schemeClr val="accent6">
+                      <a:lumMod val="75000"/>
+                    </a:schemeClr>
+                  </a:solidFill>
+                </a:ln>
+              </p:spPr>
+              <p:style>
+                <a:lnRef idx="2">
+                  <a:schemeClr val="accent1">
+                    <a:shade val="50000"/>
+                  </a:schemeClr>
+                </a:lnRef>
+                <a:fillRef idx="1">
+                  <a:schemeClr val="accent1"/>
+                </a:fillRef>
+                <a:effectRef idx="0">
+                  <a:schemeClr val="accent1"/>
+                </a:effectRef>
+                <a:fontRef idx="minor">
+                  <a:schemeClr val="lt1"/>
+                </a:fontRef>
+              </p:style>
+              <p:txBody>
+                <a:bodyPr rtlCol="0" anchor="ctr"/>
+                <a:lstStyle/>
+                <a:p>
+                  <a:pPr algn="ctr"/>
+                  <a:endParaRPr lang="zh-CN" altLang="en-US"/>
+                </a:p>
+              </p:txBody>
+            </p:sp>
+            <p:cxnSp>
+              <p:nvCxnSpPr>
+                <p:cNvPr id="544" name="直接箭头连接符 543">
+                  <a:extLst>
+                    <a:ext uri="{FF2B5EF4-FFF2-40B4-BE49-F238E27FC236}">
+                      <a16:creationId xmlns:a16="http://schemas.microsoft.com/office/drawing/2014/main" id="{A6AD42FE-7907-4C10-A3D3-127A1C996437}"/>
+                    </a:ext>
+                  </a:extLst>
+                </p:cNvPr>
+                <p:cNvCxnSpPr>
+                  <a:cxnSpLocks/>
+                  <a:endCxn id="535" idx="1"/>
+                </p:cNvCxnSpPr>
+                <p:nvPr/>
+              </p:nvCxnSpPr>
+              <p:spPr>
+                <a:xfrm flipV="1">
+                  <a:off x="1467827" y="3102598"/>
+                  <a:ext cx="601901" cy="157127"/>
+                </a:xfrm>
+                <a:prstGeom prst="straightConnector1">
+                  <a:avLst/>
+                </a:prstGeom>
+                <a:ln w="6350">
+                  <a:solidFill>
+                    <a:schemeClr val="accent6">
+                      <a:lumMod val="75000"/>
+                    </a:schemeClr>
+                  </a:solidFill>
+                  <a:tailEnd type="triangle"/>
+                </a:ln>
+              </p:spPr>
+              <p:style>
+                <a:lnRef idx="1">
+                  <a:schemeClr val="accent1"/>
+                </a:lnRef>
+                <a:fillRef idx="0">
+                  <a:schemeClr val="accent1"/>
+                </a:fillRef>
+                <a:effectRef idx="0">
+                  <a:schemeClr val="accent1"/>
+                </a:effectRef>
+                <a:fontRef idx="minor">
+                  <a:schemeClr val="tx1"/>
+                </a:fontRef>
+              </p:style>
+            </p:cxnSp>
+            <p:cxnSp>
+              <p:nvCxnSpPr>
+                <p:cNvPr id="545" name="直接箭头连接符 544">
+                  <a:extLst>
+                    <a:ext uri="{FF2B5EF4-FFF2-40B4-BE49-F238E27FC236}">
+                      <a16:creationId xmlns:a16="http://schemas.microsoft.com/office/drawing/2014/main" id="{2B7F3B58-C17D-44D8-99A5-ACF84E2E6998}"/>
+                    </a:ext>
+                  </a:extLst>
+                </p:cNvPr>
+                <p:cNvCxnSpPr>
+                  <a:cxnSpLocks/>
+                  <a:stCxn id="535" idx="4"/>
+                  <a:endCxn id="536" idx="2"/>
+                </p:cNvCxnSpPr>
+                <p:nvPr/>
+              </p:nvCxnSpPr>
+              <p:spPr>
+                <a:xfrm>
+                  <a:off x="2201107" y="3141996"/>
+                  <a:ext cx="989158" cy="197952"/>
+                </a:xfrm>
+                <a:prstGeom prst="straightConnector1">
+                  <a:avLst/>
+                </a:prstGeom>
+                <a:ln w="6350">
+                  <a:solidFill>
+                    <a:schemeClr val="accent6">
+                      <a:lumMod val="75000"/>
+                    </a:schemeClr>
+                  </a:solidFill>
+                  <a:tailEnd type="triangle"/>
+                </a:ln>
+              </p:spPr>
+              <p:style>
+                <a:lnRef idx="1">
+                  <a:schemeClr val="accent1"/>
+                </a:lnRef>
+                <a:fillRef idx="0">
+                  <a:schemeClr val="accent1"/>
+                </a:fillRef>
+                <a:effectRef idx="0">
+                  <a:schemeClr val="accent1"/>
+                </a:effectRef>
+                <a:fontRef idx="minor">
+                  <a:schemeClr val="tx1"/>
+                </a:fontRef>
+              </p:style>
+            </p:cxnSp>
+            <p:cxnSp>
+              <p:nvCxnSpPr>
+                <p:cNvPr id="546" name="直接箭头连接符 545">
+                  <a:extLst>
+                    <a:ext uri="{FF2B5EF4-FFF2-40B4-BE49-F238E27FC236}">
+                      <a16:creationId xmlns:a16="http://schemas.microsoft.com/office/drawing/2014/main" id="{0EDA552D-577F-4C8B-B8CF-13216DBD4F7B}"/>
+                    </a:ext>
+                  </a:extLst>
+                </p:cNvPr>
+                <p:cNvCxnSpPr>
+                  <a:cxnSpLocks/>
+                  <a:stCxn id="536" idx="4"/>
+                  <a:endCxn id="537" idx="2"/>
+                </p:cNvCxnSpPr>
+                <p:nvPr/>
+              </p:nvCxnSpPr>
+              <p:spPr>
+                <a:xfrm flipV="1">
+                  <a:off x="3329487" y="2756807"/>
+                  <a:ext cx="668499" cy="572350"/>
+                </a:xfrm>
+                <a:prstGeom prst="straightConnector1">
+                  <a:avLst/>
+                </a:prstGeom>
+                <a:ln w="6350">
+                  <a:solidFill>
+                    <a:schemeClr val="accent6">
+                      <a:lumMod val="75000"/>
+                    </a:schemeClr>
+                  </a:solidFill>
+                  <a:tailEnd type="triangle"/>
+                </a:ln>
+              </p:spPr>
+              <p:style>
+                <a:lnRef idx="1">
+                  <a:schemeClr val="accent1"/>
+                </a:lnRef>
+                <a:fillRef idx="0">
+                  <a:schemeClr val="accent1"/>
+                </a:fillRef>
+                <a:effectRef idx="0">
+                  <a:schemeClr val="accent1"/>
+                </a:effectRef>
+                <a:fontRef idx="minor">
+                  <a:schemeClr val="tx1"/>
+                </a:fontRef>
+              </p:style>
+            </p:cxnSp>
+            <p:cxnSp>
+              <p:nvCxnSpPr>
+                <p:cNvPr id="547" name="直接箭头连接符 546">
+                  <a:extLst>
+                    <a:ext uri="{FF2B5EF4-FFF2-40B4-BE49-F238E27FC236}">
+                      <a16:creationId xmlns:a16="http://schemas.microsoft.com/office/drawing/2014/main" id="{785F3EA7-F450-4A25-997A-89679D96B1AC}"/>
+                    </a:ext>
+                  </a:extLst>
+                </p:cNvPr>
+                <p:cNvCxnSpPr>
+                  <a:cxnSpLocks/>
+                  <a:stCxn id="537" idx="4"/>
+                  <a:endCxn id="538" idx="2"/>
+                </p:cNvCxnSpPr>
+                <p:nvPr/>
+              </p:nvCxnSpPr>
+              <p:spPr>
+                <a:xfrm flipV="1">
+                  <a:off x="4108951" y="2116727"/>
+                  <a:ext cx="483395" cy="555310"/>
+                </a:xfrm>
+                <a:prstGeom prst="straightConnector1">
+                  <a:avLst/>
+                </a:prstGeom>
+                <a:ln w="6350">
+                  <a:solidFill>
+                    <a:schemeClr val="accent6">
+                      <a:lumMod val="75000"/>
+                    </a:schemeClr>
+                  </a:solidFill>
+                  <a:tailEnd type="triangle"/>
+                </a:ln>
+              </p:spPr>
+              <p:style>
+                <a:lnRef idx="1">
+                  <a:schemeClr val="accent1"/>
+                </a:lnRef>
+                <a:fillRef idx="0">
+                  <a:schemeClr val="accent1"/>
+                </a:fillRef>
+                <a:effectRef idx="0">
+                  <a:schemeClr val="accent1"/>
+                </a:effectRef>
+                <a:fontRef idx="minor">
+                  <a:schemeClr val="tx1"/>
+                </a:fontRef>
+              </p:style>
+            </p:cxnSp>
+            <p:cxnSp>
+              <p:nvCxnSpPr>
+                <p:cNvPr id="548" name="直接箭头连接符 547">
+                  <a:extLst>
+                    <a:ext uri="{FF2B5EF4-FFF2-40B4-BE49-F238E27FC236}">
+                      <a16:creationId xmlns:a16="http://schemas.microsoft.com/office/drawing/2014/main" id="{758FD970-C70B-440E-B967-2A299790A9D7}"/>
+                    </a:ext>
+                  </a:extLst>
+                </p:cNvPr>
+                <p:cNvCxnSpPr>
+                  <a:cxnSpLocks/>
+                  <a:stCxn id="538" idx="4"/>
+                  <a:endCxn id="301" idx="2"/>
+                </p:cNvCxnSpPr>
+                <p:nvPr/>
+              </p:nvCxnSpPr>
+              <p:spPr>
+                <a:xfrm flipV="1">
+                  <a:off x="4703311" y="1693817"/>
+                  <a:ext cx="766285" cy="338140"/>
+                </a:xfrm>
+                <a:prstGeom prst="straightConnector1">
+                  <a:avLst/>
+                </a:prstGeom>
+                <a:ln w="6350">
+                  <a:solidFill>
+                    <a:schemeClr val="accent6">
+                      <a:lumMod val="75000"/>
+                    </a:schemeClr>
+                  </a:solidFill>
+                  <a:tailEnd type="triangle"/>
+                </a:ln>
+              </p:spPr>
+              <p:style>
+                <a:lnRef idx="1">
+                  <a:schemeClr val="accent1"/>
+                </a:lnRef>
+                <a:fillRef idx="0">
+                  <a:schemeClr val="accent1"/>
+                </a:fillRef>
+                <a:effectRef idx="0">
+                  <a:schemeClr val="accent1"/>
+                </a:effectRef>
+                <a:fontRef idx="minor">
+                  <a:schemeClr val="tx1"/>
+                </a:fontRef>
+              </p:style>
+            </p:cxnSp>
+            <p:cxnSp>
+              <p:nvCxnSpPr>
+                <p:cNvPr id="549" name="直接箭头连接符 548">
+                  <a:extLst>
+                    <a:ext uri="{FF2B5EF4-FFF2-40B4-BE49-F238E27FC236}">
+                      <a16:creationId xmlns:a16="http://schemas.microsoft.com/office/drawing/2014/main" id="{031EDED0-A64E-4FE4-8615-7DC73B84FE31}"/>
+                    </a:ext>
+                  </a:extLst>
+                </p:cNvPr>
+                <p:cNvCxnSpPr>
+                  <a:cxnSpLocks/>
+                  <a:stCxn id="515" idx="3"/>
+                  <a:endCxn id="539" idx="2"/>
+                </p:cNvCxnSpPr>
+                <p:nvPr/>
+              </p:nvCxnSpPr>
+              <p:spPr>
+                <a:xfrm flipV="1">
+                  <a:off x="576656" y="2934660"/>
+                  <a:ext cx="1068827" cy="354718"/>
+                </a:xfrm>
+                <a:prstGeom prst="straightConnector1">
+                  <a:avLst/>
+                </a:prstGeom>
+                <a:ln w="6350">
+                  <a:solidFill>
+                    <a:schemeClr val="accent6">
+                      <a:lumMod val="75000"/>
+                    </a:schemeClr>
+                  </a:solidFill>
+                  <a:tailEnd type="triangle"/>
+                </a:ln>
+              </p:spPr>
+              <p:style>
+                <a:lnRef idx="1">
+                  <a:schemeClr val="accent1"/>
+                </a:lnRef>
+                <a:fillRef idx="0">
+                  <a:schemeClr val="accent1"/>
+                </a:fillRef>
+                <a:effectRef idx="0">
+                  <a:schemeClr val="accent1"/>
+                </a:effectRef>
+                <a:fontRef idx="minor">
+                  <a:schemeClr val="tx1"/>
+                </a:fontRef>
+              </p:style>
+            </p:cxnSp>
+            <p:cxnSp>
+              <p:nvCxnSpPr>
+                <p:cNvPr id="550" name="直接箭头连接符 549">
+                  <a:extLst>
+                    <a:ext uri="{FF2B5EF4-FFF2-40B4-BE49-F238E27FC236}">
+                      <a16:creationId xmlns:a16="http://schemas.microsoft.com/office/drawing/2014/main" id="{9143BD81-B6C0-4859-82B8-0292EB2CBD2E}"/>
+                    </a:ext>
+                  </a:extLst>
+                </p:cNvPr>
+                <p:cNvCxnSpPr>
+                  <a:cxnSpLocks/>
+                  <a:stCxn id="539" idx="4"/>
+                  <a:endCxn id="540" idx="2"/>
+                </p:cNvCxnSpPr>
+                <p:nvPr/>
+              </p:nvCxnSpPr>
+              <p:spPr>
+                <a:xfrm>
+                  <a:off x="1782287" y="2906659"/>
+                  <a:ext cx="577419" cy="108126"/>
+                </a:xfrm>
+                <a:prstGeom prst="straightConnector1">
+                  <a:avLst/>
+                </a:prstGeom>
+                <a:ln w="6350">
+                  <a:solidFill>
+                    <a:schemeClr val="accent6">
+                      <a:lumMod val="75000"/>
+                    </a:schemeClr>
+                  </a:solidFill>
+                  <a:tailEnd type="triangle"/>
+                </a:ln>
+              </p:spPr>
+              <p:style>
+                <a:lnRef idx="1">
+                  <a:schemeClr val="accent1"/>
+                </a:lnRef>
+                <a:fillRef idx="0">
+                  <a:schemeClr val="accent1"/>
+                </a:fillRef>
+                <a:effectRef idx="0">
+                  <a:schemeClr val="accent1"/>
+                </a:effectRef>
+                <a:fontRef idx="minor">
+                  <a:schemeClr val="tx1"/>
+                </a:fontRef>
+              </p:style>
+            </p:cxnSp>
+            <p:sp>
+              <p:nvSpPr>
+                <p:cNvPr id="551" name="星形: 五角 550">
+                  <a:extLst>
+                    <a:ext uri="{FF2B5EF4-FFF2-40B4-BE49-F238E27FC236}">
+                      <a16:creationId xmlns:a16="http://schemas.microsoft.com/office/drawing/2014/main" id="{F9601510-4DBE-4314-B06F-E43ABB10E192}"/>
+                    </a:ext>
+                  </a:extLst>
+                </p:cNvPr>
+                <p:cNvSpPr/>
+                <p:nvPr/>
+              </p:nvSpPr>
+              <p:spPr>
+                <a:xfrm rot="19125920">
+                  <a:off x="3380475" y="2926331"/>
+                  <a:ext cx="137160" cy="137160"/>
+                </a:xfrm>
+                <a:prstGeom prst="star5">
+                  <a:avLst/>
+                </a:prstGeom>
+                <a:solidFill>
+                  <a:schemeClr val="accent6">
+                    <a:lumMod val="75000"/>
+                  </a:schemeClr>
+                </a:solidFill>
+                <a:ln>
+                  <a:solidFill>
+                    <a:schemeClr val="accent6">
+                      <a:lumMod val="75000"/>
+                    </a:schemeClr>
+                  </a:solidFill>
+                </a:ln>
+              </p:spPr>
+              <p:style>
+                <a:lnRef idx="2">
+                  <a:schemeClr val="accent1">
+                    <a:shade val="50000"/>
+                  </a:schemeClr>
+                </a:lnRef>
+                <a:fillRef idx="1">
+                  <a:schemeClr val="accent1"/>
+                </a:fillRef>
+                <a:effectRef idx="0">
+                  <a:schemeClr val="accent1"/>
+                </a:effectRef>
+                <a:fontRef idx="minor">
+                  <a:schemeClr val="lt1"/>
+                </a:fontRef>
+              </p:style>
+              <p:txBody>
+                <a:bodyPr rtlCol="0" anchor="ctr"/>
+                <a:lstStyle/>
+                <a:p>
+                  <a:pPr algn="ctr"/>
+                  <a:endParaRPr lang="zh-CN" altLang="en-US"/>
+                </a:p>
+              </p:txBody>
+            </p:sp>
+            <p:cxnSp>
+              <p:nvCxnSpPr>
+                <p:cNvPr id="552" name="直接箭头连接符 551">
+                  <a:extLst>
+                    <a:ext uri="{FF2B5EF4-FFF2-40B4-BE49-F238E27FC236}">
+                      <a16:creationId xmlns:a16="http://schemas.microsoft.com/office/drawing/2014/main" id="{EB33193C-FD27-4B76-9A14-7E5540D1BDCC}"/>
+                    </a:ext>
+                  </a:extLst>
+                </p:cNvPr>
+                <p:cNvCxnSpPr>
+                  <a:cxnSpLocks/>
+                  <a:stCxn id="540" idx="0"/>
+                  <a:endCxn id="551" idx="1"/>
+                </p:cNvCxnSpPr>
+                <p:nvPr/>
+              </p:nvCxnSpPr>
+              <p:spPr>
+                <a:xfrm>
+                  <a:off x="2500419" y="2986342"/>
+                  <a:ext cx="886391" cy="41598"/>
+                </a:xfrm>
+                <a:prstGeom prst="straightConnector1">
+                  <a:avLst/>
+                </a:prstGeom>
+                <a:ln w="12700">
+                  <a:solidFill>
+                    <a:schemeClr val="accent6">
+                      <a:lumMod val="75000"/>
+                    </a:schemeClr>
+                  </a:solidFill>
+                  <a:tailEnd type="triangle"/>
+                </a:ln>
+              </p:spPr>
+              <p:style>
+                <a:lnRef idx="1">
+                  <a:schemeClr val="accent1"/>
+                </a:lnRef>
+                <a:fillRef idx="0">
+                  <a:schemeClr val="accent1"/>
+                </a:fillRef>
+                <a:effectRef idx="0">
+                  <a:schemeClr val="accent1"/>
+                </a:effectRef>
+                <a:fontRef idx="minor">
+                  <a:schemeClr val="tx1"/>
+                </a:fontRef>
+              </p:style>
+            </p:cxnSp>
+            <p:cxnSp>
+              <p:nvCxnSpPr>
+                <p:cNvPr id="553" name="直接箭头连接符 552">
+                  <a:extLst>
+                    <a:ext uri="{FF2B5EF4-FFF2-40B4-BE49-F238E27FC236}">
+                      <a16:creationId xmlns:a16="http://schemas.microsoft.com/office/drawing/2014/main" id="{B0B5DDF0-326D-4431-8492-E5C4E21E6155}"/>
+                    </a:ext>
+                  </a:extLst>
+                </p:cNvPr>
+                <p:cNvCxnSpPr>
+                  <a:cxnSpLocks/>
+                  <a:stCxn id="551" idx="4"/>
+                  <a:endCxn id="541" idx="3"/>
+                </p:cNvCxnSpPr>
+                <p:nvPr/>
+              </p:nvCxnSpPr>
+              <p:spPr>
+                <a:xfrm flipV="1">
+                  <a:off x="3489957" y="2360906"/>
+                  <a:ext cx="507035" cy="576626"/>
+                </a:xfrm>
+                <a:prstGeom prst="straightConnector1">
+                  <a:avLst/>
+                </a:prstGeom>
+                <a:ln w="6350">
+                  <a:solidFill>
+                    <a:schemeClr val="accent6">
+                      <a:lumMod val="75000"/>
+                    </a:schemeClr>
+                  </a:solidFill>
+                  <a:tailEnd type="triangle"/>
+                </a:ln>
+              </p:spPr>
+              <p:style>
+                <a:lnRef idx="1">
+                  <a:schemeClr val="accent1"/>
+                </a:lnRef>
+                <a:fillRef idx="0">
+                  <a:schemeClr val="accent1"/>
+                </a:fillRef>
+                <a:effectRef idx="0">
+                  <a:schemeClr val="accent1"/>
+                </a:effectRef>
+                <a:fontRef idx="minor">
+                  <a:schemeClr val="tx1"/>
+                </a:fontRef>
+              </p:style>
+            </p:cxnSp>
+            <p:cxnSp>
+              <p:nvCxnSpPr>
+                <p:cNvPr id="554" name="直接箭头连接符 553">
+                  <a:extLst>
+                    <a:ext uri="{FF2B5EF4-FFF2-40B4-BE49-F238E27FC236}">
+                      <a16:creationId xmlns:a16="http://schemas.microsoft.com/office/drawing/2014/main" id="{2A47E8A2-0442-4140-B8BA-684DF690EE74}"/>
+                    </a:ext>
+                  </a:extLst>
+                </p:cNvPr>
+                <p:cNvCxnSpPr>
+                  <a:cxnSpLocks/>
+                  <a:stCxn id="541" idx="0"/>
+                  <a:endCxn id="542" idx="2"/>
+                </p:cNvCxnSpPr>
+                <p:nvPr/>
+              </p:nvCxnSpPr>
+              <p:spPr>
+                <a:xfrm flipV="1">
+                  <a:off x="4102834" y="1894477"/>
+                  <a:ext cx="414107" cy="369440"/>
+                </a:xfrm>
+                <a:prstGeom prst="straightConnector1">
+                  <a:avLst/>
+                </a:prstGeom>
+                <a:ln w="6350">
+                  <a:solidFill>
+                    <a:schemeClr val="accent6">
+                      <a:lumMod val="75000"/>
+                    </a:schemeClr>
+                  </a:solidFill>
+                  <a:tailEnd type="triangle"/>
+                </a:ln>
+              </p:spPr>
+              <p:style>
+                <a:lnRef idx="1">
+                  <a:schemeClr val="accent1"/>
+                </a:lnRef>
+                <a:fillRef idx="0">
+                  <a:schemeClr val="accent1"/>
+                </a:fillRef>
+                <a:effectRef idx="0">
+                  <a:schemeClr val="accent1"/>
+                </a:effectRef>
+                <a:fontRef idx="minor">
+                  <a:schemeClr val="tx1"/>
+                </a:fontRef>
+              </p:style>
+            </p:cxnSp>
+            <p:cxnSp>
+              <p:nvCxnSpPr>
+                <p:cNvPr id="555" name="直接箭头连接符 554">
+                  <a:extLst>
+                    <a:ext uri="{FF2B5EF4-FFF2-40B4-BE49-F238E27FC236}">
+                      <a16:creationId xmlns:a16="http://schemas.microsoft.com/office/drawing/2014/main" id="{F4A00F98-CB0D-484A-B318-AF61E99AF742}"/>
+                    </a:ext>
+                  </a:extLst>
+                </p:cNvPr>
+                <p:cNvCxnSpPr>
+                  <a:cxnSpLocks/>
+                  <a:stCxn id="542" idx="4"/>
+                  <a:endCxn id="527" idx="2"/>
+                </p:cNvCxnSpPr>
+                <p:nvPr/>
+              </p:nvCxnSpPr>
+              <p:spPr>
+                <a:xfrm flipV="1">
+                  <a:off x="4627906" y="1381397"/>
+                  <a:ext cx="1009330" cy="428310"/>
+                </a:xfrm>
+                <a:prstGeom prst="straightConnector1">
+                  <a:avLst/>
+                </a:prstGeom>
+                <a:ln w="12700">
+                  <a:solidFill>
+                    <a:schemeClr val="accent6">
+                      <a:lumMod val="75000"/>
+                    </a:schemeClr>
+                  </a:solidFill>
+                  <a:tailEnd type="triangle"/>
+                </a:ln>
+              </p:spPr>
+              <p:style>
+                <a:lnRef idx="1">
+                  <a:schemeClr val="accent1"/>
+                </a:lnRef>
+                <a:fillRef idx="0">
+                  <a:schemeClr val="accent1"/>
+                </a:fillRef>
+                <a:effectRef idx="0">
+                  <a:schemeClr val="accent1"/>
+                </a:effectRef>
+                <a:fontRef idx="minor">
+                  <a:schemeClr val="tx1"/>
+                </a:fontRef>
+              </p:style>
+            </p:cxnSp>
+            <p:sp>
+              <p:nvSpPr>
+                <p:cNvPr id="556" name="星形: 五角 555">
+                  <a:extLst>
+                    <a:ext uri="{FF2B5EF4-FFF2-40B4-BE49-F238E27FC236}">
+                      <a16:creationId xmlns:a16="http://schemas.microsoft.com/office/drawing/2014/main" id="{807DF924-D8D3-480B-AA1A-16AD52DE5D02}"/>
+                    </a:ext>
+                  </a:extLst>
+                </p:cNvPr>
+                <p:cNvSpPr/>
+                <p:nvPr/>
+              </p:nvSpPr>
+              <p:spPr>
+                <a:xfrm rot="2574900">
+                  <a:off x="3070991" y="1413467"/>
+                  <a:ext cx="121920" cy="137160"/>
+                </a:xfrm>
+                <a:prstGeom prst="star5">
+                  <a:avLst/>
+                </a:prstGeom>
+                <a:solidFill>
+                  <a:srgbClr val="C00000"/>
+                </a:solidFill>
+                <a:ln>
+                  <a:solidFill>
+                    <a:srgbClr val="C00000"/>
+                  </a:solidFill>
+                </a:ln>
+              </p:spPr>
+              <p:style>
+                <a:lnRef idx="2">
+                  <a:schemeClr val="accent1">
+                    <a:shade val="50000"/>
+                  </a:schemeClr>
+                </a:lnRef>
+                <a:fillRef idx="1">
+                  <a:schemeClr val="accent1"/>
+                </a:fillRef>
+                <a:effectRef idx="0">
+                  <a:schemeClr val="accent1"/>
+                </a:effectRef>
+                <a:fontRef idx="minor">
+                  <a:schemeClr val="lt1"/>
+                </a:fontRef>
+              </p:style>
+              <p:txBody>
+                <a:bodyPr rtlCol="0" anchor="ctr"/>
+                <a:lstStyle/>
+                <a:p>
+                  <a:pPr algn="ctr"/>
+                  <a:endParaRPr lang="zh-CN" altLang="en-US"/>
+                </a:p>
+              </p:txBody>
+            </p:sp>
+            <p:sp>
+              <p:nvSpPr>
+                <p:cNvPr id="557" name="星形: 五角 556">
+                  <a:extLst>
+                    <a:ext uri="{FF2B5EF4-FFF2-40B4-BE49-F238E27FC236}">
+                      <a16:creationId xmlns:a16="http://schemas.microsoft.com/office/drawing/2014/main" id="{4BB73DA8-88D6-487E-89EC-8F0195BDFB3A}"/>
+                    </a:ext>
+                  </a:extLst>
+                </p:cNvPr>
+                <p:cNvSpPr/>
+                <p:nvPr/>
+              </p:nvSpPr>
+              <p:spPr>
+                <a:xfrm rot="3183208">
+                  <a:off x="4030266" y="1341077"/>
+                  <a:ext cx="121920" cy="137160"/>
+                </a:xfrm>
+                <a:prstGeom prst="star5">
+                  <a:avLst/>
+                </a:prstGeom>
+                <a:solidFill>
+                  <a:srgbClr val="C00000"/>
+                </a:solidFill>
+                <a:ln>
+                  <a:solidFill>
+                    <a:srgbClr val="C00000"/>
+                  </a:solidFill>
+                </a:ln>
+              </p:spPr>
+              <p:style>
+                <a:lnRef idx="2">
+                  <a:schemeClr val="accent1">
+                    <a:shade val="50000"/>
+                  </a:schemeClr>
+                </a:lnRef>
+                <a:fillRef idx="1">
+                  <a:schemeClr val="accent1"/>
+                </a:fillRef>
+                <a:effectRef idx="0">
+                  <a:schemeClr val="accent1"/>
+                </a:effectRef>
+                <a:fontRef idx="minor">
+                  <a:schemeClr val="lt1"/>
+                </a:fontRef>
+              </p:style>
+              <p:txBody>
+                <a:bodyPr rtlCol="0" anchor="ctr"/>
+                <a:lstStyle/>
+                <a:p>
+                  <a:pPr algn="ctr"/>
+                  <a:endParaRPr lang="zh-CN" altLang="en-US"/>
+                </a:p>
+              </p:txBody>
+            </p:sp>
+            <p:sp>
+              <p:nvSpPr>
+                <p:cNvPr id="559" name="星形: 五角 558">
+                  <a:extLst>
+                    <a:ext uri="{FF2B5EF4-FFF2-40B4-BE49-F238E27FC236}">
+                      <a16:creationId xmlns:a16="http://schemas.microsoft.com/office/drawing/2014/main" id="{0ACD0237-78D8-40E9-874F-CA2F0E828016}"/>
+                    </a:ext>
+                  </a:extLst>
+                </p:cNvPr>
+                <p:cNvSpPr/>
+                <p:nvPr/>
+              </p:nvSpPr>
+              <p:spPr>
+                <a:xfrm>
+                  <a:off x="2275971" y="1579837"/>
+                  <a:ext cx="121920" cy="137160"/>
+                </a:xfrm>
+                <a:prstGeom prst="star5">
+                  <a:avLst/>
+                </a:prstGeom>
+                <a:solidFill>
+                  <a:srgbClr val="C00000"/>
+                </a:solidFill>
+                <a:ln>
+                  <a:solidFill>
+                    <a:srgbClr val="C00000"/>
+                  </a:solidFill>
+                </a:ln>
+              </p:spPr>
+              <p:style>
+                <a:lnRef idx="2">
+                  <a:schemeClr val="accent1">
+                    <a:shade val="50000"/>
+                  </a:schemeClr>
+                </a:lnRef>
+                <a:fillRef idx="1">
+                  <a:schemeClr val="accent1"/>
+                </a:fillRef>
+                <a:effectRef idx="0">
+                  <a:schemeClr val="accent1"/>
+                </a:effectRef>
+                <a:fontRef idx="minor">
+                  <a:schemeClr val="lt1"/>
+                </a:fontRef>
+              </p:style>
+              <p:txBody>
+                <a:bodyPr rtlCol="0" anchor="ctr"/>
+                <a:lstStyle/>
+                <a:p>
+                  <a:pPr algn="ctr"/>
+                  <a:endParaRPr lang="zh-CN" altLang="en-US" dirty="0"/>
+                </a:p>
+              </p:txBody>
+            </p:sp>
+            <p:cxnSp>
+              <p:nvCxnSpPr>
+                <p:cNvPr id="560" name="直接箭头连接符 559">
+                  <a:extLst>
+                    <a:ext uri="{FF2B5EF4-FFF2-40B4-BE49-F238E27FC236}">
+                      <a16:creationId xmlns:a16="http://schemas.microsoft.com/office/drawing/2014/main" id="{88BAD02B-188D-4B57-965C-FDF2E1EC89D3}"/>
+                    </a:ext>
+                  </a:extLst>
+                </p:cNvPr>
+                <p:cNvCxnSpPr>
+                  <a:cxnSpLocks/>
+                  <a:stCxn id="513" idx="3"/>
+                  <a:endCxn id="543" idx="1"/>
+                </p:cNvCxnSpPr>
+                <p:nvPr/>
+              </p:nvCxnSpPr>
+              <p:spPr>
+                <a:xfrm flipV="1">
+                  <a:off x="1012282" y="2146033"/>
+                  <a:ext cx="708524" cy="631328"/>
+                </a:xfrm>
+                <a:prstGeom prst="straightConnector1">
+                  <a:avLst/>
+                </a:prstGeom>
+                <a:solidFill>
+                  <a:srgbClr val="C00000"/>
+                </a:solidFill>
+                <a:ln w="6350">
+                  <a:solidFill>
+                    <a:srgbClr val="C00000"/>
+                  </a:solidFill>
+                  <a:tailEnd type="triangle"/>
+                </a:ln>
+              </p:spPr>
+              <p:style>
+                <a:lnRef idx="1">
+                  <a:schemeClr val="accent1"/>
+                </a:lnRef>
+                <a:fillRef idx="0">
+                  <a:schemeClr val="accent1"/>
+                </a:fillRef>
+                <a:effectRef idx="0">
+                  <a:schemeClr val="accent1"/>
+                </a:effectRef>
+                <a:fontRef idx="minor">
+                  <a:schemeClr val="tx1"/>
+                </a:fontRef>
+              </p:style>
+            </p:cxnSp>
+            <p:cxnSp>
+              <p:nvCxnSpPr>
+                <p:cNvPr id="561" name="直接箭头连接符 560">
+                  <a:extLst>
+                    <a:ext uri="{FF2B5EF4-FFF2-40B4-BE49-F238E27FC236}">
+                      <a16:creationId xmlns:a16="http://schemas.microsoft.com/office/drawing/2014/main" id="{DDD9E668-83CA-4482-945C-192F81BD3C17}"/>
+                    </a:ext>
+                  </a:extLst>
+                </p:cNvPr>
+                <p:cNvCxnSpPr>
+                  <a:cxnSpLocks/>
+                  <a:stCxn id="543" idx="4"/>
+                  <a:endCxn id="559" idx="1"/>
+                </p:cNvCxnSpPr>
+                <p:nvPr/>
+              </p:nvCxnSpPr>
+              <p:spPr>
+                <a:xfrm flipV="1">
+                  <a:off x="1800879" y="1632227"/>
+                  <a:ext cx="475092" cy="421867"/>
+                </a:xfrm>
+                <a:prstGeom prst="straightConnector1">
+                  <a:avLst/>
+                </a:prstGeom>
+                <a:solidFill>
+                  <a:srgbClr val="C00000"/>
+                </a:solidFill>
+                <a:ln w="6350">
+                  <a:solidFill>
+                    <a:srgbClr val="C00000"/>
+                  </a:solidFill>
+                  <a:tailEnd type="triangle"/>
+                </a:ln>
+              </p:spPr>
+              <p:style>
+                <a:lnRef idx="1">
+                  <a:schemeClr val="accent1"/>
+                </a:lnRef>
+                <a:fillRef idx="0">
+                  <a:schemeClr val="accent1"/>
+                </a:fillRef>
+                <a:effectRef idx="0">
+                  <a:schemeClr val="accent1"/>
+                </a:effectRef>
+                <a:fontRef idx="minor">
+                  <a:schemeClr val="tx1"/>
+                </a:fontRef>
+              </p:style>
+            </p:cxnSp>
+            <p:cxnSp>
+              <p:nvCxnSpPr>
+                <p:cNvPr id="562" name="直接箭头连接符 561">
+                  <a:extLst>
+                    <a:ext uri="{FF2B5EF4-FFF2-40B4-BE49-F238E27FC236}">
+                      <a16:creationId xmlns:a16="http://schemas.microsoft.com/office/drawing/2014/main" id="{960C1641-F3D0-4177-A431-80D76B529061}"/>
+                    </a:ext>
+                  </a:extLst>
+                </p:cNvPr>
+                <p:cNvCxnSpPr>
+                  <a:cxnSpLocks/>
+                  <a:stCxn id="559" idx="4"/>
+                  <a:endCxn id="556" idx="2"/>
+                </p:cNvCxnSpPr>
+                <p:nvPr/>
+              </p:nvCxnSpPr>
+              <p:spPr>
+                <a:xfrm flipV="1">
+                  <a:off x="2397891" y="1506619"/>
+                  <a:ext cx="659771" cy="125608"/>
+                </a:xfrm>
+                <a:prstGeom prst="straightConnector1">
+                  <a:avLst/>
+                </a:prstGeom>
+                <a:solidFill>
+                  <a:srgbClr val="C00000"/>
+                </a:solidFill>
+                <a:ln w="6350">
+                  <a:solidFill>
+                    <a:srgbClr val="C00000"/>
+                  </a:solidFill>
+                  <a:tailEnd type="triangle"/>
+                </a:ln>
+              </p:spPr>
+              <p:style>
+                <a:lnRef idx="1">
+                  <a:schemeClr val="accent1"/>
+                </a:lnRef>
+                <a:fillRef idx="0">
+                  <a:schemeClr val="accent1"/>
+                </a:fillRef>
+                <a:effectRef idx="0">
+                  <a:schemeClr val="accent1"/>
+                </a:effectRef>
+                <a:fontRef idx="minor">
+                  <a:schemeClr val="tx1"/>
+                </a:fontRef>
+              </p:style>
+            </p:cxnSp>
+            <p:cxnSp>
+              <p:nvCxnSpPr>
+                <p:cNvPr id="563" name="直接箭头连接符 562">
+                  <a:extLst>
+                    <a:ext uri="{FF2B5EF4-FFF2-40B4-BE49-F238E27FC236}">
+                      <a16:creationId xmlns:a16="http://schemas.microsoft.com/office/drawing/2014/main" id="{5344E385-C520-40C1-9DDC-E3A37A463540}"/>
+                    </a:ext>
+                  </a:extLst>
+                </p:cNvPr>
+                <p:cNvCxnSpPr>
+                  <a:cxnSpLocks/>
+                  <a:stCxn id="556" idx="4"/>
+                  <a:endCxn id="557" idx="2"/>
+                </p:cNvCxnSpPr>
+                <p:nvPr/>
+              </p:nvCxnSpPr>
+              <p:spPr>
+                <a:xfrm flipV="1">
+                  <a:off x="3187620" y="1420769"/>
+                  <a:ext cx="826152" cy="90929"/>
+                </a:xfrm>
+                <a:prstGeom prst="straightConnector1">
+                  <a:avLst/>
+                </a:prstGeom>
+                <a:solidFill>
+                  <a:srgbClr val="C00000"/>
+                </a:solidFill>
+                <a:ln w="6350">
+                  <a:solidFill>
+                    <a:srgbClr val="C00000"/>
+                  </a:solidFill>
+                  <a:tailEnd type="triangle"/>
+                </a:ln>
+              </p:spPr>
+              <p:style>
+                <a:lnRef idx="1">
+                  <a:schemeClr val="accent1"/>
+                </a:lnRef>
+                <a:fillRef idx="0">
+                  <a:schemeClr val="accent1"/>
+                </a:fillRef>
+                <a:effectRef idx="0">
+                  <a:schemeClr val="accent1"/>
+                </a:effectRef>
+                <a:fontRef idx="minor">
+                  <a:schemeClr val="tx1"/>
+                </a:fontRef>
+              </p:style>
+            </p:cxnSp>
+            <p:cxnSp>
+              <p:nvCxnSpPr>
+                <p:cNvPr id="564" name="直接箭头连接符 563">
+                  <a:extLst>
+                    <a:ext uri="{FF2B5EF4-FFF2-40B4-BE49-F238E27FC236}">
+                      <a16:creationId xmlns:a16="http://schemas.microsoft.com/office/drawing/2014/main" id="{590C21D8-8630-417F-85B4-29D857756960}"/>
+                    </a:ext>
+                  </a:extLst>
+                </p:cNvPr>
+                <p:cNvCxnSpPr>
+                  <a:cxnSpLocks/>
+                  <a:stCxn id="557" idx="4"/>
+                  <a:endCxn id="302" idx="2"/>
+                </p:cNvCxnSpPr>
+                <p:nvPr/>
+              </p:nvCxnSpPr>
+              <p:spPr>
+                <a:xfrm flipV="1">
+                  <a:off x="4140806" y="1373777"/>
+                  <a:ext cx="1115430" cy="74868"/>
+                </a:xfrm>
+                <a:prstGeom prst="straightConnector1">
+                  <a:avLst/>
+                </a:prstGeom>
+                <a:solidFill>
+                  <a:srgbClr val="C00000"/>
+                </a:solidFill>
+                <a:ln>
+                  <a:solidFill>
+                    <a:srgbClr val="C00000"/>
+                  </a:solidFill>
+                </a:ln>
+              </p:spPr>
+              <p:style>
+                <a:lnRef idx="2">
+                  <a:schemeClr val="accent1">
+                    <a:shade val="50000"/>
+                  </a:schemeClr>
+                </a:lnRef>
+                <a:fillRef idx="1">
+                  <a:schemeClr val="accent1"/>
+                </a:fillRef>
+                <a:effectRef idx="0">
+                  <a:schemeClr val="accent1"/>
+                </a:effectRef>
+                <a:fontRef idx="minor">
+                  <a:schemeClr val="lt1"/>
+                </a:fontRef>
+              </p:style>
+            </p:cxnSp>
+            <mc:AlternateContent xmlns:mc="http://schemas.openxmlformats.org/markup-compatibility/2006">
+              <mc:Choice xmlns:a14="http://schemas.microsoft.com/office/drawing/2010/main" Requires="a14">
+                <p:sp>
+                  <p:nvSpPr>
+                    <p:cNvPr id="576" name="文本框 575">
+                      <a:extLst>
+                        <a:ext uri="{FF2B5EF4-FFF2-40B4-BE49-F238E27FC236}">
+                          <a16:creationId xmlns:a16="http://schemas.microsoft.com/office/drawing/2014/main" id="{0C83C5E9-F2E6-4013-B705-BE86737BA0EA}"/>
+                        </a:ext>
+                      </a:extLst>
+                    </p:cNvPr>
+                    <p:cNvSpPr txBox="1"/>
+                    <p:nvPr/>
+                  </p:nvSpPr>
+                  <p:spPr>
+                    <a:xfrm>
+                      <a:off x="1039222" y="2783748"/>
+                      <a:ext cx="473528" cy="276999"/>
+                    </a:xfrm>
+                    <a:prstGeom prst="rect">
+                      <a:avLst/>
+                    </a:prstGeom>
+                    <a:noFill/>
+                  </p:spPr>
+                  <p:txBody>
+                    <a:bodyPr wrap="square" rtlCol="0">
+                      <a:spAutoFit/>
+                    </a:bodyPr>
+                    <a:lstStyle/>
+                    <a:p>
+                      <a:pPr/>
+                      <a14:m>
+                        <m:oMathPara xmlns:m="http://schemas.openxmlformats.org/officeDocument/2006/math">
+                          <m:oMathParaPr>
+                            <m:jc m:val="centerGroup"/>
+                          </m:oMathParaPr>
+                          <m:oMath xmlns:m="http://schemas.openxmlformats.org/officeDocument/2006/math">
+                            <m:sSub>
+                              <m:sSubPr>
+                                <m:ctrlPr>
+                                  <a:rPr lang="en-US" altLang="zh-CN" sz="1200" i="1" smtClean="0">
+                                    <a:latin typeface="Cambria Math" panose="02040503050406030204" pitchFamily="18" charset="0"/>
+                                  </a:rPr>
+                                </m:ctrlPr>
+                              </m:sSubPr>
+                              <m:e>
+                                <m:r>
+                                  <a:rPr lang="en-US" altLang="zh-CN" sz="1200" b="0" i="1" smtClean="0">
+                                    <a:latin typeface="Cambria Math" panose="02040503050406030204" pitchFamily="18" charset="0"/>
+                                  </a:rPr>
+                                  <m:t>𝐶</m:t>
+                                </m:r>
+                              </m:e>
+                              <m:sub>
+                                <m:r>
+                                  <a:rPr lang="en-US" altLang="zh-CN" sz="1200" b="0" i="1" smtClean="0">
+                                    <a:latin typeface="Cambria Math" panose="02040503050406030204" pitchFamily="18" charset="0"/>
+                                  </a:rPr>
+                                  <m:t>1</m:t>
+                                </m:r>
+                              </m:sub>
+                            </m:sSub>
+                          </m:oMath>
+                        </m:oMathPara>
+                      </a14:m>
+                      <a:endParaRPr lang="zh-CN" altLang="en-US" sz="1200" dirty="0"/>
+                    </a:p>
+                  </p:txBody>
+                </p:sp>
+              </mc:Choice>
+              <mc:Fallback>
+                <p:sp>
+                  <p:nvSpPr>
+                    <p:cNvPr id="576" name="文本框 575">
+                      <a:extLst>
+                        <a:ext uri="{FF2B5EF4-FFF2-40B4-BE49-F238E27FC236}">
+                          <a16:creationId xmlns:a16="http://schemas.microsoft.com/office/drawing/2014/main" id="{0C83C5E9-F2E6-4013-B705-BE86737BA0EA}"/>
+                        </a:ext>
+                      </a:extLst>
+                    </p:cNvPr>
+                    <p:cNvSpPr txBox="1">
+                      <a:spLocks noRot="1" noChangeAspect="1" noMove="1" noResize="1" noEditPoints="1" noAdjustHandles="1" noChangeArrowheads="1" noChangeShapeType="1" noTextEdit="1"/>
+                    </p:cNvSpPr>
+                    <p:nvPr/>
+                  </p:nvSpPr>
+                  <p:spPr>
+                    <a:xfrm>
+                      <a:off x="1039222" y="2783748"/>
+                      <a:ext cx="473528" cy="276999"/>
+                    </a:xfrm>
+                    <a:prstGeom prst="rect">
+                      <a:avLst/>
+                    </a:prstGeom>
+                    <a:blipFill>
+                      <a:blip r:embed="rId4"/>
+                      <a:stretch>
+                        <a:fillRect/>
+                      </a:stretch>
+                    </a:blipFill>
+                  </p:spPr>
+                  <p:txBody>
+                    <a:bodyPr/>
+                    <a:lstStyle/>
+                    <a:p>
+                      <a:r>
+                        <a:rPr lang="zh-CN" altLang="en-US">
+                          <a:noFill/>
+                        </a:rPr>
+                        <a:t> </a:t>
+                      </a:r>
+                    </a:p>
+                  </p:txBody>
+                </p:sp>
+              </mc:Fallback>
+            </mc:AlternateContent>
+            <mc:AlternateContent xmlns:mc="http://schemas.openxmlformats.org/markup-compatibility/2006">
+              <mc:Choice xmlns:a14="http://schemas.microsoft.com/office/drawing/2010/main" Requires="a14">
+                <p:sp>
+                  <p:nvSpPr>
+                    <p:cNvPr id="577" name="文本框 576">
+                      <a:extLst>
+                        <a:ext uri="{FF2B5EF4-FFF2-40B4-BE49-F238E27FC236}">
+                          <a16:creationId xmlns:a16="http://schemas.microsoft.com/office/drawing/2014/main" id="{90D7FB6B-5DE4-4D0B-B943-F155C33C1258}"/>
+                        </a:ext>
+                      </a:extLst>
+                    </p:cNvPr>
+                    <p:cNvSpPr txBox="1"/>
+                    <p:nvPr/>
+                  </p:nvSpPr>
+                  <p:spPr>
+                    <a:xfrm>
+                      <a:off x="182925" y="2911383"/>
+                      <a:ext cx="473528" cy="276999"/>
+                    </a:xfrm>
+                    <a:prstGeom prst="rect">
+                      <a:avLst/>
+                    </a:prstGeom>
+                    <a:noFill/>
+                  </p:spPr>
+                  <p:txBody>
+                    <a:bodyPr wrap="square" rtlCol="0">
+                      <a:spAutoFit/>
+                    </a:bodyPr>
+                    <a:lstStyle/>
+                    <a:p>
+                      <a:pPr/>
+                      <a14:m>
+                        <m:oMathPara xmlns:m="http://schemas.openxmlformats.org/officeDocument/2006/math">
+                          <m:oMathParaPr>
+                            <m:jc m:val="centerGroup"/>
+                          </m:oMathParaPr>
+                          <m:oMath xmlns:m="http://schemas.openxmlformats.org/officeDocument/2006/math">
+                            <m:sSub>
+                              <m:sSubPr>
+                                <m:ctrlPr>
+                                  <a:rPr lang="en-US" altLang="zh-CN" sz="1200" i="1" smtClean="0">
+                                    <a:latin typeface="Cambria Math" panose="02040503050406030204" pitchFamily="18" charset="0"/>
+                                  </a:rPr>
+                                </m:ctrlPr>
+                              </m:sSubPr>
+                              <m:e>
+                                <m:r>
+                                  <a:rPr lang="en-US" altLang="zh-CN" sz="1200" b="0" i="1" smtClean="0">
+                                    <a:latin typeface="Cambria Math" panose="02040503050406030204" pitchFamily="18" charset="0"/>
+                                  </a:rPr>
+                                  <m:t>𝐶</m:t>
+                                </m:r>
+                              </m:e>
+                              <m:sub>
+                                <m:r>
+                                  <a:rPr lang="en-US" altLang="zh-CN" sz="1200" b="0" i="1" smtClean="0">
+                                    <a:latin typeface="Cambria Math" panose="02040503050406030204" pitchFamily="18" charset="0"/>
+                                  </a:rPr>
+                                  <m:t>2</m:t>
+                                </m:r>
+                              </m:sub>
+                            </m:sSub>
+                          </m:oMath>
+                        </m:oMathPara>
+                      </a14:m>
+                      <a:endParaRPr lang="zh-CN" altLang="en-US" sz="1200" dirty="0"/>
+                    </a:p>
+                  </p:txBody>
+                </p:sp>
+              </mc:Choice>
+              <mc:Fallback>
+                <p:sp>
+                  <p:nvSpPr>
+                    <p:cNvPr id="577" name="文本框 576">
+                      <a:extLst>
+                        <a:ext uri="{FF2B5EF4-FFF2-40B4-BE49-F238E27FC236}">
+                          <a16:creationId xmlns:a16="http://schemas.microsoft.com/office/drawing/2014/main" id="{90D7FB6B-5DE4-4D0B-B943-F155C33C1258}"/>
+                        </a:ext>
+                      </a:extLst>
+                    </p:cNvPr>
+                    <p:cNvSpPr txBox="1">
+                      <a:spLocks noRot="1" noChangeAspect="1" noMove="1" noResize="1" noEditPoints="1" noAdjustHandles="1" noChangeArrowheads="1" noChangeShapeType="1" noTextEdit="1"/>
+                    </p:cNvSpPr>
+                    <p:nvPr/>
+                  </p:nvSpPr>
+                  <p:spPr>
+                    <a:xfrm>
+                      <a:off x="182925" y="2911383"/>
+                      <a:ext cx="473528" cy="276999"/>
+                    </a:xfrm>
+                    <a:prstGeom prst="rect">
+                      <a:avLst/>
+                    </a:prstGeom>
+                    <a:blipFill>
+                      <a:blip r:embed="rId5"/>
+                      <a:stretch>
+                        <a:fillRect/>
+                      </a:stretch>
+                    </a:blipFill>
+                  </p:spPr>
+                  <p:txBody>
+                    <a:bodyPr/>
+                    <a:lstStyle/>
+                    <a:p>
+                      <a:r>
+                        <a:rPr lang="zh-CN" altLang="en-US">
+                          <a:noFill/>
+                        </a:rPr>
+                        <a:t> </a:t>
+                      </a:r>
+                    </a:p>
+                  </p:txBody>
+                </p:sp>
+              </mc:Fallback>
+            </mc:AlternateContent>
+            <mc:AlternateContent xmlns:mc="http://schemas.openxmlformats.org/markup-compatibility/2006">
+              <mc:Choice xmlns:a14="http://schemas.microsoft.com/office/drawing/2010/main" Requires="a14">
+                <p:sp>
+                  <p:nvSpPr>
+                    <p:cNvPr id="578" name="文本框 577">
+                      <a:extLst>
+                        <a:ext uri="{FF2B5EF4-FFF2-40B4-BE49-F238E27FC236}">
+                          <a16:creationId xmlns:a16="http://schemas.microsoft.com/office/drawing/2014/main" id="{F929DCB4-FF36-4462-8B02-7D0095114FE5}"/>
+                        </a:ext>
+                      </a:extLst>
+                    </p:cNvPr>
+                    <p:cNvSpPr txBox="1"/>
+                    <p:nvPr/>
+                  </p:nvSpPr>
+                  <p:spPr>
+                    <a:xfrm>
+                      <a:off x="656793" y="2203677"/>
+                      <a:ext cx="473528" cy="276999"/>
+                    </a:xfrm>
+                    <a:prstGeom prst="rect">
+                      <a:avLst/>
+                    </a:prstGeom>
+                    <a:noFill/>
+                  </p:spPr>
+                  <p:txBody>
+                    <a:bodyPr wrap="square" rtlCol="0">
+                      <a:spAutoFit/>
+                    </a:bodyPr>
+                    <a:lstStyle/>
+                    <a:p>
+                      <a:pPr/>
+                      <a14:m>
+                        <m:oMathPara xmlns:m="http://schemas.openxmlformats.org/officeDocument/2006/math">
+                          <m:oMathParaPr>
+                            <m:jc m:val="centerGroup"/>
+                          </m:oMathParaPr>
+                          <m:oMath xmlns:m="http://schemas.openxmlformats.org/officeDocument/2006/math">
+                            <m:sSub>
+                              <m:sSubPr>
+                                <m:ctrlPr>
+                                  <a:rPr lang="en-US" altLang="zh-CN" sz="1200" i="1" smtClean="0">
+                                    <a:latin typeface="Cambria Math" panose="02040503050406030204" pitchFamily="18" charset="0"/>
+                                  </a:rPr>
+                                </m:ctrlPr>
+                              </m:sSubPr>
+                              <m:e>
+                                <m:r>
+                                  <a:rPr lang="en-US" altLang="zh-CN" sz="1200" b="0" i="1" smtClean="0">
+                                    <a:latin typeface="Cambria Math" panose="02040503050406030204" pitchFamily="18" charset="0"/>
+                                  </a:rPr>
+                                  <m:t>𝐶</m:t>
+                                </m:r>
+                              </m:e>
+                              <m:sub>
+                                <m:r>
+                                  <a:rPr lang="en-US" altLang="zh-CN" sz="1200" b="0" i="1" smtClean="0">
+                                    <a:latin typeface="Cambria Math" panose="02040503050406030204" pitchFamily="18" charset="0"/>
+                                  </a:rPr>
+                                  <m:t>3</m:t>
+                                </m:r>
+                              </m:sub>
+                            </m:sSub>
+                          </m:oMath>
+                        </m:oMathPara>
+                      </a14:m>
+                      <a:endParaRPr lang="zh-CN" altLang="en-US" sz="1200" dirty="0"/>
+                    </a:p>
+                  </p:txBody>
+                </p:sp>
+              </mc:Choice>
+              <mc:Fallback>
+                <p:sp>
+                  <p:nvSpPr>
+                    <p:cNvPr id="578" name="文本框 577">
+                      <a:extLst>
+                        <a:ext uri="{FF2B5EF4-FFF2-40B4-BE49-F238E27FC236}">
+                          <a16:creationId xmlns:a16="http://schemas.microsoft.com/office/drawing/2014/main" id="{F929DCB4-FF36-4462-8B02-7D0095114FE5}"/>
+                        </a:ext>
+                      </a:extLst>
+                    </p:cNvPr>
+                    <p:cNvSpPr txBox="1">
+                      <a:spLocks noRot="1" noChangeAspect="1" noMove="1" noResize="1" noEditPoints="1" noAdjustHandles="1" noChangeArrowheads="1" noChangeShapeType="1" noTextEdit="1"/>
+                    </p:cNvSpPr>
+                    <p:nvPr/>
+                  </p:nvSpPr>
+                  <p:spPr>
+                    <a:xfrm>
+                      <a:off x="656793" y="2203677"/>
+                      <a:ext cx="473528" cy="276999"/>
+                    </a:xfrm>
+                    <a:prstGeom prst="rect">
+                      <a:avLst/>
+                    </a:prstGeom>
+                    <a:blipFill>
+                      <a:blip r:embed="rId6"/>
+                      <a:stretch>
+                        <a:fillRect/>
+                      </a:stretch>
+                    </a:blipFill>
+                  </p:spPr>
+                  <p:txBody>
+                    <a:bodyPr/>
+                    <a:lstStyle/>
+                    <a:p>
+                      <a:r>
+                        <a:rPr lang="zh-CN" altLang="en-US">
+                          <a:noFill/>
+                        </a:rPr>
+                        <a:t> </a:t>
+                      </a:r>
+                    </a:p>
+                  </p:txBody>
+                </p:sp>
+              </mc:Fallback>
+            </mc:AlternateContent>
+            <p:sp>
+              <p:nvSpPr>
+                <p:cNvPr id="535" name="星形: 五角 534">
+                  <a:extLst>
+                    <a:ext uri="{FF2B5EF4-FFF2-40B4-BE49-F238E27FC236}">
+                      <a16:creationId xmlns:a16="http://schemas.microsoft.com/office/drawing/2014/main" id="{EB64C830-BC92-455E-9A86-864E5CBCEAC8}"/>
+                    </a:ext>
+                  </a:extLst>
+                </p:cNvPr>
+                <p:cNvSpPr/>
+                <p:nvPr/>
+              </p:nvSpPr>
+              <p:spPr>
+                <a:xfrm rot="1001571">
+                  <a:off x="2062187" y="3069225"/>
+                  <a:ext cx="137160" cy="137160"/>
+                </a:xfrm>
+                <a:prstGeom prst="star5">
+                  <a:avLst/>
+                </a:prstGeom>
+                <a:solidFill>
+                  <a:schemeClr val="accent6">
+                    <a:lumMod val="75000"/>
+                  </a:schemeClr>
+                </a:solidFill>
+                <a:ln>
+                  <a:solidFill>
+                    <a:schemeClr val="accent6">
+                      <a:lumMod val="75000"/>
+                    </a:schemeClr>
+                  </a:solidFill>
+                </a:ln>
+              </p:spPr>
+              <p:style>
+                <a:lnRef idx="2">
+                  <a:schemeClr val="accent1">
+                    <a:shade val="50000"/>
+                  </a:schemeClr>
+                </a:lnRef>
+                <a:fillRef idx="1">
+                  <a:schemeClr val="accent1"/>
+                </a:fillRef>
+                <a:effectRef idx="0">
+                  <a:schemeClr val="accent1"/>
+                </a:effectRef>
+                <a:fontRef idx="minor">
+                  <a:schemeClr val="lt1"/>
+                </a:fontRef>
+              </p:style>
+              <p:txBody>
+                <a:bodyPr rtlCol="0" anchor="ctr"/>
+                <a:lstStyle/>
+                <a:p>
+                  <a:pPr algn="ctr"/>
+                  <a:endParaRPr lang="zh-CN" altLang="en-US"/>
+                </a:p>
+              </p:txBody>
+            </p:sp>
+            <p:sp>
+              <p:nvSpPr>
+                <p:cNvPr id="539" name="星形: 五角 538">
+                  <a:extLst>
+                    <a:ext uri="{FF2B5EF4-FFF2-40B4-BE49-F238E27FC236}">
+                      <a16:creationId xmlns:a16="http://schemas.microsoft.com/office/drawing/2014/main" id="{A40C4014-3338-489B-93E6-8CBEF61F1C99}"/>
+                    </a:ext>
+                  </a:extLst>
+                </p:cNvPr>
+                <p:cNvSpPr/>
+                <p:nvPr/>
+              </p:nvSpPr>
+              <p:spPr>
+                <a:xfrm rot="1548584">
+                  <a:off x="1644919" y="2822795"/>
+                  <a:ext cx="137160" cy="137160"/>
+                </a:xfrm>
+                <a:prstGeom prst="star5">
+                  <a:avLst/>
+                </a:prstGeom>
+                <a:solidFill>
+                  <a:schemeClr val="accent6">
+                    <a:lumMod val="75000"/>
+                  </a:schemeClr>
+                </a:solidFill>
+                <a:ln>
+                  <a:solidFill>
+                    <a:schemeClr val="accent6">
+                      <a:lumMod val="75000"/>
+                    </a:schemeClr>
+                  </a:solidFill>
+                </a:ln>
+              </p:spPr>
+              <p:style>
+                <a:lnRef idx="2">
+                  <a:schemeClr val="accent1">
+                    <a:shade val="50000"/>
+                  </a:schemeClr>
+                </a:lnRef>
+                <a:fillRef idx="1">
+                  <a:schemeClr val="accent1"/>
+                </a:fillRef>
+                <a:effectRef idx="0">
+                  <a:schemeClr val="accent1"/>
+                </a:effectRef>
+                <a:fontRef idx="minor">
+                  <a:schemeClr val="lt1"/>
+                </a:fontRef>
+              </p:style>
+              <p:txBody>
+                <a:bodyPr rtlCol="0" anchor="ctr"/>
+                <a:lstStyle/>
+                <a:p>
+                  <a:pPr algn="ctr"/>
+                  <a:endParaRPr lang="zh-CN" altLang="en-US"/>
+                </a:p>
+              </p:txBody>
+            </p:sp>
+            <p:sp>
+              <p:nvSpPr>
+                <p:cNvPr id="543" name="星形: 五角 542">
+                  <a:extLst>
+                    <a:ext uri="{FF2B5EF4-FFF2-40B4-BE49-F238E27FC236}">
+                      <a16:creationId xmlns:a16="http://schemas.microsoft.com/office/drawing/2014/main" id="{5E743DD9-3FAB-4FEE-B30A-F063B81098A8}"/>
+                    </a:ext>
+                  </a:extLst>
+                </p:cNvPr>
+                <p:cNvSpPr/>
+                <p:nvPr/>
+              </p:nvSpPr>
+              <p:spPr>
+                <a:xfrm rot="18663228">
+                  <a:off x="1712091" y="2042117"/>
+                  <a:ext cx="121920" cy="137160"/>
+                </a:xfrm>
+                <a:prstGeom prst="star5">
+                  <a:avLst/>
+                </a:prstGeom>
+                <a:solidFill>
+                  <a:srgbClr val="C00000"/>
+                </a:solidFill>
+                <a:ln>
+                  <a:solidFill>
+                    <a:srgbClr val="C00000"/>
+                  </a:solidFill>
+                </a:ln>
+              </p:spPr>
+              <p:style>
+                <a:lnRef idx="2">
+                  <a:schemeClr val="accent1">
+                    <a:shade val="50000"/>
+                  </a:schemeClr>
+                </a:lnRef>
+                <a:fillRef idx="1">
+                  <a:schemeClr val="accent1"/>
+                </a:fillRef>
+                <a:effectRef idx="0">
+                  <a:schemeClr val="accent1"/>
+                </a:effectRef>
+                <a:fontRef idx="minor">
+                  <a:schemeClr val="lt1"/>
+                </a:fontRef>
+              </p:style>
+              <p:txBody>
+                <a:bodyPr rtlCol="0" anchor="ctr"/>
+                <a:lstStyle/>
+                <a:p>
+                  <a:pPr algn="ctr"/>
+                  <a:endParaRPr lang="zh-CN" altLang="en-US"/>
+                </a:p>
+              </p:txBody>
+            </p:sp>
+            <p:sp>
+              <p:nvSpPr>
+                <p:cNvPr id="230" name="星形: 五角 229">
+                  <a:extLst>
+                    <a:ext uri="{FF2B5EF4-FFF2-40B4-BE49-F238E27FC236}">
+                      <a16:creationId xmlns:a16="http://schemas.microsoft.com/office/drawing/2014/main" id="{3FE5C256-0A58-4589-B30D-BDD46B0B02CB}"/>
+                    </a:ext>
+                  </a:extLst>
+                </p:cNvPr>
+                <p:cNvSpPr/>
+                <p:nvPr/>
+              </p:nvSpPr>
+              <p:spPr>
+                <a:xfrm rot="20997962">
+                  <a:off x="2219005" y="5947105"/>
+                  <a:ext cx="137160" cy="137160"/>
+                </a:xfrm>
+                <a:prstGeom prst="star5">
+                  <a:avLst/>
+                </a:prstGeom>
+                <a:solidFill>
+                  <a:schemeClr val="accent6">
+                    <a:lumMod val="75000"/>
+                  </a:schemeClr>
+                </a:solidFill>
+                <a:ln>
+                  <a:solidFill>
+                    <a:schemeClr val="accent6">
+                      <a:lumMod val="75000"/>
+                    </a:schemeClr>
+                  </a:solidFill>
+                </a:ln>
+              </p:spPr>
+              <p:style>
+                <a:lnRef idx="2">
+                  <a:schemeClr val="accent1">
+                    <a:shade val="50000"/>
+                  </a:schemeClr>
+                </a:lnRef>
+                <a:fillRef idx="1">
+                  <a:schemeClr val="accent1"/>
+                </a:fillRef>
+                <a:effectRef idx="0">
+                  <a:schemeClr val="accent1"/>
+                </a:effectRef>
+                <a:fontRef idx="minor">
+                  <a:schemeClr val="lt1"/>
+                </a:fontRef>
+              </p:style>
+              <p:txBody>
+                <a:bodyPr rtlCol="0" anchor="ctr"/>
+                <a:lstStyle/>
+                <a:p>
+                  <a:pPr algn="ctr"/>
+                  <a:endParaRPr lang="zh-CN" altLang="en-US"/>
+                </a:p>
+              </p:txBody>
+            </p:sp>
+            <p:sp>
+              <p:nvSpPr>
+                <p:cNvPr id="231" name="星形: 五角 230">
+                  <a:extLst>
+                    <a:ext uri="{FF2B5EF4-FFF2-40B4-BE49-F238E27FC236}">
+                      <a16:creationId xmlns:a16="http://schemas.microsoft.com/office/drawing/2014/main" id="{626D8A72-9A71-4591-AD32-888567D6964A}"/>
+                    </a:ext>
+                  </a:extLst>
+                </p:cNvPr>
+                <p:cNvSpPr/>
+                <p:nvPr/>
+              </p:nvSpPr>
+              <p:spPr>
+                <a:xfrm rot="1548584">
+                  <a:off x="1914205" y="5748986"/>
+                  <a:ext cx="137160" cy="137160"/>
+                </a:xfrm>
+                <a:prstGeom prst="star5">
+                  <a:avLst/>
+                </a:prstGeom>
+                <a:solidFill>
+                  <a:schemeClr val="accent6">
+                    <a:lumMod val="75000"/>
+                  </a:schemeClr>
+                </a:solidFill>
+                <a:ln>
+                  <a:solidFill>
+                    <a:schemeClr val="accent6">
+                      <a:lumMod val="75000"/>
+                    </a:schemeClr>
+                  </a:solidFill>
+                </a:ln>
+              </p:spPr>
+              <p:style>
+                <a:lnRef idx="2">
+                  <a:schemeClr val="accent1">
+                    <a:shade val="50000"/>
+                  </a:schemeClr>
+                </a:lnRef>
+                <a:fillRef idx="1">
+                  <a:schemeClr val="accent1"/>
+                </a:fillRef>
+                <a:effectRef idx="0">
+                  <a:schemeClr val="accent1"/>
+                </a:effectRef>
+                <a:fontRef idx="minor">
+                  <a:schemeClr val="lt1"/>
+                </a:fontRef>
+              </p:style>
+              <p:txBody>
+                <a:bodyPr rtlCol="0" anchor="ctr"/>
+                <a:lstStyle/>
+                <a:p>
+                  <a:pPr algn="ctr"/>
+                  <a:endParaRPr lang="zh-CN" altLang="en-US"/>
+                </a:p>
+              </p:txBody>
+            </p:sp>
+            <p:sp>
+              <p:nvSpPr>
+                <p:cNvPr id="232" name="星形: 五角 231">
+                  <a:extLst>
+                    <a:ext uri="{FF2B5EF4-FFF2-40B4-BE49-F238E27FC236}">
+                      <a16:creationId xmlns:a16="http://schemas.microsoft.com/office/drawing/2014/main" id="{A50893CA-41A2-4CDD-B658-2C83AF59A789}"/>
+                    </a:ext>
+                  </a:extLst>
+                </p:cNvPr>
+                <p:cNvSpPr/>
+                <p:nvPr/>
+              </p:nvSpPr>
+              <p:spPr>
+                <a:xfrm>
+                  <a:off x="1769425" y="5604206"/>
+                  <a:ext cx="121920" cy="137160"/>
+                </a:xfrm>
+                <a:prstGeom prst="star5">
+                  <a:avLst/>
+                </a:prstGeom>
+                <a:solidFill>
+                  <a:schemeClr val="accent6">
+                    <a:lumMod val="75000"/>
+                  </a:schemeClr>
+                </a:solidFill>
+                <a:ln>
+                  <a:solidFill>
+                    <a:schemeClr val="accent6">
+                      <a:lumMod val="75000"/>
+                    </a:schemeClr>
+                  </a:solidFill>
+                </a:ln>
+              </p:spPr>
+              <p:style>
+                <a:lnRef idx="2">
+                  <a:schemeClr val="accent1">
+                    <a:shade val="50000"/>
+                  </a:schemeClr>
+                </a:lnRef>
+                <a:fillRef idx="1">
+                  <a:schemeClr val="accent1"/>
+                </a:fillRef>
+                <a:effectRef idx="0">
+                  <a:schemeClr val="accent1"/>
+                </a:effectRef>
+                <a:fontRef idx="minor">
+                  <a:schemeClr val="lt1"/>
+                </a:fontRef>
+              </p:style>
+              <p:txBody>
+                <a:bodyPr rtlCol="0" anchor="ctr"/>
+                <a:lstStyle/>
+                <a:p>
+                  <a:pPr algn="ctr"/>
+                  <a:endParaRPr lang="zh-CN" altLang="en-US"/>
+                </a:p>
+              </p:txBody>
+            </p:sp>
+            <p:sp>
+              <p:nvSpPr>
+                <p:cNvPr id="233" name="星形: 五角 232">
+                  <a:extLst>
+                    <a:ext uri="{FF2B5EF4-FFF2-40B4-BE49-F238E27FC236}">
+                      <a16:creationId xmlns:a16="http://schemas.microsoft.com/office/drawing/2014/main" id="{E34FB7BE-4125-4E2A-AAE1-FBD29E0A8B94}"/>
+                    </a:ext>
+                  </a:extLst>
+                </p:cNvPr>
+                <p:cNvSpPr/>
+                <p:nvPr/>
+              </p:nvSpPr>
+              <p:spPr>
+                <a:xfrm rot="3317061">
+                  <a:off x="2200923" y="4366240"/>
+                  <a:ext cx="121920" cy="137160"/>
+                </a:xfrm>
+                <a:prstGeom prst="star5">
+                  <a:avLst/>
+                </a:prstGeom>
+                <a:solidFill>
+                  <a:srgbClr val="C00000"/>
+                </a:solidFill>
+                <a:ln>
+                  <a:solidFill>
+                    <a:srgbClr val="C00000"/>
+                  </a:solidFill>
+                </a:ln>
+              </p:spPr>
+              <p:style>
+                <a:lnRef idx="2">
+                  <a:schemeClr val="accent1">
+                    <a:shade val="50000"/>
+                  </a:schemeClr>
+                </a:lnRef>
+                <a:fillRef idx="1">
+                  <a:schemeClr val="accent1"/>
+                </a:fillRef>
+                <a:effectRef idx="0">
+                  <a:schemeClr val="accent1"/>
+                </a:effectRef>
+                <a:fontRef idx="minor">
+                  <a:schemeClr val="lt1"/>
+                </a:fontRef>
+              </p:style>
+              <p:txBody>
+                <a:bodyPr rtlCol="0" anchor="ctr"/>
+                <a:lstStyle/>
+                <a:p>
+                  <a:pPr algn="ctr"/>
+                  <a:endParaRPr lang="zh-CN" altLang="en-US"/>
+                </a:p>
+              </p:txBody>
+            </p:sp>
+            <p:sp>
+              <p:nvSpPr>
+                <p:cNvPr id="288" name="平行四边形 287">
+                  <a:extLst>
+                    <a:ext uri="{FF2B5EF4-FFF2-40B4-BE49-F238E27FC236}">
+                      <a16:creationId xmlns:a16="http://schemas.microsoft.com/office/drawing/2014/main" id="{0EC3A780-2CFD-4167-BCFE-3412D2FBFD09}"/>
+                    </a:ext>
+                  </a:extLst>
+                </p:cNvPr>
+                <p:cNvSpPr/>
+                <p:nvPr/>
+              </p:nvSpPr>
+              <p:spPr>
+                <a:xfrm>
+                  <a:off x="3191216" y="2078627"/>
+                  <a:ext cx="388620" cy="220980"/>
+                </a:xfrm>
+                <a:prstGeom prst="parallelogram">
+                  <a:avLst>
+                    <a:gd name="adj" fmla="val 55212"/>
+                  </a:avLst>
+                </a:prstGeom>
+                <a:solidFill>
+                  <a:schemeClr val="accent1">
+                    <a:lumMod val="40000"/>
+                    <a:lumOff val="60000"/>
+                  </a:schemeClr>
+                </a:solidFill>
+                <a:ln>
+                  <a:solidFill>
+                    <a:schemeClr val="accent1">
+                      <a:lumMod val="40000"/>
+                      <a:lumOff val="60000"/>
+                    </a:schemeClr>
+                  </a:solidFill>
+                </a:ln>
+              </p:spPr>
+              <p:style>
+                <a:lnRef idx="2">
+                  <a:schemeClr val="accent1">
+                    <a:shade val="50000"/>
+                  </a:schemeClr>
+                </a:lnRef>
+                <a:fillRef idx="1">
+                  <a:schemeClr val="accent1"/>
+                </a:fillRef>
+                <a:effectRef idx="0">
+                  <a:schemeClr val="accent1"/>
+                </a:effectRef>
+                <a:fontRef idx="minor">
+                  <a:schemeClr val="lt1"/>
+                </a:fontRef>
+              </p:style>
+              <p:txBody>
+                <a:bodyPr rtlCol="0" anchor="ctr"/>
+                <a:lstStyle/>
+                <a:p>
+                  <a:pPr algn="ctr"/>
+                  <a:endParaRPr lang="zh-CN" altLang="en-US" dirty="0"/>
+                </a:p>
+              </p:txBody>
+            </p:sp>
+            <p:sp>
+              <p:nvSpPr>
+                <p:cNvPr id="301" name="等腰三角形 300">
+                  <a:extLst>
+                    <a:ext uri="{FF2B5EF4-FFF2-40B4-BE49-F238E27FC236}">
+                      <a16:creationId xmlns:a16="http://schemas.microsoft.com/office/drawing/2014/main" id="{92CBC8B4-45A1-422E-AE94-F9DA4F7C16FA}"/>
+                    </a:ext>
+                  </a:extLst>
+                </p:cNvPr>
+                <p:cNvSpPr/>
+                <p:nvPr/>
+              </p:nvSpPr>
+              <p:spPr>
+                <a:xfrm>
+                  <a:off x="5469596" y="1594757"/>
+                  <a:ext cx="99060" cy="99060"/>
+                </a:xfrm>
+                <a:prstGeom prst="triangle">
+                  <a:avLst/>
+                </a:prstGeom>
+                <a:solidFill>
+                  <a:srgbClr val="92D050"/>
+                </a:solidFill>
+                <a:ln>
+                  <a:solidFill>
+                    <a:srgbClr val="92D050"/>
+                  </a:solidFill>
+                </a:ln>
+              </p:spPr>
+              <p:style>
+                <a:lnRef idx="2">
+                  <a:schemeClr val="accent1">
+                    <a:shade val="50000"/>
+                  </a:schemeClr>
+                </a:lnRef>
+                <a:fillRef idx="1">
+                  <a:schemeClr val="accent1"/>
+                </a:fillRef>
+                <a:effectRef idx="0">
+                  <a:schemeClr val="accent1"/>
+                </a:effectRef>
+                <a:fontRef idx="minor">
+                  <a:schemeClr val="lt1"/>
+                </a:fontRef>
+              </p:style>
+              <p:txBody>
+                <a:bodyPr rtlCol="0" anchor="ctr"/>
+                <a:lstStyle/>
+                <a:p>
+                  <a:pPr algn="ctr"/>
+                  <a:endParaRPr lang="zh-CN" altLang="en-US"/>
+                </a:p>
+              </p:txBody>
+            </p:sp>
+            <p:sp>
+              <p:nvSpPr>
+                <p:cNvPr id="302" name="等腰三角形 301">
+                  <a:extLst>
+                    <a:ext uri="{FF2B5EF4-FFF2-40B4-BE49-F238E27FC236}">
+                      <a16:creationId xmlns:a16="http://schemas.microsoft.com/office/drawing/2014/main" id="{7C7B2EB2-7C71-4692-A95E-8A264DA12300}"/>
+                    </a:ext>
+                  </a:extLst>
+                </p:cNvPr>
+                <p:cNvSpPr/>
+                <p:nvPr/>
+              </p:nvSpPr>
+              <p:spPr>
+                <a:xfrm>
+                  <a:off x="5256236" y="1274717"/>
+                  <a:ext cx="99060" cy="99060"/>
+                </a:xfrm>
+                <a:prstGeom prst="triangle">
+                  <a:avLst/>
+                </a:prstGeom>
+                <a:solidFill>
+                  <a:srgbClr val="92D050"/>
+                </a:solidFill>
+                <a:ln>
+                  <a:solidFill>
+                    <a:srgbClr val="92D050"/>
+                  </a:solidFill>
+                </a:ln>
+              </p:spPr>
+              <p:style>
+                <a:lnRef idx="2">
+                  <a:schemeClr val="accent1">
+                    <a:shade val="50000"/>
+                  </a:schemeClr>
+                </a:lnRef>
+                <a:fillRef idx="1">
+                  <a:schemeClr val="accent1"/>
+                </a:fillRef>
+                <a:effectRef idx="0">
+                  <a:schemeClr val="accent1"/>
+                </a:effectRef>
+                <a:fontRef idx="minor">
+                  <a:schemeClr val="lt1"/>
+                </a:fontRef>
+              </p:style>
+              <p:txBody>
+                <a:bodyPr rtlCol="0" anchor="ctr"/>
+                <a:lstStyle/>
+                <a:p>
+                  <a:pPr algn="ctr"/>
+                  <a:endParaRPr lang="zh-CN" altLang="en-US"/>
+                </a:p>
+              </p:txBody>
+            </p:sp>
+          </p:grpSp>
+          <p:grpSp>
+            <p:nvGrpSpPr>
+              <p:cNvPr id="624" name="组合 623">
+                <a:extLst>
+                  <a:ext uri="{FF2B5EF4-FFF2-40B4-BE49-F238E27FC236}">
+                    <a16:creationId xmlns:a16="http://schemas.microsoft.com/office/drawing/2014/main" id="{5E4C235A-0A53-4DA5-B92B-4B1A537E0194}"/>
+                  </a:ext>
+                </a:extLst>
+              </p:cNvPr>
+              <p:cNvGrpSpPr/>
+              <p:nvPr/>
+            </p:nvGrpSpPr>
+            <p:grpSpPr>
+              <a:xfrm>
+                <a:off x="327879" y="3706728"/>
+                <a:ext cx="6310057" cy="2390657"/>
+                <a:chOff x="-120284" y="3624061"/>
+                <a:chExt cx="6310057" cy="2390657"/>
+              </a:xfrm>
+            </p:grpSpPr>
+            <p:sp>
+              <p:nvSpPr>
+                <p:cNvPr id="507" name="平行四边形 506">
+                  <a:extLst>
+                    <a:ext uri="{FF2B5EF4-FFF2-40B4-BE49-F238E27FC236}">
+                      <a16:creationId xmlns:a16="http://schemas.microsoft.com/office/drawing/2014/main" id="{3C8FFEC6-F233-4304-87EC-35F9CBE02B22}"/>
+                    </a:ext>
+                  </a:extLst>
+                </p:cNvPr>
+                <p:cNvSpPr/>
+                <p:nvPr/>
+              </p:nvSpPr>
+              <p:spPr>
+                <a:xfrm>
+                  <a:off x="-120284" y="3690822"/>
+                  <a:ext cx="6310057" cy="2289489"/>
+                </a:xfrm>
+                <a:prstGeom prst="parallelogram">
+                  <a:avLst>
+                    <a:gd name="adj" fmla="val 88013"/>
+                  </a:avLst>
+                </a:prstGeom>
+                <a:solidFill>
+                  <a:schemeClr val="accent6">
+                    <a:lumMod val="20000"/>
+                    <a:lumOff val="80000"/>
+                  </a:schemeClr>
+                </a:solidFill>
+                <a:ln>
+                  <a:solidFill>
+                    <a:schemeClr val="accent6">
+                      <a:lumMod val="20000"/>
+                      <a:lumOff val="80000"/>
+                    </a:schemeClr>
+                  </a:solidFill>
+                </a:ln>
+              </p:spPr>
+              <p:style>
+                <a:lnRef idx="2">
+                  <a:schemeClr val="accent1">
+                    <a:shade val="50000"/>
+                  </a:schemeClr>
+                </a:lnRef>
+                <a:fillRef idx="1">
+                  <a:schemeClr val="accent1"/>
+                </a:fillRef>
+                <a:effectRef idx="0">
+                  <a:schemeClr val="accent1"/>
+                </a:effectRef>
+                <a:fontRef idx="minor">
+                  <a:schemeClr val="lt1"/>
+                </a:fontRef>
+              </p:style>
+              <p:txBody>
+                <a:bodyPr rtlCol="0" anchor="ctr"/>
+                <a:lstStyle/>
+                <a:p>
+                  <a:pPr algn="ctr"/>
+                  <a:endParaRPr lang="zh-CN" altLang="en-US" dirty="0"/>
+                </a:p>
+              </p:txBody>
+            </p:sp>
+            <p:sp>
+              <p:nvSpPr>
+                <p:cNvPr id="508" name="立方体 507">
+                  <a:extLst>
+                    <a:ext uri="{FF2B5EF4-FFF2-40B4-BE49-F238E27FC236}">
+                      <a16:creationId xmlns:a16="http://schemas.microsoft.com/office/drawing/2014/main" id="{3610096C-4E08-469E-A49C-96C4B95E0CA7}"/>
+                    </a:ext>
+                  </a:extLst>
+                </p:cNvPr>
+                <p:cNvSpPr/>
+                <p:nvPr/>
+              </p:nvSpPr>
+              <p:spPr>
+                <a:xfrm>
+                  <a:off x="1327109" y="4280334"/>
+                  <a:ext cx="481630" cy="566997"/>
+                </a:xfrm>
+                <a:prstGeom prst="cube">
+                  <a:avLst/>
+                </a:prstGeom>
+                <a:solidFill>
+                  <a:schemeClr val="accent1">
+                    <a:lumMod val="40000"/>
+                    <a:lumOff val="60000"/>
+                  </a:schemeClr>
+                </a:solidFill>
+                <a:ln>
+                  <a:solidFill>
+                    <a:schemeClr val="accent1">
+                      <a:lumMod val="40000"/>
+                      <a:lumOff val="60000"/>
+                    </a:schemeClr>
+                  </a:solidFill>
+                </a:ln>
+              </p:spPr>
+              <p:style>
+                <a:lnRef idx="2">
+                  <a:schemeClr val="accent1">
+                    <a:shade val="50000"/>
+                  </a:schemeClr>
+                </a:lnRef>
+                <a:fillRef idx="1">
+                  <a:schemeClr val="accent1"/>
+                </a:fillRef>
+                <a:effectRef idx="0">
+                  <a:schemeClr val="accent1"/>
+                </a:effectRef>
+                <a:fontRef idx="minor">
+                  <a:schemeClr val="lt1"/>
+                </a:fontRef>
+              </p:style>
+              <p:txBody>
+                <a:bodyPr rtlCol="0" anchor="ctr"/>
+                <a:lstStyle/>
+                <a:p>
+                  <a:pPr algn="ctr"/>
+                  <a:endParaRPr lang="zh-CN" altLang="en-US"/>
+                </a:p>
+              </p:txBody>
+            </p:sp>
+            <p:sp>
+              <p:nvSpPr>
+                <p:cNvPr id="510" name="立方体 509">
+                  <a:extLst>
+                    <a:ext uri="{FF2B5EF4-FFF2-40B4-BE49-F238E27FC236}">
+                      <a16:creationId xmlns:a16="http://schemas.microsoft.com/office/drawing/2014/main" id="{29F4CFFB-9C37-4C92-A490-60AE47E35DF9}"/>
+                    </a:ext>
+                  </a:extLst>
+                </p:cNvPr>
+                <p:cNvSpPr/>
+                <p:nvPr/>
+              </p:nvSpPr>
+              <p:spPr>
+                <a:xfrm>
+                  <a:off x="3684480" y="3624061"/>
+                  <a:ext cx="308730" cy="505595"/>
+                </a:xfrm>
+                <a:prstGeom prst="cube">
+                  <a:avLst/>
+                </a:prstGeom>
+                <a:solidFill>
+                  <a:schemeClr val="accent1">
+                    <a:lumMod val="40000"/>
+                    <a:lumOff val="60000"/>
+                  </a:schemeClr>
+                </a:solidFill>
+                <a:ln>
+                  <a:solidFill>
+                    <a:schemeClr val="accent1">
+                      <a:lumMod val="40000"/>
+                      <a:lumOff val="60000"/>
+                    </a:schemeClr>
+                  </a:solidFill>
+                </a:ln>
+              </p:spPr>
+              <p:style>
+                <a:lnRef idx="2">
+                  <a:schemeClr val="accent1">
+                    <a:shade val="50000"/>
+                  </a:schemeClr>
+                </a:lnRef>
+                <a:fillRef idx="1">
+                  <a:schemeClr val="accent1"/>
+                </a:fillRef>
+                <a:effectRef idx="0">
+                  <a:schemeClr val="accent1"/>
+                </a:effectRef>
+                <a:fontRef idx="minor">
+                  <a:schemeClr val="lt1"/>
+                </a:fontRef>
+              </p:style>
+              <p:txBody>
+                <a:bodyPr rtlCol="0" anchor="ctr"/>
+                <a:lstStyle/>
+                <a:p>
+                  <a:pPr algn="ctr"/>
+                  <a:endParaRPr lang="zh-CN" altLang="en-US"/>
+                </a:p>
+              </p:txBody>
+            </p:sp>
+            <p:pic>
+              <p:nvPicPr>
+                <p:cNvPr id="511" name="图片 510">
+                  <a:extLst>
+                    <a:ext uri="{FF2B5EF4-FFF2-40B4-BE49-F238E27FC236}">
+                      <a16:creationId xmlns:a16="http://schemas.microsoft.com/office/drawing/2014/main" id="{0D4ABCA1-DB54-4EB8-9814-5F038605AF2A}"/>
+                    </a:ext>
+                  </a:extLst>
+                </p:cNvPr>
+                <p:cNvPicPr>
+                  <a:picLocks noChangeAspect="1"/>
+                </p:cNvPicPr>
+                <p:nvPr/>
+              </p:nvPicPr>
+              <p:blipFill>
+                <a:blip r:embed="rId7">
+                  <a:extLst>
+                    <a:ext uri="{28A0092B-C50C-407E-A947-70E740481C1C}">
+                      <a14:useLocalDpi xmlns:a14="http://schemas.microsoft.com/office/drawing/2010/main" val="0"/>
+                    </a:ext>
+                  </a:extLst>
+                </a:blip>
+                <a:stretch>
+                  <a:fillRect/>
+                </a:stretch>
+              </p:blipFill>
+              <p:spPr>
+                <a:xfrm>
+                  <a:off x="3049635" y="4317039"/>
+                  <a:ext cx="395832" cy="395832"/>
+                </a:xfrm>
+                <a:prstGeom prst="rect">
+                  <a:avLst/>
+                </a:prstGeom>
+              </p:spPr>
+            </p:pic>
+            <p:pic>
+              <p:nvPicPr>
+                <p:cNvPr id="512" name="图片 511">
+                  <a:extLst>
+                    <a:ext uri="{FF2B5EF4-FFF2-40B4-BE49-F238E27FC236}">
+                      <a16:creationId xmlns:a16="http://schemas.microsoft.com/office/drawing/2014/main" id="{0C468D1B-1E57-4E4D-A16F-3732A5F436BD}"/>
+                    </a:ext>
+                  </a:extLst>
+                </p:cNvPr>
+                <p:cNvPicPr>
+                  <a:picLocks noChangeAspect="1"/>
+                </p:cNvPicPr>
+                <p:nvPr/>
+              </p:nvPicPr>
+              <p:blipFill>
+                <a:blip r:embed="rId8">
+                  <a:extLst>
+                    <a:ext uri="{28A0092B-C50C-407E-A947-70E740481C1C}">
+                      <a14:useLocalDpi xmlns:a14="http://schemas.microsoft.com/office/drawing/2010/main" val="0"/>
+                    </a:ext>
+                  </a:extLst>
+                </a:blip>
+                <a:stretch>
+                  <a:fillRect/>
+                </a:stretch>
+              </p:blipFill>
+              <p:spPr>
+                <a:xfrm>
+                  <a:off x="5276735" y="3726465"/>
+                  <a:ext cx="298111" cy="298111"/>
+                </a:xfrm>
+                <a:prstGeom prst="rect">
+                  <a:avLst/>
+                </a:prstGeom>
+              </p:spPr>
+            </p:pic>
+            <p:sp>
+              <p:nvSpPr>
+                <p:cNvPr id="518" name="立方体 517">
+                  <a:extLst>
+                    <a:ext uri="{FF2B5EF4-FFF2-40B4-BE49-F238E27FC236}">
+                      <a16:creationId xmlns:a16="http://schemas.microsoft.com/office/drawing/2014/main" id="{280FE416-A4D5-405A-B1F7-FC0A27B2C9CA}"/>
+                    </a:ext>
+                  </a:extLst>
+                </p:cNvPr>
+                <p:cNvSpPr/>
+                <p:nvPr/>
+              </p:nvSpPr>
+              <p:spPr>
+                <a:xfrm>
+                  <a:off x="2817836" y="4883943"/>
+                  <a:ext cx="348226" cy="551873"/>
+                </a:xfrm>
+                <a:prstGeom prst="cube">
+                  <a:avLst>
+                    <a:gd name="adj" fmla="val 23586"/>
+                  </a:avLst>
+                </a:prstGeom>
+                <a:solidFill>
+                  <a:schemeClr val="accent1">
+                    <a:lumMod val="40000"/>
+                    <a:lumOff val="60000"/>
+                  </a:schemeClr>
+                </a:solidFill>
+                <a:ln>
+                  <a:solidFill>
+                    <a:schemeClr val="accent1">
+                      <a:lumMod val="40000"/>
+                      <a:lumOff val="60000"/>
+                    </a:schemeClr>
+                  </a:solidFill>
+                </a:ln>
+              </p:spPr>
+              <p:style>
+                <a:lnRef idx="2">
+                  <a:schemeClr val="accent1">
+                    <a:shade val="50000"/>
+                  </a:schemeClr>
+                </a:lnRef>
+                <a:fillRef idx="1">
+                  <a:schemeClr val="accent1"/>
+                </a:fillRef>
+                <a:effectRef idx="0">
+                  <a:schemeClr val="accent1"/>
+                </a:effectRef>
+                <a:fontRef idx="minor">
+                  <a:schemeClr val="lt1"/>
+                </a:fontRef>
+              </p:style>
+              <p:txBody>
+                <a:bodyPr rtlCol="0" anchor="ctr"/>
+                <a:lstStyle/>
+                <a:p>
+                  <a:pPr algn="ctr"/>
+                  <a:endParaRPr lang="zh-CN" altLang="en-US" dirty="0"/>
+                </a:p>
+              </p:txBody>
+            </p:sp>
+            <p:sp>
+              <p:nvSpPr>
+                <p:cNvPr id="517" name="椭圆 516">
+                  <a:extLst>
+                    <a:ext uri="{FF2B5EF4-FFF2-40B4-BE49-F238E27FC236}">
+                      <a16:creationId xmlns:a16="http://schemas.microsoft.com/office/drawing/2014/main" id="{411D3AC6-AC90-4859-8DE9-50404C3F2F3B}"/>
+                    </a:ext>
+                  </a:extLst>
+                </p:cNvPr>
+                <p:cNvSpPr/>
+                <p:nvPr/>
+              </p:nvSpPr>
+              <p:spPr>
+                <a:xfrm rot="21014316">
+                  <a:off x="2089444" y="3866783"/>
+                  <a:ext cx="2249504" cy="1412781"/>
+                </a:xfrm>
+                <a:prstGeom prst="ellipse">
+                  <a:avLst/>
+                </a:prstGeom>
+                <a:noFill/>
+                <a:ln>
+                  <a:solidFill>
+                    <a:srgbClr val="C00000"/>
+                  </a:solidFill>
+                  <a:prstDash val="sysDash"/>
+                </a:ln>
+              </p:spPr>
+              <p:style>
+                <a:lnRef idx="2">
+                  <a:schemeClr val="accent1">
+                    <a:shade val="50000"/>
+                  </a:schemeClr>
+                </a:lnRef>
+                <a:fillRef idx="1">
+                  <a:schemeClr val="accent1"/>
+                </a:fillRef>
+                <a:effectRef idx="0">
+                  <a:schemeClr val="accent1"/>
+                </a:effectRef>
+                <a:fontRef idx="minor">
+                  <a:schemeClr val="lt1"/>
+                </a:fontRef>
+              </p:style>
+              <p:txBody>
+                <a:bodyPr rtlCol="0" anchor="ctr"/>
+                <a:lstStyle/>
+                <a:p>
+                  <a:pPr algn="ctr"/>
+                  <a:endParaRPr lang="zh-CN" altLang="en-US"/>
+                </a:p>
+              </p:txBody>
+            </p:sp>
+            <p:sp>
+              <p:nvSpPr>
+                <p:cNvPr id="566" name="立方体 565">
+                  <a:extLst>
+                    <a:ext uri="{FF2B5EF4-FFF2-40B4-BE49-F238E27FC236}">
+                      <a16:creationId xmlns:a16="http://schemas.microsoft.com/office/drawing/2014/main" id="{4D747C29-D793-4FD2-BB2D-8B1F2663F619}"/>
+                    </a:ext>
+                  </a:extLst>
+                </p:cNvPr>
+                <p:cNvSpPr/>
+                <p:nvPr/>
+              </p:nvSpPr>
+              <p:spPr>
+                <a:xfrm>
+                  <a:off x="3730229" y="5190387"/>
+                  <a:ext cx="504174" cy="594917"/>
+                </a:xfrm>
+                <a:prstGeom prst="cube">
+                  <a:avLst/>
+                </a:prstGeom>
+                <a:solidFill>
+                  <a:schemeClr val="accent1">
+                    <a:lumMod val="40000"/>
+                    <a:lumOff val="60000"/>
+                  </a:schemeClr>
+                </a:solidFill>
+                <a:ln>
+                  <a:solidFill>
+                    <a:schemeClr val="accent1">
+                      <a:lumMod val="40000"/>
+                      <a:lumOff val="60000"/>
+                    </a:schemeClr>
+                  </a:solidFill>
+                </a:ln>
+              </p:spPr>
+              <p:style>
+                <a:lnRef idx="2">
+                  <a:schemeClr val="accent1">
+                    <a:shade val="50000"/>
+                  </a:schemeClr>
+                </a:lnRef>
+                <a:fillRef idx="1">
+                  <a:schemeClr val="accent1"/>
+                </a:fillRef>
+                <a:effectRef idx="0">
+                  <a:schemeClr val="accent1"/>
+                </a:effectRef>
+                <a:fontRef idx="minor">
+                  <a:schemeClr val="lt1"/>
+                </a:fontRef>
+              </p:style>
+              <p:txBody>
+                <a:bodyPr rtlCol="0" anchor="ctr"/>
+                <a:lstStyle/>
+                <a:p>
+                  <a:pPr algn="ctr"/>
+                  <a:endParaRPr lang="zh-CN" altLang="en-US"/>
+                </a:p>
+              </p:txBody>
+            </p:sp>
+            <p:sp>
+              <p:nvSpPr>
+                <p:cNvPr id="567" name="立方体 566">
+                  <a:extLst>
+                    <a:ext uri="{FF2B5EF4-FFF2-40B4-BE49-F238E27FC236}">
+                      <a16:creationId xmlns:a16="http://schemas.microsoft.com/office/drawing/2014/main" id="{8AB430F3-C7AE-4726-B59F-D8E9E7B9C5EB}"/>
+                    </a:ext>
+                  </a:extLst>
+                </p:cNvPr>
+                <p:cNvSpPr/>
+                <p:nvPr/>
+              </p:nvSpPr>
+              <p:spPr>
+                <a:xfrm>
+                  <a:off x="3809148" y="4225917"/>
+                  <a:ext cx="348226" cy="551873"/>
+                </a:xfrm>
+                <a:prstGeom prst="cube">
+                  <a:avLst>
+                    <a:gd name="adj" fmla="val 23586"/>
+                  </a:avLst>
+                </a:prstGeom>
+                <a:solidFill>
+                  <a:schemeClr val="accent1">
+                    <a:lumMod val="40000"/>
+                    <a:lumOff val="60000"/>
+                  </a:schemeClr>
+                </a:solidFill>
+                <a:ln>
+                  <a:solidFill>
+                    <a:schemeClr val="accent1">
+                      <a:lumMod val="40000"/>
+                      <a:lumOff val="60000"/>
+                    </a:schemeClr>
+                  </a:solidFill>
+                </a:ln>
+              </p:spPr>
+              <p:style>
+                <a:lnRef idx="2">
+                  <a:schemeClr val="accent1">
+                    <a:shade val="50000"/>
+                  </a:schemeClr>
+                </a:lnRef>
+                <a:fillRef idx="1">
+                  <a:schemeClr val="accent1"/>
+                </a:fillRef>
+                <a:effectRef idx="0">
+                  <a:schemeClr val="accent1"/>
+                </a:effectRef>
+                <a:fontRef idx="minor">
+                  <a:schemeClr val="lt1"/>
+                </a:fontRef>
+              </p:style>
+              <p:txBody>
+                <a:bodyPr rtlCol="0" anchor="ctr"/>
+                <a:lstStyle/>
+                <a:p>
+                  <a:pPr algn="ctr"/>
+                  <a:endParaRPr lang="zh-CN" altLang="en-US"/>
+                </a:p>
+              </p:txBody>
+            </p:sp>
+            <p:sp>
+              <p:nvSpPr>
+                <p:cNvPr id="573" name="任意多边形: 形状 572">
+                  <a:extLst>
+                    <a:ext uri="{FF2B5EF4-FFF2-40B4-BE49-F238E27FC236}">
+                      <a16:creationId xmlns:a16="http://schemas.microsoft.com/office/drawing/2014/main" id="{04F14F60-FAC2-401C-98CB-501ACE319721}"/>
+                    </a:ext>
+                  </a:extLst>
+                </p:cNvPr>
+                <p:cNvSpPr/>
+                <p:nvPr/>
+              </p:nvSpPr>
+              <p:spPr>
+                <a:xfrm>
+                  <a:off x="1700676" y="4036219"/>
+                  <a:ext cx="3630943" cy="1466574"/>
+                </a:xfrm>
+                <a:custGeom>
+                  <a:avLst/>
+                  <a:gdLst>
+                    <a:gd name="connsiteX0" fmla="*/ 0 w 3552825"/>
+                    <a:gd name="connsiteY0" fmla="*/ 1485900 h 1563817"/>
+                    <a:gd name="connsiteX1" fmla="*/ 466725 w 3552825"/>
+                    <a:gd name="connsiteY1" fmla="*/ 1047750 h 1563817"/>
+                    <a:gd name="connsiteX2" fmla="*/ 923925 w 3552825"/>
+                    <a:gd name="connsiteY2" fmla="*/ 1543050 h 1563817"/>
+                    <a:gd name="connsiteX3" fmla="*/ 1781175 w 3552825"/>
+                    <a:gd name="connsiteY3" fmla="*/ 1371600 h 1563817"/>
+                    <a:gd name="connsiteX4" fmla="*/ 2752725 w 3552825"/>
+                    <a:gd name="connsiteY4" fmla="*/ 485775 h 1563817"/>
+                    <a:gd name="connsiteX5" fmla="*/ 2952750 w 3552825"/>
+                    <a:gd name="connsiteY5" fmla="*/ 238125 h 1563817"/>
+                    <a:gd name="connsiteX6" fmla="*/ 3552825 w 3552825"/>
+                    <a:gd name="connsiteY6" fmla="*/ 0 h 1563817"/>
+                  </a:gdLst>
+                  <a:ahLst/>
+                  <a:cxnLst>
+                    <a:cxn ang="0">
+                      <a:pos x="connsiteX0" y="connsiteY0"/>
+                    </a:cxn>
+                    <a:cxn ang="0">
+                      <a:pos x="connsiteX1" y="connsiteY1"/>
+                    </a:cxn>
+                    <a:cxn ang="0">
+                      <a:pos x="connsiteX2" y="connsiteY2"/>
+                    </a:cxn>
+                    <a:cxn ang="0">
+                      <a:pos x="connsiteX3" y="connsiteY3"/>
+                    </a:cxn>
+                    <a:cxn ang="0">
+                      <a:pos x="connsiteX4" y="connsiteY4"/>
+                    </a:cxn>
+                    <a:cxn ang="0">
+                      <a:pos x="connsiteX5" y="connsiteY5"/>
+                    </a:cxn>
+                    <a:cxn ang="0">
+                      <a:pos x="connsiteX6" y="connsiteY6"/>
+                    </a:cxn>
+                  </a:cxnLst>
+                  <a:rect l="l" t="t" r="r" b="b"/>
+                  <a:pathLst>
+                    <a:path w="3552825" h="1563817">
+                      <a:moveTo>
+                        <a:pt x="0" y="1485900"/>
+                      </a:moveTo>
+                      <a:cubicBezTo>
+                        <a:pt x="156369" y="1262062"/>
+                        <a:pt x="312738" y="1038225"/>
+                        <a:pt x="466725" y="1047750"/>
+                      </a:cubicBezTo>
+                      <a:cubicBezTo>
+                        <a:pt x="620712" y="1057275"/>
+                        <a:pt x="704850" y="1489075"/>
+                        <a:pt x="923925" y="1543050"/>
+                      </a:cubicBezTo>
+                      <a:cubicBezTo>
+                        <a:pt x="1143000" y="1597025"/>
+                        <a:pt x="1476375" y="1547813"/>
+                        <a:pt x="1781175" y="1371600"/>
+                      </a:cubicBezTo>
+                      <a:cubicBezTo>
+                        <a:pt x="2085975" y="1195387"/>
+                        <a:pt x="2557463" y="674687"/>
+                        <a:pt x="2752725" y="485775"/>
+                      </a:cubicBezTo>
+                      <a:cubicBezTo>
+                        <a:pt x="2947987" y="296863"/>
+                        <a:pt x="2819400" y="319087"/>
+                        <a:pt x="2952750" y="238125"/>
+                      </a:cubicBezTo>
+                      <a:cubicBezTo>
+                        <a:pt x="3086100" y="157163"/>
+                        <a:pt x="3402012" y="23813"/>
+                        <a:pt x="3552825" y="0"/>
+                      </a:cubicBezTo>
+                    </a:path>
+                  </a:pathLst>
+                </a:custGeom>
+                <a:noFill/>
+                <a:ln w="19050">
+                  <a:solidFill>
+                    <a:schemeClr val="accent6">
+                      <a:lumMod val="60000"/>
+                      <a:lumOff val="40000"/>
+                    </a:schemeClr>
+                  </a:solidFill>
+                </a:ln>
+              </p:spPr>
+              <p:style>
+                <a:lnRef idx="2">
+                  <a:schemeClr val="accent1">
+                    <a:shade val="50000"/>
+                  </a:schemeClr>
+                </a:lnRef>
+                <a:fillRef idx="1">
+                  <a:schemeClr val="accent1"/>
+                </a:fillRef>
+                <a:effectRef idx="0">
+                  <a:schemeClr val="accent1"/>
+                </a:effectRef>
+                <a:fontRef idx="minor">
+                  <a:schemeClr val="lt1"/>
+                </a:fontRef>
+              </p:style>
+              <p:txBody>
+                <a:bodyPr rtlCol="0" anchor="ctr"/>
+                <a:lstStyle/>
+                <a:p>
+                  <a:pPr algn="ctr"/>
+                  <a:endParaRPr lang="zh-CN" altLang="en-US"/>
+                </a:p>
+              </p:txBody>
+            </p:sp>
+            <p:grpSp>
+              <p:nvGrpSpPr>
+                <p:cNvPr id="575" name="组合 574">
+                  <a:extLst>
+                    <a:ext uri="{FF2B5EF4-FFF2-40B4-BE49-F238E27FC236}">
+                      <a16:creationId xmlns:a16="http://schemas.microsoft.com/office/drawing/2014/main" id="{DB16CA7D-6D64-44D1-A3D4-605FB67E18B7}"/>
+                    </a:ext>
+                  </a:extLst>
+                </p:cNvPr>
+                <p:cNvGrpSpPr/>
+                <p:nvPr/>
+              </p:nvGrpSpPr>
+              <p:grpSpPr>
+                <a:xfrm>
+                  <a:off x="162779" y="4721390"/>
+                  <a:ext cx="1596047" cy="1293328"/>
+                  <a:chOff x="1412935" y="4599946"/>
+                  <a:chExt cx="1596047" cy="1293328"/>
+                </a:xfrm>
+              </p:grpSpPr>
+              <p:sp>
+                <p:nvSpPr>
+                  <p:cNvPr id="605" name="椭圆 604">
+                    <a:extLst>
+                      <a:ext uri="{FF2B5EF4-FFF2-40B4-BE49-F238E27FC236}">
+                        <a16:creationId xmlns:a16="http://schemas.microsoft.com/office/drawing/2014/main" id="{9FC46889-CDE6-4D6E-A6D7-44F5B8CA140A}"/>
+                      </a:ext>
+                    </a:extLst>
+                  </p:cNvPr>
+                  <p:cNvSpPr/>
+                  <p:nvPr/>
+                </p:nvSpPr>
+                <p:spPr>
+                  <a:xfrm rot="5136353">
+                    <a:off x="1811855" y="4619976"/>
+                    <a:ext cx="579615" cy="686579"/>
+                  </a:xfrm>
+                  <a:prstGeom prst="ellipse">
+                    <a:avLst/>
+                  </a:prstGeom>
+                  <a:solidFill>
+                    <a:schemeClr val="accent4">
+                      <a:lumMod val="20000"/>
+                      <a:lumOff val="80000"/>
+                    </a:schemeClr>
+                  </a:solidFill>
+                  <a:ln>
+                    <a:solidFill>
+                      <a:schemeClr val="accent4">
+                        <a:lumMod val="20000"/>
+                        <a:lumOff val="80000"/>
+                      </a:schemeClr>
+                    </a:solidFill>
+                    <a:prstDash val="sysDash"/>
+                  </a:ln>
+                </p:spPr>
+                <p:style>
+                  <a:lnRef idx="2">
+                    <a:schemeClr val="accent1">
+                      <a:shade val="50000"/>
+                    </a:schemeClr>
+                  </a:lnRef>
+                  <a:fillRef idx="1">
+                    <a:schemeClr val="accent1"/>
+                  </a:fillRef>
+                  <a:effectRef idx="0">
+                    <a:schemeClr val="accent1"/>
+                  </a:effectRef>
+                  <a:fontRef idx="minor">
+                    <a:schemeClr val="lt1"/>
+                  </a:fontRef>
+                </p:style>
+                <p:txBody>
+                  <a:bodyPr rtlCol="0" anchor="ctr"/>
+                  <a:lstStyle/>
+                  <a:p>
+                    <a:pPr algn="ctr"/>
+                    <a:endParaRPr lang="zh-CN" altLang="en-US"/>
+                  </a:p>
+                </p:txBody>
+              </p:sp>
+              <p:sp>
+                <p:nvSpPr>
+                  <p:cNvPr id="606" name="椭圆 605">
+                    <a:extLst>
+                      <a:ext uri="{FF2B5EF4-FFF2-40B4-BE49-F238E27FC236}">
+                        <a16:creationId xmlns:a16="http://schemas.microsoft.com/office/drawing/2014/main" id="{06BEB97D-D22F-4DC9-AC2A-D5831DBBB9DA}"/>
+                      </a:ext>
+                    </a:extLst>
+                  </p:cNvPr>
+                  <p:cNvSpPr/>
+                  <p:nvPr/>
+                </p:nvSpPr>
+                <p:spPr>
+                  <a:xfrm rot="4993526">
+                    <a:off x="1466417" y="5248009"/>
+                    <a:ext cx="579615" cy="686579"/>
+                  </a:xfrm>
+                  <a:prstGeom prst="ellipse">
+                    <a:avLst/>
+                  </a:prstGeom>
+                  <a:solidFill>
+                    <a:schemeClr val="accent4">
+                      <a:lumMod val="20000"/>
+                      <a:lumOff val="80000"/>
+                    </a:schemeClr>
+                  </a:solidFill>
+                  <a:ln>
+                    <a:solidFill>
+                      <a:schemeClr val="accent4">
+                        <a:lumMod val="60000"/>
+                        <a:lumOff val="40000"/>
+                      </a:schemeClr>
+                    </a:solidFill>
+                    <a:prstDash val="sysDash"/>
+                  </a:ln>
+                </p:spPr>
+                <p:style>
+                  <a:lnRef idx="2">
+                    <a:schemeClr val="accent1">
+                      <a:shade val="50000"/>
+                    </a:schemeClr>
+                  </a:lnRef>
+                  <a:fillRef idx="1">
+                    <a:schemeClr val="accent1"/>
+                  </a:fillRef>
+                  <a:effectRef idx="0">
+                    <a:schemeClr val="accent1"/>
+                  </a:effectRef>
+                  <a:fontRef idx="minor">
+                    <a:schemeClr val="lt1"/>
+                  </a:fontRef>
+                </p:style>
+                <p:txBody>
+                  <a:bodyPr rtlCol="0" anchor="ctr"/>
+                  <a:lstStyle/>
+                  <a:p>
+                    <a:pPr algn="ctr"/>
+                    <a:endParaRPr lang="zh-CN" altLang="en-US" dirty="0"/>
+                  </a:p>
+                </p:txBody>
+              </p:sp>
+              <p:pic>
+                <p:nvPicPr>
+                  <p:cNvPr id="608" name="图片 607">
+                    <a:extLst>
+                      <a:ext uri="{FF2B5EF4-FFF2-40B4-BE49-F238E27FC236}">
+                        <a16:creationId xmlns:a16="http://schemas.microsoft.com/office/drawing/2014/main" id="{A1B30398-97F7-4887-A262-49C7067450BE}"/>
+                      </a:ext>
+                    </a:extLst>
+                  </p:cNvPr>
+                  <p:cNvPicPr>
+                    <a:picLocks noChangeAspect="1"/>
+                  </p:cNvPicPr>
+                  <p:nvPr/>
+                </p:nvPicPr>
+                <p:blipFill>
+                  <a:blip r:embed="rId3">
+                    <a:extLst>
+                      <a:ext uri="{28A0092B-C50C-407E-A947-70E740481C1C}">
+                        <a14:useLocalDpi xmlns:a14="http://schemas.microsoft.com/office/drawing/2010/main" val="0"/>
+                      </a:ext>
+                    </a:extLst>
+                  </a:blip>
+                  <a:stretch>
+                    <a:fillRect/>
+                  </a:stretch>
+                </p:blipFill>
+                <p:spPr>
+                  <a:xfrm>
+                    <a:off x="2557892" y="5231044"/>
+                    <a:ext cx="304800" cy="304800"/>
+                  </a:xfrm>
+                  <a:prstGeom prst="rect">
+                    <a:avLst/>
+                  </a:prstGeom>
+                </p:spPr>
+              </p:pic>
+              <p:pic>
+                <p:nvPicPr>
+                  <p:cNvPr id="609" name="图片 608">
+                    <a:extLst>
+                      <a:ext uri="{FF2B5EF4-FFF2-40B4-BE49-F238E27FC236}">
+                        <a16:creationId xmlns:a16="http://schemas.microsoft.com/office/drawing/2014/main" id="{B5C29B32-99E5-4078-91CC-95B277F3A571}"/>
+                      </a:ext>
+                    </a:extLst>
+                  </p:cNvPr>
+                  <p:cNvPicPr>
+                    <a:picLocks noChangeAspect="1"/>
+                  </p:cNvPicPr>
+                  <p:nvPr/>
+                </p:nvPicPr>
+                <p:blipFill>
+                  <a:blip r:embed="rId3">
+                    <a:extLst>
+                      <a:ext uri="{28A0092B-C50C-407E-A947-70E740481C1C}">
+                        <a14:useLocalDpi xmlns:a14="http://schemas.microsoft.com/office/drawing/2010/main" val="0"/>
+                      </a:ext>
+                    </a:extLst>
+                  </a:blip>
+                  <a:stretch>
+                    <a:fillRect/>
+                  </a:stretch>
+                </p:blipFill>
+                <p:spPr>
+                  <a:xfrm>
+                    <a:off x="1603381" y="5655425"/>
+                    <a:ext cx="237849" cy="237849"/>
+                  </a:xfrm>
+                  <a:prstGeom prst="rect">
+                    <a:avLst/>
+                  </a:prstGeom>
+                </p:spPr>
+              </p:pic>
+              <p:pic>
+                <p:nvPicPr>
+                  <p:cNvPr id="611" name="图片 610">
+                    <a:extLst>
+                      <a:ext uri="{FF2B5EF4-FFF2-40B4-BE49-F238E27FC236}">
+                        <a16:creationId xmlns:a16="http://schemas.microsoft.com/office/drawing/2014/main" id="{A07872B7-38FF-4F9F-856B-D82FE0E83D4F}"/>
+                      </a:ext>
+                    </a:extLst>
+                  </p:cNvPr>
+                  <p:cNvPicPr>
+                    <a:picLocks noChangeAspect="1"/>
+                  </p:cNvPicPr>
+                  <p:nvPr/>
+                </p:nvPicPr>
+                <p:blipFill>
+                  <a:blip r:embed="rId3">
+                    <a:extLst>
+                      <a:ext uri="{28A0092B-C50C-407E-A947-70E740481C1C}">
+                        <a14:useLocalDpi xmlns:a14="http://schemas.microsoft.com/office/drawing/2010/main" val="0"/>
+                      </a:ext>
+                    </a:extLst>
+                  </a:blip>
+                  <a:stretch>
+                    <a:fillRect/>
+                  </a:stretch>
+                </p:blipFill>
+                <p:spPr>
+                  <a:xfrm>
+                    <a:off x="1799500" y="5338244"/>
+                    <a:ext cx="239596" cy="239596"/>
+                  </a:xfrm>
+                  <a:prstGeom prst="rect">
+                    <a:avLst/>
+                  </a:prstGeom>
+                </p:spPr>
+              </p:pic>
+              <p:sp>
+                <p:nvSpPr>
+                  <p:cNvPr id="613" name="椭圆 612">
+                    <a:extLst>
+                      <a:ext uri="{FF2B5EF4-FFF2-40B4-BE49-F238E27FC236}">
+                        <a16:creationId xmlns:a16="http://schemas.microsoft.com/office/drawing/2014/main" id="{2E69DF1B-5B99-4AC6-A7F7-511295BE4BFA}"/>
+                      </a:ext>
+                    </a:extLst>
+                  </p:cNvPr>
+                  <p:cNvSpPr/>
+                  <p:nvPr/>
+                </p:nvSpPr>
+                <p:spPr>
+                  <a:xfrm rot="5210808">
+                    <a:off x="2263341" y="5061647"/>
+                    <a:ext cx="654549" cy="836733"/>
+                  </a:xfrm>
+                  <a:prstGeom prst="ellipse">
+                    <a:avLst/>
+                  </a:prstGeom>
+                  <a:solidFill>
+                    <a:schemeClr val="accent4">
+                      <a:lumMod val="40000"/>
+                      <a:lumOff val="60000"/>
+                    </a:schemeClr>
+                  </a:solidFill>
+                  <a:ln>
+                    <a:solidFill>
+                      <a:schemeClr val="accent4"/>
+                    </a:solidFill>
+                    <a:prstDash val="sysDash"/>
+                  </a:ln>
+                </p:spPr>
+                <p:style>
+                  <a:lnRef idx="2">
+                    <a:schemeClr val="accent1">
+                      <a:shade val="50000"/>
+                    </a:schemeClr>
+                  </a:lnRef>
+                  <a:fillRef idx="1">
+                    <a:schemeClr val="accent1"/>
+                  </a:fillRef>
+                  <a:effectRef idx="0">
+                    <a:schemeClr val="accent1"/>
+                  </a:effectRef>
+                  <a:fontRef idx="minor">
+                    <a:schemeClr val="lt1"/>
+                  </a:fontRef>
+                </p:style>
+                <p:txBody>
+                  <a:bodyPr rtlCol="0" anchor="ctr"/>
+                  <a:lstStyle/>
+                  <a:p>
+                    <a:pPr algn="ctr"/>
+                    <a:endParaRPr lang="zh-CN" altLang="en-US"/>
+                  </a:p>
+                </p:txBody>
+              </p:sp>
+              <p:pic>
+                <p:nvPicPr>
+                  <p:cNvPr id="614" name="图片 613">
+                    <a:extLst>
+                      <a:ext uri="{FF2B5EF4-FFF2-40B4-BE49-F238E27FC236}">
+                        <a16:creationId xmlns:a16="http://schemas.microsoft.com/office/drawing/2014/main" id="{4C463F0B-D9AF-40F9-9382-59BEB890592B}"/>
+                      </a:ext>
+                    </a:extLst>
+                  </p:cNvPr>
+                  <p:cNvPicPr>
+                    <a:picLocks noChangeAspect="1"/>
+                  </p:cNvPicPr>
+                  <p:nvPr/>
+                </p:nvPicPr>
+                <p:blipFill>
+                  <a:blip r:embed="rId3">
+                    <a:extLst>
+                      <a:ext uri="{28A0092B-C50C-407E-A947-70E740481C1C}">
+                        <a14:useLocalDpi xmlns:a14="http://schemas.microsoft.com/office/drawing/2010/main" val="0"/>
+                      </a:ext>
+                    </a:extLst>
+                  </a:blip>
+                  <a:stretch>
+                    <a:fillRect/>
+                  </a:stretch>
+                </p:blipFill>
+                <p:spPr>
+                  <a:xfrm>
+                    <a:off x="2177203" y="5395949"/>
+                    <a:ext cx="304800" cy="304800"/>
+                  </a:xfrm>
+                  <a:prstGeom prst="rect">
+                    <a:avLst/>
+                  </a:prstGeom>
+                </p:spPr>
+              </p:pic>
+              <p:pic>
+                <p:nvPicPr>
+                  <p:cNvPr id="615" name="图片 614">
+                    <a:extLst>
+                      <a:ext uri="{FF2B5EF4-FFF2-40B4-BE49-F238E27FC236}">
+                        <a16:creationId xmlns:a16="http://schemas.microsoft.com/office/drawing/2014/main" id="{BE44BBE9-FBC2-49CA-AE81-07E45113B1D5}"/>
+                      </a:ext>
+                    </a:extLst>
+                  </p:cNvPr>
+                  <p:cNvPicPr>
+                    <a:picLocks noChangeAspect="1"/>
+                  </p:cNvPicPr>
+                  <p:nvPr/>
+                </p:nvPicPr>
+                <p:blipFill>
+                  <a:blip r:embed="rId3">
+                    <a:extLst>
+                      <a:ext uri="{28A0092B-C50C-407E-A947-70E740481C1C}">
+                        <a14:useLocalDpi xmlns:a14="http://schemas.microsoft.com/office/drawing/2010/main" val="0"/>
+                      </a:ext>
+                    </a:extLst>
+                  </a:blip>
+                  <a:stretch>
+                    <a:fillRect/>
+                  </a:stretch>
+                </p:blipFill>
+                <p:spPr>
+                  <a:xfrm>
+                    <a:off x="1438510" y="5402928"/>
+                    <a:ext cx="281592" cy="281592"/>
+                  </a:xfrm>
+                  <a:prstGeom prst="rect">
+                    <a:avLst/>
+                  </a:prstGeom>
+                </p:spPr>
+              </p:pic>
+              <p:pic>
+                <p:nvPicPr>
+                  <p:cNvPr id="616" name="图片 615">
+                    <a:extLst>
+                      <a:ext uri="{FF2B5EF4-FFF2-40B4-BE49-F238E27FC236}">
+                        <a16:creationId xmlns:a16="http://schemas.microsoft.com/office/drawing/2014/main" id="{CCBE66FD-0308-4D20-8CCA-C1A71778A4E9}"/>
+                      </a:ext>
+                    </a:extLst>
+                  </p:cNvPr>
+                  <p:cNvPicPr>
+                    <a:picLocks noChangeAspect="1"/>
+                  </p:cNvPicPr>
+                  <p:nvPr/>
+                </p:nvPicPr>
+                <p:blipFill>
+                  <a:blip r:embed="rId3">
+                    <a:extLst>
+                      <a:ext uri="{28A0092B-C50C-407E-A947-70E740481C1C}">
+                        <a14:useLocalDpi xmlns:a14="http://schemas.microsoft.com/office/drawing/2010/main" val="0"/>
+                      </a:ext>
+                    </a:extLst>
+                  </a:blip>
+                  <a:stretch>
+                    <a:fillRect/>
+                  </a:stretch>
+                </p:blipFill>
+                <p:spPr>
+                  <a:xfrm>
+                    <a:off x="2119578" y="4735470"/>
+                    <a:ext cx="304800" cy="304800"/>
+                  </a:xfrm>
+                  <a:prstGeom prst="rect">
+                    <a:avLst/>
+                  </a:prstGeom>
+                </p:spPr>
+              </p:pic>
+              <p:pic>
+                <p:nvPicPr>
+                  <p:cNvPr id="617" name="图片 616">
+                    <a:extLst>
+                      <a:ext uri="{FF2B5EF4-FFF2-40B4-BE49-F238E27FC236}">
+                        <a16:creationId xmlns:a16="http://schemas.microsoft.com/office/drawing/2014/main" id="{1332BFBF-C166-4C98-95A5-635A10D91B1D}"/>
+                      </a:ext>
+                    </a:extLst>
+                  </p:cNvPr>
+                  <p:cNvPicPr>
+                    <a:picLocks noChangeAspect="1"/>
+                  </p:cNvPicPr>
+                  <p:nvPr/>
+                </p:nvPicPr>
+                <p:blipFill>
+                  <a:blip r:embed="rId3">
+                    <a:extLst>
+                      <a:ext uri="{28A0092B-C50C-407E-A947-70E740481C1C}">
+                        <a14:useLocalDpi xmlns:a14="http://schemas.microsoft.com/office/drawing/2010/main" val="0"/>
+                      </a:ext>
+                    </a:extLst>
+                  </a:blip>
+                  <a:stretch>
+                    <a:fillRect/>
+                  </a:stretch>
+                </p:blipFill>
+                <p:spPr>
+                  <a:xfrm>
+                    <a:off x="1767953" y="4866232"/>
+                    <a:ext cx="304800" cy="304800"/>
+                  </a:xfrm>
+                  <a:prstGeom prst="rect">
+                    <a:avLst/>
+                  </a:prstGeom>
+                </p:spPr>
+              </p:pic>
+              <p:pic>
+                <p:nvPicPr>
+                  <p:cNvPr id="618" name="图片 617">
+                    <a:extLst>
+                      <a:ext uri="{FF2B5EF4-FFF2-40B4-BE49-F238E27FC236}">
+                        <a16:creationId xmlns:a16="http://schemas.microsoft.com/office/drawing/2014/main" id="{CECB6CBC-08B4-4D79-A7DC-E446D7E035F1}"/>
+                      </a:ext>
+                    </a:extLst>
+                  </p:cNvPr>
+                  <p:cNvPicPr>
+                    <a:picLocks noChangeAspect="1"/>
+                  </p:cNvPicPr>
+                  <p:nvPr/>
+                </p:nvPicPr>
+                <p:blipFill>
+                  <a:blip r:embed="rId3">
+                    <a:extLst>
+                      <a:ext uri="{28A0092B-C50C-407E-A947-70E740481C1C}">
+                        <a14:useLocalDpi xmlns:a14="http://schemas.microsoft.com/office/drawing/2010/main" val="0"/>
+                      </a:ext>
+                    </a:extLst>
+                  </a:blip>
+                  <a:stretch>
+                    <a:fillRect/>
+                  </a:stretch>
+                </p:blipFill>
+                <p:spPr>
+                  <a:xfrm>
+                    <a:off x="2624959" y="5199340"/>
+                    <a:ext cx="304800" cy="304800"/>
+                  </a:xfrm>
+                  <a:prstGeom prst="rect">
+                    <a:avLst/>
+                  </a:prstGeom>
+                </p:spPr>
+              </p:pic>
+              <mc:AlternateContent xmlns:mc="http://schemas.openxmlformats.org/markup-compatibility/2006">
+                <mc:Choice xmlns:a14="http://schemas.microsoft.com/office/drawing/2010/main" Requires="a14">
+                  <p:sp>
+                    <p:nvSpPr>
+                      <p:cNvPr id="620" name="文本框 619">
+                        <a:extLst>
+                          <a:ext uri="{FF2B5EF4-FFF2-40B4-BE49-F238E27FC236}">
+                            <a16:creationId xmlns:a16="http://schemas.microsoft.com/office/drawing/2014/main" id="{A8DD20F9-0317-41AD-900B-0B0F09D73241}"/>
+                          </a:ext>
+                        </a:extLst>
+                      </p:cNvPr>
+                      <p:cNvSpPr txBox="1"/>
+                      <p:nvPr/>
+                    </p:nvSpPr>
+                    <p:spPr>
+                      <a:xfrm>
+                        <a:off x="1684364" y="5502798"/>
+                        <a:ext cx="380810" cy="276999"/>
+                      </a:xfrm>
+                      <a:prstGeom prst="rect">
+                        <a:avLst/>
+                      </a:prstGeom>
+                      <a:noFill/>
+                    </p:spPr>
+                    <p:txBody>
+                      <a:bodyPr wrap="square" rtlCol="0">
+                        <a:spAutoFit/>
+                      </a:bodyPr>
+                      <a:lstStyle/>
+                      <a:p>
+                        <a:pPr/>
+                        <a14:m>
+                          <m:oMathPara xmlns:m="http://schemas.openxmlformats.org/officeDocument/2006/math">
+                            <m:oMathParaPr>
+                              <m:jc m:val="centerGroup"/>
+                            </m:oMathParaPr>
+                            <m:oMath xmlns:m="http://schemas.openxmlformats.org/officeDocument/2006/math">
+                              <m:sSub>
+                                <m:sSubPr>
+                                  <m:ctrlPr>
+                                    <a:rPr lang="en-US" altLang="zh-CN" sz="1200" i="1" smtClean="0">
+                                      <a:latin typeface="Cambria Math" panose="02040503050406030204" pitchFamily="18" charset="0"/>
+                                    </a:rPr>
+                                  </m:ctrlPr>
+                                </m:sSubPr>
+                                <m:e>
+                                  <m:r>
+                                    <a:rPr lang="en-US" altLang="zh-CN" sz="1200" b="0" i="1" smtClean="0">
+                                      <a:latin typeface="Cambria Math" panose="02040503050406030204" pitchFamily="18" charset="0"/>
+                                    </a:rPr>
+                                    <m:t>𝐶</m:t>
+                                  </m:r>
+                                </m:e>
+                                <m:sub>
+                                  <m:r>
+                                    <a:rPr lang="en-US" altLang="zh-CN" sz="1200" b="0" i="1" smtClean="0">
+                                      <a:latin typeface="Cambria Math" panose="02040503050406030204" pitchFamily="18" charset="0"/>
+                                    </a:rPr>
+                                    <m:t>2</m:t>
+                                  </m:r>
+                                </m:sub>
+                              </m:sSub>
+                            </m:oMath>
+                          </m:oMathPara>
+                        </a14:m>
+                        <a:endParaRPr lang="zh-CN" altLang="en-US" sz="1200" dirty="0"/>
+                      </a:p>
+                    </p:txBody>
+                  </p:sp>
+                </mc:Choice>
+                <mc:Fallback>
+                  <p:sp>
+                    <p:nvSpPr>
+                      <p:cNvPr id="620" name="文本框 619">
+                        <a:extLst>
+                          <a:ext uri="{FF2B5EF4-FFF2-40B4-BE49-F238E27FC236}">
+                            <a16:creationId xmlns:a16="http://schemas.microsoft.com/office/drawing/2014/main" id="{A8DD20F9-0317-41AD-900B-0B0F09D73241}"/>
+                          </a:ext>
+                        </a:extLst>
+                      </p:cNvPr>
+                      <p:cNvSpPr txBox="1">
+                        <a:spLocks noRot="1" noChangeAspect="1" noMove="1" noResize="1" noEditPoints="1" noAdjustHandles="1" noChangeArrowheads="1" noChangeShapeType="1" noTextEdit="1"/>
+                      </p:cNvSpPr>
+                      <p:nvPr/>
+                    </p:nvSpPr>
+                    <p:spPr>
+                      <a:xfrm>
+                        <a:off x="1684364" y="5502798"/>
+                        <a:ext cx="380810" cy="276999"/>
+                      </a:xfrm>
+                      <a:prstGeom prst="rect">
+                        <a:avLst/>
+                      </a:prstGeom>
+                      <a:blipFill>
+                        <a:blip r:embed="rId9"/>
+                        <a:stretch>
+                          <a:fillRect/>
+                        </a:stretch>
+                      </a:blipFill>
+                    </p:spPr>
+                    <p:txBody>
+                      <a:bodyPr/>
+                      <a:lstStyle/>
+                      <a:p>
+                        <a:r>
+                          <a:rPr lang="zh-CN" altLang="en-US">
+                            <a:noFill/>
+                          </a:rPr>
+                          <a:t> </a:t>
+                        </a:r>
+                      </a:p>
+                    </p:txBody>
+                  </p:sp>
+                </mc:Fallback>
+              </mc:AlternateContent>
+              <mc:AlternateContent xmlns:mc="http://schemas.openxmlformats.org/markup-compatibility/2006">
+                <mc:Choice xmlns:a14="http://schemas.microsoft.com/office/drawing/2010/main" Requires="a14">
+                  <p:sp>
+                    <p:nvSpPr>
+                      <p:cNvPr id="621" name="文本框 620">
+                        <a:extLst>
+                          <a:ext uri="{FF2B5EF4-FFF2-40B4-BE49-F238E27FC236}">
+                            <a16:creationId xmlns:a16="http://schemas.microsoft.com/office/drawing/2014/main" id="{41B12F56-5E15-4485-9C0C-99AE3ECC4C60}"/>
+                          </a:ext>
+                        </a:extLst>
+                      </p:cNvPr>
+                      <p:cNvSpPr txBox="1"/>
+                      <p:nvPr/>
+                    </p:nvSpPr>
+                    <p:spPr>
+                      <a:xfrm>
+                        <a:off x="1873995" y="4599946"/>
+                        <a:ext cx="380810" cy="276999"/>
+                      </a:xfrm>
+                      <a:prstGeom prst="rect">
+                        <a:avLst/>
+                      </a:prstGeom>
+                      <a:noFill/>
+                    </p:spPr>
+                    <p:txBody>
+                      <a:bodyPr wrap="square" rtlCol="0">
+                        <a:spAutoFit/>
+                      </a:bodyPr>
+                      <a:lstStyle/>
+                      <a:p>
+                        <a:pPr/>
+                        <a14:m>
+                          <m:oMathPara xmlns:m="http://schemas.openxmlformats.org/officeDocument/2006/math">
+                            <m:oMathParaPr>
+                              <m:jc m:val="centerGroup"/>
+                            </m:oMathParaPr>
+                            <m:oMath xmlns:m="http://schemas.openxmlformats.org/officeDocument/2006/math">
+                              <m:sSub>
+                                <m:sSubPr>
+                                  <m:ctrlPr>
+                                    <a:rPr lang="en-US" altLang="zh-CN" sz="1200" i="1" smtClean="0">
+                                      <a:latin typeface="Cambria Math" panose="02040503050406030204" pitchFamily="18" charset="0"/>
+                                    </a:rPr>
+                                  </m:ctrlPr>
+                                </m:sSubPr>
+                                <m:e>
+                                  <m:r>
+                                    <a:rPr lang="en-US" altLang="zh-CN" sz="1200" b="0" i="1" smtClean="0">
+                                      <a:latin typeface="Cambria Math" panose="02040503050406030204" pitchFamily="18" charset="0"/>
+                                    </a:rPr>
+                                    <m:t>𝐶</m:t>
+                                  </m:r>
+                                </m:e>
+                                <m:sub>
+                                  <m:r>
+                                    <a:rPr lang="en-US" altLang="zh-CN" sz="1200" b="0" i="1" smtClean="0">
+                                      <a:latin typeface="Cambria Math" panose="02040503050406030204" pitchFamily="18" charset="0"/>
+                                    </a:rPr>
+                                    <m:t>3</m:t>
+                                  </m:r>
+                                </m:sub>
+                              </m:sSub>
+                            </m:oMath>
+                          </m:oMathPara>
+                        </a14:m>
+                        <a:endParaRPr lang="zh-CN" altLang="en-US" sz="1200" dirty="0"/>
+                      </a:p>
+                    </p:txBody>
+                  </p:sp>
+                </mc:Choice>
+                <mc:Fallback>
+                  <p:sp>
+                    <p:nvSpPr>
+                      <p:cNvPr id="621" name="文本框 620">
+                        <a:extLst>
+                          <a:ext uri="{FF2B5EF4-FFF2-40B4-BE49-F238E27FC236}">
+                            <a16:creationId xmlns:a16="http://schemas.microsoft.com/office/drawing/2014/main" id="{41B12F56-5E15-4485-9C0C-99AE3ECC4C60}"/>
+                          </a:ext>
+                        </a:extLst>
+                      </p:cNvPr>
+                      <p:cNvSpPr txBox="1">
+                        <a:spLocks noRot="1" noChangeAspect="1" noMove="1" noResize="1" noEditPoints="1" noAdjustHandles="1" noChangeArrowheads="1" noChangeShapeType="1" noTextEdit="1"/>
+                      </p:cNvSpPr>
+                      <p:nvPr/>
+                    </p:nvSpPr>
+                    <p:spPr>
+                      <a:xfrm>
+                        <a:off x="1873995" y="4599946"/>
+                        <a:ext cx="380810" cy="276999"/>
+                      </a:xfrm>
+                      <a:prstGeom prst="rect">
+                        <a:avLst/>
+                      </a:prstGeom>
+                      <a:blipFill>
+                        <a:blip r:embed="rId10"/>
+                        <a:stretch>
+                          <a:fillRect/>
+                        </a:stretch>
+                      </a:blipFill>
+                    </p:spPr>
+                    <p:txBody>
+                      <a:bodyPr/>
+                      <a:lstStyle/>
+                      <a:p>
+                        <a:r>
+                          <a:rPr lang="zh-CN" altLang="en-US">
+                            <a:noFill/>
+                          </a:rPr>
+                          <a:t> </a:t>
+                        </a:r>
+                      </a:p>
+                    </p:txBody>
+                  </p:sp>
+                </mc:Fallback>
+              </mc:AlternateContent>
+            </p:grpSp>
+            <p:sp>
+              <p:nvSpPr>
+                <p:cNvPr id="580" name="椭圆 579">
+                  <a:extLst>
+                    <a:ext uri="{FF2B5EF4-FFF2-40B4-BE49-F238E27FC236}">
+                      <a16:creationId xmlns:a16="http://schemas.microsoft.com/office/drawing/2014/main" id="{2FC82DAC-BD3A-4D1B-8B37-764D3FAE2CC3}"/>
+                    </a:ext>
+                  </a:extLst>
+                </p:cNvPr>
+                <p:cNvSpPr/>
+                <p:nvPr/>
+              </p:nvSpPr>
+              <p:spPr>
+                <a:xfrm rot="5136353">
+                  <a:off x="3391418" y="4553791"/>
+                  <a:ext cx="579615" cy="686579"/>
+                </a:xfrm>
+                <a:prstGeom prst="ellipse">
+                  <a:avLst/>
+                </a:prstGeom>
+                <a:solidFill>
+                  <a:schemeClr val="accent4">
+                    <a:lumMod val="20000"/>
+                    <a:lumOff val="80000"/>
+                  </a:schemeClr>
+                </a:solidFill>
+                <a:ln>
+                  <a:solidFill>
+                    <a:schemeClr val="accent4">
+                      <a:lumMod val="20000"/>
+                      <a:lumOff val="80000"/>
+                    </a:schemeClr>
+                  </a:solidFill>
+                  <a:prstDash val="sysDash"/>
+                </a:ln>
+              </p:spPr>
+              <p:style>
+                <a:lnRef idx="2">
+                  <a:schemeClr val="accent1">
+                    <a:shade val="50000"/>
+                  </a:schemeClr>
+                </a:lnRef>
+                <a:fillRef idx="1">
+                  <a:schemeClr val="accent1"/>
+                </a:fillRef>
+                <a:effectRef idx="0">
+                  <a:schemeClr val="accent1"/>
+                </a:effectRef>
+                <a:fontRef idx="minor">
+                  <a:schemeClr val="lt1"/>
+                </a:fontRef>
+              </p:style>
+              <p:txBody>
+                <a:bodyPr rtlCol="0" anchor="ctr"/>
+                <a:lstStyle/>
+                <a:p>
+                  <a:pPr algn="ctr"/>
+                  <a:endParaRPr lang="zh-CN" altLang="en-US" dirty="0"/>
+                </a:p>
+              </p:txBody>
+            </p:sp>
+            <p:pic>
+              <p:nvPicPr>
+                <p:cNvPr id="581" name="图片 580">
+                  <a:extLst>
+                    <a:ext uri="{FF2B5EF4-FFF2-40B4-BE49-F238E27FC236}">
+                      <a16:creationId xmlns:a16="http://schemas.microsoft.com/office/drawing/2014/main" id="{FFAA5F92-FA48-4838-A271-D133AF9CBC95}"/>
+                    </a:ext>
+                  </a:extLst>
+                </p:cNvPr>
+                <p:cNvPicPr>
+                  <a:picLocks noChangeAspect="1"/>
+                </p:cNvPicPr>
+                <p:nvPr/>
+              </p:nvPicPr>
+              <p:blipFill>
+                <a:blip r:embed="rId3">
+                  <a:extLst>
+                    <a:ext uri="{28A0092B-C50C-407E-A947-70E740481C1C}">
+                      <a14:useLocalDpi xmlns:a14="http://schemas.microsoft.com/office/drawing/2010/main" val="0"/>
+                    </a:ext>
+                  </a:extLst>
+                </a:blip>
+                <a:stretch>
+                  <a:fillRect/>
+                </a:stretch>
+              </p:blipFill>
+              <p:spPr>
+                <a:xfrm>
+                  <a:off x="3699141" y="4669285"/>
+                  <a:ext cx="304800" cy="304800"/>
+                </a:xfrm>
+                <a:prstGeom prst="rect">
+                  <a:avLst/>
+                </a:prstGeom>
+              </p:spPr>
+            </p:pic>
+            <p:pic>
+              <p:nvPicPr>
+                <p:cNvPr id="582" name="图片 581">
+                  <a:extLst>
+                    <a:ext uri="{FF2B5EF4-FFF2-40B4-BE49-F238E27FC236}">
+                      <a16:creationId xmlns:a16="http://schemas.microsoft.com/office/drawing/2014/main" id="{2E0859E2-855B-44B4-B181-7783AB33FD50}"/>
+                    </a:ext>
+                  </a:extLst>
+                </p:cNvPr>
+                <p:cNvPicPr>
+                  <a:picLocks noChangeAspect="1"/>
+                </p:cNvPicPr>
+                <p:nvPr/>
+              </p:nvPicPr>
+              <p:blipFill>
+                <a:blip r:embed="rId3">
+                  <a:extLst>
+                    <a:ext uri="{28A0092B-C50C-407E-A947-70E740481C1C}">
+                      <a14:useLocalDpi xmlns:a14="http://schemas.microsoft.com/office/drawing/2010/main" val="0"/>
+                    </a:ext>
+                  </a:extLst>
+                </a:blip>
+                <a:stretch>
+                  <a:fillRect/>
+                </a:stretch>
+              </p:blipFill>
+              <p:spPr>
+                <a:xfrm>
+                  <a:off x="3347516" y="4800047"/>
+                  <a:ext cx="304800" cy="304800"/>
+                </a:xfrm>
+                <a:prstGeom prst="rect">
+                  <a:avLst/>
+                </a:prstGeom>
+              </p:spPr>
+            </p:pic>
+            <mc:AlternateContent xmlns:mc="http://schemas.openxmlformats.org/markup-compatibility/2006">
+              <mc:Choice xmlns:a14="http://schemas.microsoft.com/office/drawing/2010/main" Requires="a14">
+                <p:sp>
+                  <p:nvSpPr>
+                    <p:cNvPr id="584" name="文本框 583">
+                      <a:extLst>
+                        <a:ext uri="{FF2B5EF4-FFF2-40B4-BE49-F238E27FC236}">
+                          <a16:creationId xmlns:a16="http://schemas.microsoft.com/office/drawing/2014/main" id="{E7E34E03-EB08-47D7-BED1-6BE89D0372F8}"/>
+                        </a:ext>
+                      </a:extLst>
+                    </p:cNvPr>
+                    <p:cNvSpPr txBox="1"/>
+                    <p:nvPr/>
+                  </p:nvSpPr>
+                  <p:spPr>
+                    <a:xfrm>
+                      <a:off x="3393467" y="4598413"/>
+                      <a:ext cx="380810" cy="276999"/>
+                    </a:xfrm>
+                    <a:prstGeom prst="rect">
+                      <a:avLst/>
+                    </a:prstGeom>
+                    <a:noFill/>
+                  </p:spPr>
+                  <p:txBody>
+                    <a:bodyPr wrap="square" rtlCol="0">
+                      <a:spAutoFit/>
+                    </a:bodyPr>
+                    <a:lstStyle/>
+                    <a:p>
+                      <a:pPr/>
+                      <a14:m>
+                        <m:oMathPara xmlns:m="http://schemas.openxmlformats.org/officeDocument/2006/math">
+                          <m:oMathParaPr>
+                            <m:jc m:val="centerGroup"/>
+                          </m:oMathParaPr>
+                          <m:oMath xmlns:m="http://schemas.openxmlformats.org/officeDocument/2006/math">
+                            <m:sSub>
+                              <m:sSubPr>
+                                <m:ctrlPr>
+                                  <a:rPr lang="en-US" altLang="zh-CN" sz="1200" i="1" smtClean="0">
+                                    <a:latin typeface="Cambria Math" panose="02040503050406030204" pitchFamily="18" charset="0"/>
+                                  </a:rPr>
+                                </m:ctrlPr>
+                              </m:sSubPr>
+                              <m:e>
+                                <m:r>
+                                  <a:rPr lang="en-US" altLang="zh-CN" sz="1200" b="0" i="1" smtClean="0">
+                                    <a:latin typeface="Cambria Math" panose="02040503050406030204" pitchFamily="18" charset="0"/>
+                                  </a:rPr>
+                                  <m:t>𝐶</m:t>
+                                </m:r>
+                              </m:e>
+                              <m:sub>
+                                <m:r>
+                                  <a:rPr lang="en-US" altLang="zh-CN" sz="1200" b="0" i="1" smtClean="0">
+                                    <a:latin typeface="Cambria Math" panose="02040503050406030204" pitchFamily="18" charset="0"/>
+                                  </a:rPr>
+                                  <m:t>3</m:t>
+                                </m:r>
+                              </m:sub>
+                            </m:sSub>
+                          </m:oMath>
+                        </m:oMathPara>
+                      </a14:m>
+                      <a:endParaRPr lang="zh-CN" altLang="en-US" sz="1200" dirty="0"/>
+                    </a:p>
+                  </p:txBody>
+                </p:sp>
+              </mc:Choice>
+              <mc:Fallback>
+                <p:sp>
+                  <p:nvSpPr>
+                    <p:cNvPr id="584" name="文本框 583">
+                      <a:extLst>
+                        <a:ext uri="{FF2B5EF4-FFF2-40B4-BE49-F238E27FC236}">
+                          <a16:creationId xmlns:a16="http://schemas.microsoft.com/office/drawing/2014/main" id="{E7E34E03-EB08-47D7-BED1-6BE89D0372F8}"/>
+                        </a:ext>
+                      </a:extLst>
+                    </p:cNvPr>
+                    <p:cNvSpPr txBox="1">
+                      <a:spLocks noRot="1" noChangeAspect="1" noMove="1" noResize="1" noEditPoints="1" noAdjustHandles="1" noChangeArrowheads="1" noChangeShapeType="1" noTextEdit="1"/>
+                    </p:cNvSpPr>
+                    <p:nvPr/>
+                  </p:nvSpPr>
+                  <p:spPr>
+                    <a:xfrm>
+                      <a:off x="3393467" y="4598413"/>
+                      <a:ext cx="380810" cy="276999"/>
+                    </a:xfrm>
+                    <a:prstGeom prst="rect">
+                      <a:avLst/>
+                    </a:prstGeom>
+                    <a:blipFill>
+                      <a:blip r:embed="rId11"/>
+                      <a:stretch>
+                        <a:fillRect/>
+                      </a:stretch>
+                    </a:blipFill>
+                  </p:spPr>
+                  <p:txBody>
+                    <a:bodyPr/>
+                    <a:lstStyle/>
+                    <a:p>
+                      <a:r>
+                        <a:rPr lang="zh-CN" altLang="en-US">
+                          <a:noFill/>
+                        </a:rPr>
+                        <a:t> </a:t>
+                      </a:r>
+                    </a:p>
+                  </p:txBody>
+                </p:sp>
+              </mc:Fallback>
+            </mc:AlternateContent>
+            <p:sp>
+              <p:nvSpPr>
+                <p:cNvPr id="574" name="立方体 573">
+                  <a:extLst>
+                    <a:ext uri="{FF2B5EF4-FFF2-40B4-BE49-F238E27FC236}">
+                      <a16:creationId xmlns:a16="http://schemas.microsoft.com/office/drawing/2014/main" id="{89735A1E-690C-4086-A4E1-4CB3CA32F3A7}"/>
+                    </a:ext>
+                  </a:extLst>
+                </p:cNvPr>
+                <p:cNvSpPr/>
+                <p:nvPr/>
+              </p:nvSpPr>
+              <p:spPr>
+                <a:xfrm>
+                  <a:off x="2363952" y="3627031"/>
+                  <a:ext cx="434373" cy="732215"/>
+                </a:xfrm>
+                <a:prstGeom prst="cube">
+                  <a:avLst/>
+                </a:prstGeom>
+                <a:solidFill>
+                  <a:schemeClr val="accent1">
+                    <a:lumMod val="40000"/>
+                    <a:lumOff val="60000"/>
+                  </a:schemeClr>
+                </a:solidFill>
+                <a:ln>
+                  <a:solidFill>
+                    <a:schemeClr val="accent1">
+                      <a:lumMod val="40000"/>
+                      <a:lumOff val="60000"/>
+                    </a:schemeClr>
+                  </a:solidFill>
+                </a:ln>
+              </p:spPr>
+              <p:style>
+                <a:lnRef idx="2">
+                  <a:schemeClr val="accent1">
+                    <a:shade val="50000"/>
+                  </a:schemeClr>
+                </a:lnRef>
+                <a:fillRef idx="1">
+                  <a:schemeClr val="accent1"/>
+                </a:fillRef>
+                <a:effectRef idx="0">
+                  <a:schemeClr val="accent1"/>
+                </a:effectRef>
+                <a:fontRef idx="minor">
+                  <a:schemeClr val="lt1"/>
+                </a:fontRef>
+              </p:style>
+              <p:txBody>
+                <a:bodyPr rtlCol="0" anchor="ctr"/>
+                <a:lstStyle/>
+                <a:p>
+                  <a:pPr algn="ctr"/>
+                  <a:endParaRPr lang="zh-CN" altLang="en-US"/>
+                </a:p>
+              </p:txBody>
+            </p:sp>
+            <p:grpSp>
+              <p:nvGrpSpPr>
+                <p:cNvPr id="585" name="组合 584">
+                  <a:extLst>
+                    <a:ext uri="{FF2B5EF4-FFF2-40B4-BE49-F238E27FC236}">
+                      <a16:creationId xmlns:a16="http://schemas.microsoft.com/office/drawing/2014/main" id="{8ACAEF91-8140-4D2C-808E-F289C0595B1F}"/>
+                    </a:ext>
+                  </a:extLst>
+                </p:cNvPr>
+                <p:cNvGrpSpPr/>
+                <p:nvPr/>
+              </p:nvGrpSpPr>
+              <p:grpSpPr>
+                <a:xfrm>
+                  <a:off x="3001230" y="5275298"/>
+                  <a:ext cx="773290" cy="579615"/>
+                  <a:chOff x="4529992" y="4803810"/>
+                  <a:chExt cx="773290" cy="579615"/>
+                </a:xfrm>
+              </p:grpSpPr>
+              <p:sp>
+                <p:nvSpPr>
+                  <p:cNvPr id="596" name="椭圆 595">
+                    <a:extLst>
+                      <a:ext uri="{FF2B5EF4-FFF2-40B4-BE49-F238E27FC236}">
+                        <a16:creationId xmlns:a16="http://schemas.microsoft.com/office/drawing/2014/main" id="{DF3FC0D9-78B0-468A-B003-802B02A531F6}"/>
+                      </a:ext>
+                    </a:extLst>
+                  </p:cNvPr>
+                  <p:cNvSpPr/>
+                  <p:nvPr/>
+                </p:nvSpPr>
+                <p:spPr>
+                  <a:xfrm rot="4993526">
+                    <a:off x="4583474" y="4750328"/>
+                    <a:ext cx="579615" cy="686579"/>
+                  </a:xfrm>
+                  <a:prstGeom prst="ellipse">
+                    <a:avLst/>
+                  </a:prstGeom>
+                  <a:solidFill>
+                    <a:schemeClr val="accent4">
+                      <a:lumMod val="20000"/>
+                      <a:lumOff val="80000"/>
+                    </a:schemeClr>
+                  </a:solidFill>
+                  <a:ln>
+                    <a:solidFill>
+                      <a:schemeClr val="accent4">
+                        <a:lumMod val="60000"/>
+                        <a:lumOff val="40000"/>
+                      </a:schemeClr>
+                    </a:solidFill>
+                    <a:prstDash val="sysDash"/>
+                  </a:ln>
+                </p:spPr>
+                <p:style>
+                  <a:lnRef idx="2">
+                    <a:schemeClr val="accent1">
+                      <a:shade val="50000"/>
+                    </a:schemeClr>
+                  </a:lnRef>
+                  <a:fillRef idx="1">
+                    <a:schemeClr val="accent1"/>
+                  </a:fillRef>
+                  <a:effectRef idx="0">
+                    <a:schemeClr val="accent1"/>
+                  </a:effectRef>
+                  <a:fontRef idx="minor">
+                    <a:schemeClr val="lt1"/>
+                  </a:fontRef>
+                </p:style>
+                <p:txBody>
+                  <a:bodyPr rtlCol="0" anchor="ctr"/>
+                  <a:lstStyle/>
+                  <a:p>
+                    <a:pPr algn="ctr"/>
+                    <a:endParaRPr lang="zh-CN" altLang="en-US" dirty="0"/>
+                  </a:p>
+                </p:txBody>
+              </p:sp>
+              <p:pic>
+                <p:nvPicPr>
+                  <p:cNvPr id="597" name="图片 596">
+                    <a:extLst>
+                      <a:ext uri="{FF2B5EF4-FFF2-40B4-BE49-F238E27FC236}">
+                        <a16:creationId xmlns:a16="http://schemas.microsoft.com/office/drawing/2014/main" id="{B7BBB5BE-B4B0-41E3-B2CA-CF9CD49231C0}"/>
+                      </a:ext>
+                    </a:extLst>
+                  </p:cNvPr>
+                  <p:cNvPicPr>
+                    <a:picLocks noChangeAspect="1"/>
+                  </p:cNvPicPr>
+                  <p:nvPr/>
+                </p:nvPicPr>
+                <p:blipFill>
+                  <a:blip r:embed="rId3">
+                    <a:extLst>
+                      <a:ext uri="{28A0092B-C50C-407E-A947-70E740481C1C}">
+                        <a14:useLocalDpi xmlns:a14="http://schemas.microsoft.com/office/drawing/2010/main" val="0"/>
+                      </a:ext>
+                    </a:extLst>
+                  </a:blip>
+                  <a:stretch>
+                    <a:fillRect/>
+                  </a:stretch>
+                </p:blipFill>
+                <p:spPr>
+                  <a:xfrm>
+                    <a:off x="4739488" y="5145044"/>
+                    <a:ext cx="237849" cy="237849"/>
+                  </a:xfrm>
+                  <a:prstGeom prst="rect">
+                    <a:avLst/>
+                  </a:prstGeom>
+                </p:spPr>
+              </p:pic>
+              <p:pic>
+                <p:nvPicPr>
+                  <p:cNvPr id="598" name="图片 597">
+                    <a:extLst>
+                      <a:ext uri="{FF2B5EF4-FFF2-40B4-BE49-F238E27FC236}">
+                        <a16:creationId xmlns:a16="http://schemas.microsoft.com/office/drawing/2014/main" id="{2AA70575-C301-4CAF-A6C0-3FAEABD16D5E}"/>
+                      </a:ext>
+                    </a:extLst>
+                  </p:cNvPr>
+                  <p:cNvPicPr>
+                    <a:picLocks noChangeAspect="1"/>
+                  </p:cNvPicPr>
+                  <p:nvPr/>
+                </p:nvPicPr>
+                <p:blipFill>
+                  <a:blip r:embed="rId3">
+                    <a:extLst>
+                      <a:ext uri="{28A0092B-C50C-407E-A947-70E740481C1C}">
+                        <a14:useLocalDpi xmlns:a14="http://schemas.microsoft.com/office/drawing/2010/main" val="0"/>
+                      </a:ext>
+                    </a:extLst>
+                  </a:blip>
+                  <a:stretch>
+                    <a:fillRect/>
+                  </a:stretch>
+                </p:blipFill>
+                <p:spPr>
+                  <a:xfrm>
+                    <a:off x="4916557" y="4840563"/>
+                    <a:ext cx="239596" cy="239596"/>
+                  </a:xfrm>
+                  <a:prstGeom prst="rect">
+                    <a:avLst/>
+                  </a:prstGeom>
+                </p:spPr>
+              </p:pic>
+              <p:pic>
+                <p:nvPicPr>
+                  <p:cNvPr id="599" name="图片 598">
+                    <a:extLst>
+                      <a:ext uri="{FF2B5EF4-FFF2-40B4-BE49-F238E27FC236}">
+                        <a16:creationId xmlns:a16="http://schemas.microsoft.com/office/drawing/2014/main" id="{152626A9-C6AE-4885-A3B5-C72C573A3316}"/>
+                      </a:ext>
+                    </a:extLst>
+                  </p:cNvPr>
+                  <p:cNvPicPr>
+                    <a:picLocks noChangeAspect="1"/>
+                  </p:cNvPicPr>
+                  <p:nvPr/>
+                </p:nvPicPr>
+                <p:blipFill>
+                  <a:blip r:embed="rId3">
+                    <a:extLst>
+                      <a:ext uri="{28A0092B-C50C-407E-A947-70E740481C1C}">
+                        <a14:useLocalDpi xmlns:a14="http://schemas.microsoft.com/office/drawing/2010/main" val="0"/>
+                      </a:ext>
+                    </a:extLst>
+                  </a:blip>
+                  <a:stretch>
+                    <a:fillRect/>
+                  </a:stretch>
+                </p:blipFill>
+                <p:spPr>
+                  <a:xfrm>
+                    <a:off x="4555567" y="4905247"/>
+                    <a:ext cx="281592" cy="281592"/>
+                  </a:xfrm>
+                  <a:prstGeom prst="rect">
+                    <a:avLst/>
+                  </a:prstGeom>
+                </p:spPr>
+              </p:pic>
+              <mc:AlternateContent xmlns:mc="http://schemas.openxmlformats.org/markup-compatibility/2006">
+                <mc:Choice xmlns:a14="http://schemas.microsoft.com/office/drawing/2010/main" Requires="a14">
+                  <p:sp>
+                    <p:nvSpPr>
+                      <p:cNvPr id="600" name="文本框 599">
+                        <a:extLst>
+                          <a:ext uri="{FF2B5EF4-FFF2-40B4-BE49-F238E27FC236}">
+                            <a16:creationId xmlns:a16="http://schemas.microsoft.com/office/drawing/2014/main" id="{89D1B75F-D720-43B2-9467-9073DC6D7DD0}"/>
+                          </a:ext>
+                        </a:extLst>
+                      </p:cNvPr>
+                      <p:cNvSpPr txBox="1"/>
+                      <p:nvPr/>
+                    </p:nvSpPr>
+                    <p:spPr>
+                      <a:xfrm>
+                        <a:off x="4922472" y="5054765"/>
+                        <a:ext cx="380810" cy="276999"/>
+                      </a:xfrm>
+                      <a:prstGeom prst="rect">
+                        <a:avLst/>
+                      </a:prstGeom>
+                      <a:noFill/>
+                    </p:spPr>
+                    <p:txBody>
+                      <a:bodyPr wrap="square" rtlCol="0">
+                        <a:spAutoFit/>
+                      </a:bodyPr>
+                      <a:lstStyle/>
+                      <a:p>
+                        <a:pPr/>
+                        <a14:m>
+                          <m:oMathPara xmlns:m="http://schemas.openxmlformats.org/officeDocument/2006/math">
+                            <m:oMathParaPr>
+                              <m:jc m:val="centerGroup"/>
+                            </m:oMathParaPr>
+                            <m:oMath xmlns:m="http://schemas.openxmlformats.org/officeDocument/2006/math">
+                              <m:sSub>
+                                <m:sSubPr>
+                                  <m:ctrlPr>
+                                    <a:rPr lang="en-US" altLang="zh-CN" sz="1200" i="1" smtClean="0">
+                                      <a:latin typeface="Cambria Math" panose="02040503050406030204" pitchFamily="18" charset="0"/>
+                                    </a:rPr>
+                                  </m:ctrlPr>
+                                </m:sSubPr>
+                                <m:e>
+                                  <m:r>
+                                    <a:rPr lang="en-US" altLang="zh-CN" sz="1200" b="0" i="1" smtClean="0">
+                                      <a:latin typeface="Cambria Math" panose="02040503050406030204" pitchFamily="18" charset="0"/>
+                                    </a:rPr>
+                                    <m:t>𝐶</m:t>
+                                  </m:r>
+                                </m:e>
+                                <m:sub>
+                                  <m:r>
+                                    <a:rPr lang="en-US" altLang="zh-CN" sz="1200" b="0" i="1" smtClean="0">
+                                      <a:latin typeface="Cambria Math" panose="02040503050406030204" pitchFamily="18" charset="0"/>
+                                    </a:rPr>
+                                    <m:t>2</m:t>
+                                  </m:r>
+                                </m:sub>
+                              </m:sSub>
+                            </m:oMath>
+                          </m:oMathPara>
+                        </a14:m>
+                        <a:endParaRPr lang="zh-CN" altLang="en-US" sz="1200" dirty="0"/>
+                      </a:p>
+                    </p:txBody>
+                  </p:sp>
+                </mc:Choice>
+                <mc:Fallback>
+                  <p:sp>
+                    <p:nvSpPr>
+                      <p:cNvPr id="600" name="文本框 599">
+                        <a:extLst>
+                          <a:ext uri="{FF2B5EF4-FFF2-40B4-BE49-F238E27FC236}">
+                            <a16:creationId xmlns:a16="http://schemas.microsoft.com/office/drawing/2014/main" id="{89D1B75F-D720-43B2-9467-9073DC6D7DD0}"/>
+                          </a:ext>
+                        </a:extLst>
+                      </p:cNvPr>
+                      <p:cNvSpPr txBox="1">
+                        <a:spLocks noRot="1" noChangeAspect="1" noMove="1" noResize="1" noEditPoints="1" noAdjustHandles="1" noChangeArrowheads="1" noChangeShapeType="1" noTextEdit="1"/>
+                      </p:cNvSpPr>
+                      <p:nvPr/>
+                    </p:nvSpPr>
+                    <p:spPr>
+                      <a:xfrm>
+                        <a:off x="4922472" y="5054765"/>
+                        <a:ext cx="380810" cy="276999"/>
+                      </a:xfrm>
+                      <a:prstGeom prst="rect">
+                        <a:avLst/>
+                      </a:prstGeom>
+                      <a:blipFill>
+                        <a:blip r:embed="rId12"/>
+                        <a:stretch>
+                          <a:fillRect/>
+                        </a:stretch>
+                      </a:blipFill>
+                    </p:spPr>
+                    <p:txBody>
+                      <a:bodyPr/>
+                      <a:lstStyle/>
+                      <a:p>
+                        <a:r>
+                          <a:rPr lang="zh-CN" altLang="en-US">
+                            <a:noFill/>
+                          </a:rPr>
+                          <a:t> </a:t>
+                        </a:r>
+                      </a:p>
+                    </p:txBody>
+                  </p:sp>
+                </mc:Fallback>
+              </mc:AlternateContent>
+            </p:grpSp>
+            <p:grpSp>
+              <p:nvGrpSpPr>
+                <p:cNvPr id="586" name="组合 585">
+                  <a:extLst>
+                    <a:ext uri="{FF2B5EF4-FFF2-40B4-BE49-F238E27FC236}">
+                      <a16:creationId xmlns:a16="http://schemas.microsoft.com/office/drawing/2014/main" id="{E2616EAB-C025-4E5A-A584-BCB6187BEAD0}"/>
+                    </a:ext>
+                  </a:extLst>
+                </p:cNvPr>
+                <p:cNvGrpSpPr/>
+                <p:nvPr/>
+              </p:nvGrpSpPr>
+              <p:grpSpPr>
+                <a:xfrm>
+                  <a:off x="3974856" y="4833652"/>
+                  <a:ext cx="836733" cy="894538"/>
+                  <a:chOff x="5289306" y="4655058"/>
+                  <a:chExt cx="836733" cy="894538"/>
+                </a:xfrm>
+              </p:grpSpPr>
+              <p:pic>
+                <p:nvPicPr>
+                  <p:cNvPr id="591" name="图片 590">
+                    <a:extLst>
+                      <a:ext uri="{FF2B5EF4-FFF2-40B4-BE49-F238E27FC236}">
+                        <a16:creationId xmlns:a16="http://schemas.microsoft.com/office/drawing/2014/main" id="{48008523-C8BD-41B3-837E-95A99DD55CFA}"/>
+                      </a:ext>
+                    </a:extLst>
+                  </p:cNvPr>
+                  <p:cNvPicPr>
+                    <a:picLocks noChangeAspect="1"/>
+                  </p:cNvPicPr>
+                  <p:nvPr/>
+                </p:nvPicPr>
+                <p:blipFill>
+                  <a:blip r:embed="rId3">
+                    <a:extLst>
+                      <a:ext uri="{28A0092B-C50C-407E-A947-70E740481C1C}">
+                        <a14:useLocalDpi xmlns:a14="http://schemas.microsoft.com/office/drawing/2010/main" val="0"/>
+                      </a:ext>
+                    </a:extLst>
+                  </a:blip>
+                  <a:stretch>
+                    <a:fillRect/>
+                  </a:stretch>
+                </p:blipFill>
+                <p:spPr>
+                  <a:xfrm>
+                    <a:off x="5674949" y="4733363"/>
+                    <a:ext cx="304800" cy="304800"/>
+                  </a:xfrm>
+                  <a:prstGeom prst="rect">
+                    <a:avLst/>
+                  </a:prstGeom>
+                </p:spPr>
+              </p:pic>
+              <p:sp>
+                <p:nvSpPr>
+                  <p:cNvPr id="592" name="椭圆 591">
+                    <a:extLst>
+                      <a:ext uri="{FF2B5EF4-FFF2-40B4-BE49-F238E27FC236}">
+                        <a16:creationId xmlns:a16="http://schemas.microsoft.com/office/drawing/2014/main" id="{39160B45-C6E9-44B4-9FE5-8D7BACC804FE}"/>
+                      </a:ext>
+                    </a:extLst>
+                  </p:cNvPr>
+                  <p:cNvSpPr/>
+                  <p:nvPr/>
+                </p:nvSpPr>
+                <p:spPr>
+                  <a:xfrm rot="5210808">
+                    <a:off x="5380398" y="4563966"/>
+                    <a:ext cx="654549" cy="836733"/>
+                  </a:xfrm>
+                  <a:prstGeom prst="ellipse">
+                    <a:avLst/>
+                  </a:prstGeom>
+                  <a:solidFill>
+                    <a:schemeClr val="accent4">
+                      <a:lumMod val="40000"/>
+                      <a:lumOff val="60000"/>
+                    </a:schemeClr>
+                  </a:solidFill>
+                  <a:ln>
+                    <a:solidFill>
+                      <a:schemeClr val="accent4"/>
+                    </a:solidFill>
+                    <a:prstDash val="sysDash"/>
+                  </a:ln>
+                </p:spPr>
+                <p:style>
+                  <a:lnRef idx="2">
+                    <a:schemeClr val="accent1">
+                      <a:shade val="50000"/>
+                    </a:schemeClr>
+                  </a:lnRef>
+                  <a:fillRef idx="1">
+                    <a:schemeClr val="accent1"/>
+                  </a:fillRef>
+                  <a:effectRef idx="0">
+                    <a:schemeClr val="accent1"/>
+                  </a:effectRef>
+                  <a:fontRef idx="minor">
+                    <a:schemeClr val="lt1"/>
+                  </a:fontRef>
+                </p:style>
+                <p:txBody>
+                  <a:bodyPr rtlCol="0" anchor="ctr"/>
+                  <a:lstStyle/>
+                  <a:p>
+                    <a:pPr algn="ctr"/>
+                    <a:endParaRPr lang="zh-CN" altLang="en-US"/>
+                  </a:p>
+                </p:txBody>
+              </p:sp>
+              <p:pic>
+                <p:nvPicPr>
+                  <p:cNvPr id="593" name="图片 592">
+                    <a:extLst>
+                      <a:ext uri="{FF2B5EF4-FFF2-40B4-BE49-F238E27FC236}">
+                        <a16:creationId xmlns:a16="http://schemas.microsoft.com/office/drawing/2014/main" id="{9D591761-7555-4FF7-9B58-12663D9266DB}"/>
+                      </a:ext>
+                    </a:extLst>
+                  </p:cNvPr>
+                  <p:cNvPicPr>
+                    <a:picLocks noChangeAspect="1"/>
+                  </p:cNvPicPr>
+                  <p:nvPr/>
+                </p:nvPicPr>
+                <p:blipFill>
+                  <a:blip r:embed="rId3">
+                    <a:extLst>
+                      <a:ext uri="{28A0092B-C50C-407E-A947-70E740481C1C}">
+                        <a14:useLocalDpi xmlns:a14="http://schemas.microsoft.com/office/drawing/2010/main" val="0"/>
+                      </a:ext>
+                    </a:extLst>
+                  </a:blip>
+                  <a:stretch>
+                    <a:fillRect/>
+                  </a:stretch>
+                </p:blipFill>
+                <p:spPr>
+                  <a:xfrm>
+                    <a:off x="5294260" y="4898268"/>
+                    <a:ext cx="304800" cy="304800"/>
+                  </a:xfrm>
+                  <a:prstGeom prst="rect">
+                    <a:avLst/>
+                  </a:prstGeom>
+                </p:spPr>
+              </p:pic>
+              <p:pic>
+                <p:nvPicPr>
+                  <p:cNvPr id="594" name="图片 593">
+                    <a:extLst>
+                      <a:ext uri="{FF2B5EF4-FFF2-40B4-BE49-F238E27FC236}">
+                        <a16:creationId xmlns:a16="http://schemas.microsoft.com/office/drawing/2014/main" id="{C5C83BDE-5349-4CFC-85B5-CDCD3B182AC1}"/>
+                      </a:ext>
+                    </a:extLst>
+                  </p:cNvPr>
+                  <p:cNvPicPr>
+                    <a:picLocks noChangeAspect="1"/>
+                  </p:cNvPicPr>
+                  <p:nvPr/>
+                </p:nvPicPr>
+                <p:blipFill>
+                  <a:blip r:embed="rId3">
+                    <a:extLst>
+                      <a:ext uri="{28A0092B-C50C-407E-A947-70E740481C1C}">
+                        <a14:useLocalDpi xmlns:a14="http://schemas.microsoft.com/office/drawing/2010/main" val="0"/>
+                      </a:ext>
+                    </a:extLst>
+                  </a:blip>
+                  <a:stretch>
+                    <a:fillRect/>
+                  </a:stretch>
+                </p:blipFill>
+                <p:spPr>
+                  <a:xfrm>
+                    <a:off x="5742016" y="4793099"/>
+                    <a:ext cx="304800" cy="304800"/>
+                  </a:xfrm>
+                  <a:prstGeom prst="rect">
+                    <a:avLst/>
+                  </a:prstGeom>
+                </p:spPr>
+              </p:pic>
+              <mc:AlternateContent xmlns:mc="http://schemas.openxmlformats.org/markup-compatibility/2006">
+                <mc:Choice xmlns:a14="http://schemas.microsoft.com/office/drawing/2010/main" Requires="a14">
+                  <p:sp>
+                    <p:nvSpPr>
+                      <p:cNvPr id="595" name="文本框 594">
+                        <a:extLst>
+                          <a:ext uri="{FF2B5EF4-FFF2-40B4-BE49-F238E27FC236}">
+                            <a16:creationId xmlns:a16="http://schemas.microsoft.com/office/drawing/2014/main" id="{55C49615-0B9C-488C-B45E-41D1B2844CFD}"/>
+                          </a:ext>
+                        </a:extLst>
+                      </p:cNvPr>
+                      <p:cNvSpPr txBox="1"/>
+                      <p:nvPr/>
+                    </p:nvSpPr>
+                    <p:spPr>
+                      <a:xfrm>
+                        <a:off x="5485457" y="5272597"/>
+                        <a:ext cx="380810" cy="276999"/>
+                      </a:xfrm>
+                      <a:prstGeom prst="rect">
+                        <a:avLst/>
+                      </a:prstGeom>
+                      <a:noFill/>
+                    </p:spPr>
+                    <p:txBody>
+                      <a:bodyPr wrap="square" rtlCol="0">
+                        <a:spAutoFit/>
+                      </a:bodyPr>
+                      <a:lstStyle/>
+                      <a:p>
+                        <a:pPr/>
+                        <a14:m>
+                          <m:oMathPara xmlns:m="http://schemas.openxmlformats.org/officeDocument/2006/math">
+                            <m:oMathParaPr>
+                              <m:jc m:val="centerGroup"/>
+                            </m:oMathParaPr>
+                            <m:oMath xmlns:m="http://schemas.openxmlformats.org/officeDocument/2006/math">
+                              <m:sSub>
+                                <m:sSubPr>
+                                  <m:ctrlPr>
+                                    <a:rPr lang="en-US" altLang="zh-CN" sz="1200" i="1" smtClean="0">
+                                      <a:latin typeface="Cambria Math" panose="02040503050406030204" pitchFamily="18" charset="0"/>
+                                    </a:rPr>
+                                  </m:ctrlPr>
+                                </m:sSubPr>
+                                <m:e>
+                                  <m:r>
+                                    <a:rPr lang="en-US" altLang="zh-CN" sz="1200" b="0" i="1" smtClean="0">
+                                      <a:latin typeface="Cambria Math" panose="02040503050406030204" pitchFamily="18" charset="0"/>
+                                    </a:rPr>
+                                    <m:t>𝐶</m:t>
+                                  </m:r>
+                                </m:e>
+                                <m:sub>
+                                  <m:r>
+                                    <a:rPr lang="en-US" altLang="zh-CN" sz="1200" b="0" i="1" smtClean="0">
+                                      <a:latin typeface="Cambria Math" panose="02040503050406030204" pitchFamily="18" charset="0"/>
+                                    </a:rPr>
+                                    <m:t>1</m:t>
+                                  </m:r>
+                                </m:sub>
+                              </m:sSub>
+                            </m:oMath>
+                          </m:oMathPara>
+                        </a14:m>
+                        <a:endParaRPr lang="zh-CN" altLang="en-US" sz="1200" dirty="0"/>
+                      </a:p>
+                    </p:txBody>
+                  </p:sp>
+                </mc:Choice>
+                <mc:Fallback>
+                  <p:sp>
+                    <p:nvSpPr>
+                      <p:cNvPr id="595" name="文本框 594">
+                        <a:extLst>
+                          <a:ext uri="{FF2B5EF4-FFF2-40B4-BE49-F238E27FC236}">
+                            <a16:creationId xmlns:a16="http://schemas.microsoft.com/office/drawing/2014/main" id="{55C49615-0B9C-488C-B45E-41D1B2844CFD}"/>
+                          </a:ext>
+                        </a:extLst>
+                      </p:cNvPr>
+                      <p:cNvSpPr txBox="1">
+                        <a:spLocks noRot="1" noChangeAspect="1" noMove="1" noResize="1" noEditPoints="1" noAdjustHandles="1" noChangeArrowheads="1" noChangeShapeType="1" noTextEdit="1"/>
+                      </p:cNvSpPr>
+                      <p:nvPr/>
+                    </p:nvSpPr>
+                    <p:spPr>
+                      <a:xfrm>
+                        <a:off x="5485457" y="5272597"/>
+                        <a:ext cx="380810" cy="276999"/>
+                      </a:xfrm>
+                      <a:prstGeom prst="rect">
+                        <a:avLst/>
+                      </a:prstGeom>
+                      <a:blipFill>
+                        <a:blip r:embed="rId13"/>
+                        <a:stretch>
+                          <a:fillRect/>
+                        </a:stretch>
+                      </a:blipFill>
+                    </p:spPr>
+                    <p:txBody>
+                      <a:bodyPr/>
+                      <a:lstStyle/>
+                      <a:p>
+                        <a:r>
+                          <a:rPr lang="zh-CN" altLang="en-US">
+                            <a:noFill/>
+                          </a:rPr>
+                          <a:t> </a:t>
+                        </a:r>
+                      </a:p>
+                    </p:txBody>
+                  </p:sp>
+                </mc:Fallback>
+              </mc:AlternateContent>
+            </p:grpSp>
+            <p:sp>
+              <p:nvSpPr>
+                <p:cNvPr id="587" name="立方体 586">
+                  <a:extLst>
+                    <a:ext uri="{FF2B5EF4-FFF2-40B4-BE49-F238E27FC236}">
+                      <a16:creationId xmlns:a16="http://schemas.microsoft.com/office/drawing/2014/main" id="{143B46B2-8D27-4837-B61E-250C01194E23}"/>
+                    </a:ext>
+                  </a:extLst>
+                </p:cNvPr>
+                <p:cNvSpPr/>
+                <p:nvPr/>
+              </p:nvSpPr>
+              <p:spPr>
+                <a:xfrm>
+                  <a:off x="1910705" y="5300077"/>
+                  <a:ext cx="539077" cy="699620"/>
+                </a:xfrm>
+                <a:prstGeom prst="cube">
+                  <a:avLst/>
+                </a:prstGeom>
+                <a:solidFill>
+                  <a:schemeClr val="accent1">
+                    <a:lumMod val="40000"/>
+                    <a:lumOff val="60000"/>
+                  </a:schemeClr>
+                </a:solidFill>
+                <a:ln>
+                  <a:solidFill>
+                    <a:schemeClr val="accent1">
+                      <a:lumMod val="40000"/>
+                      <a:lumOff val="60000"/>
+                    </a:schemeClr>
+                  </a:solidFill>
+                </a:ln>
+              </p:spPr>
+              <p:style>
+                <a:lnRef idx="2">
+                  <a:schemeClr val="accent1">
+                    <a:shade val="50000"/>
+                  </a:schemeClr>
+                </a:lnRef>
+                <a:fillRef idx="1">
+                  <a:schemeClr val="accent1"/>
+                </a:fillRef>
+                <a:effectRef idx="0">
+                  <a:schemeClr val="accent1"/>
+                </a:effectRef>
+                <a:fontRef idx="minor">
+                  <a:schemeClr val="lt1"/>
+                </a:fontRef>
+              </p:style>
+              <p:txBody>
+                <a:bodyPr rtlCol="0" anchor="ctr"/>
+                <a:lstStyle/>
+                <a:p>
+                  <a:pPr algn="ctr"/>
+                  <a:endParaRPr lang="zh-CN" altLang="en-US"/>
+                </a:p>
+              </p:txBody>
+            </p:sp>
+            <p:sp>
+              <p:nvSpPr>
+                <p:cNvPr id="588" name="立方体 587">
+                  <a:extLst>
+                    <a:ext uri="{FF2B5EF4-FFF2-40B4-BE49-F238E27FC236}">
+                      <a16:creationId xmlns:a16="http://schemas.microsoft.com/office/drawing/2014/main" id="{44105EF5-886F-4749-B45B-F40FD6841EBA}"/>
+                    </a:ext>
+                  </a:extLst>
+                </p:cNvPr>
+                <p:cNvSpPr/>
+                <p:nvPr/>
+              </p:nvSpPr>
+              <p:spPr>
+                <a:xfrm>
+                  <a:off x="4677116" y="4289874"/>
+                  <a:ext cx="496637" cy="594917"/>
+                </a:xfrm>
+                <a:prstGeom prst="cube">
+                  <a:avLst>
+                    <a:gd name="adj" fmla="val 19877"/>
+                  </a:avLst>
+                </a:prstGeom>
+                <a:solidFill>
+                  <a:schemeClr val="accent1">
+                    <a:lumMod val="40000"/>
+                    <a:lumOff val="60000"/>
+                  </a:schemeClr>
+                </a:solidFill>
+                <a:ln>
+                  <a:solidFill>
+                    <a:schemeClr val="accent1">
+                      <a:lumMod val="40000"/>
+                      <a:lumOff val="60000"/>
+                    </a:schemeClr>
+                  </a:solidFill>
+                </a:ln>
+              </p:spPr>
+              <p:style>
+                <a:lnRef idx="2">
+                  <a:schemeClr val="accent1">
+                    <a:shade val="50000"/>
+                  </a:schemeClr>
+                </a:lnRef>
+                <a:fillRef idx="1">
+                  <a:schemeClr val="accent1"/>
+                </a:fillRef>
+                <a:effectRef idx="0">
+                  <a:schemeClr val="accent1"/>
+                </a:effectRef>
+                <a:fontRef idx="minor">
+                  <a:schemeClr val="lt1"/>
+                </a:fontRef>
+              </p:style>
+              <p:txBody>
+                <a:bodyPr rtlCol="0" anchor="ctr"/>
+                <a:lstStyle/>
+                <a:p>
+                  <a:pPr algn="ctr"/>
+                  <a:endParaRPr lang="zh-CN" altLang="en-US"/>
+                </a:p>
+              </p:txBody>
+            </p:sp>
+          </p:grpSp>
+          <p:cxnSp>
+            <p:nvCxnSpPr>
+              <p:cNvPr id="590" name="直接连接符 589">
+                <a:extLst>
+                  <a:ext uri="{FF2B5EF4-FFF2-40B4-BE49-F238E27FC236}">
+                    <a16:creationId xmlns:a16="http://schemas.microsoft.com/office/drawing/2014/main" id="{66FE54C9-FA5E-4067-87E9-4D83F7FAABFB}"/>
+                  </a:ext>
+                </a:extLst>
+              </p:cNvPr>
+              <p:cNvCxnSpPr>
+                <a:cxnSpLocks/>
+                <a:stCxn id="516" idx="2"/>
+                <a:endCxn id="613" idx="4"/>
+              </p:cNvCxnSpPr>
+              <p:nvPr/>
+            </p:nvCxnSpPr>
+            <p:spPr>
+              <a:xfrm flipH="1">
+                <a:off x="1370889" y="2784171"/>
+                <a:ext cx="385650" cy="2922967"/>
+              </a:xfrm>
+              <a:prstGeom prst="line">
+                <a:avLst/>
+              </a:prstGeom>
+              <a:ln>
+                <a:solidFill>
+                  <a:srgbClr val="FFC000"/>
+                </a:solidFill>
+              </a:ln>
+            </p:spPr>
+            <p:style>
+              <a:lnRef idx="1">
+                <a:schemeClr val="accent1"/>
+              </a:lnRef>
+              <a:fillRef idx="0">
+                <a:schemeClr val="accent1"/>
+              </a:fillRef>
+              <a:effectRef idx="0">
+                <a:schemeClr val="accent1"/>
+              </a:effectRef>
+              <a:fontRef idx="minor">
+                <a:schemeClr val="tx1"/>
+              </a:fontRef>
+            </p:style>
+          </p:cxnSp>
+          <p:cxnSp>
+            <p:nvCxnSpPr>
+              <p:cNvPr id="532" name="直接连接符 531">
+                <a:extLst>
+                  <a:ext uri="{FF2B5EF4-FFF2-40B4-BE49-F238E27FC236}">
+                    <a16:creationId xmlns:a16="http://schemas.microsoft.com/office/drawing/2014/main" id="{48D72933-A91B-490F-80DB-8FA545F0E2CD}"/>
+                  </a:ext>
+                </a:extLst>
+              </p:cNvPr>
+              <p:cNvCxnSpPr>
+                <a:cxnSpLocks/>
+                <a:stCxn id="513" idx="2"/>
+                <a:endCxn id="605" idx="0"/>
+              </p:cNvCxnSpPr>
+              <p:nvPr/>
+            </p:nvCxnSpPr>
+            <p:spPr>
+              <a:xfrm>
+                <a:off x="1336620" y="2345678"/>
+                <a:ext cx="305330" cy="2795397"/>
+              </a:xfrm>
+              <a:prstGeom prst="line">
+                <a:avLst/>
+              </a:prstGeom>
+              <a:ln>
+                <a:solidFill>
+                  <a:schemeClr val="accent3">
+                    <a:lumMod val="60000"/>
+                    <a:lumOff val="40000"/>
+                  </a:schemeClr>
+                </a:solidFill>
+              </a:ln>
+            </p:spPr>
+            <p:style>
+              <a:lnRef idx="1">
+                <a:schemeClr val="accent1"/>
+              </a:lnRef>
+              <a:fillRef idx="0">
+                <a:schemeClr val="accent1"/>
+              </a:fillRef>
+              <a:effectRef idx="0">
+                <a:schemeClr val="accent1"/>
+              </a:effectRef>
+              <a:fontRef idx="minor">
+                <a:schemeClr val="tx1"/>
+              </a:fontRef>
+            </p:style>
+          </p:cxnSp>
+          <p:cxnSp>
+            <p:nvCxnSpPr>
+              <p:cNvPr id="589" name="直接连接符 588">
+                <a:extLst>
+                  <a:ext uri="{FF2B5EF4-FFF2-40B4-BE49-F238E27FC236}">
+                    <a16:creationId xmlns:a16="http://schemas.microsoft.com/office/drawing/2014/main" id="{EB2F6783-3FC6-4DAC-B3C7-E90DC6A14249}"/>
+                  </a:ext>
+                </a:extLst>
+              </p:cNvPr>
+              <p:cNvCxnSpPr>
+                <a:cxnSpLocks/>
+                <a:stCxn id="515" idx="2"/>
+                <a:endCxn id="606" idx="0"/>
+              </p:cNvCxnSpPr>
+              <p:nvPr/>
+            </p:nvCxnSpPr>
+            <p:spPr>
+              <a:xfrm>
+                <a:off x="900994" y="2857695"/>
+                <a:ext cx="394130" cy="2897219"/>
+              </a:xfrm>
+              <a:prstGeom prst="line">
+                <a:avLst/>
+              </a:prstGeom>
+              <a:ln>
+                <a:solidFill>
+                  <a:srgbClr val="FFC000"/>
+                </a:solidFill>
+              </a:ln>
+            </p:spPr>
+            <p:style>
+              <a:lnRef idx="1">
+                <a:schemeClr val="accent1"/>
+              </a:lnRef>
+              <a:fillRef idx="0">
+                <a:schemeClr val="accent1"/>
+              </a:fillRef>
+              <a:effectRef idx="0">
+                <a:schemeClr val="accent1"/>
+              </a:effectRef>
+              <a:fontRef idx="minor">
+                <a:schemeClr val="tx1"/>
+              </a:fontRef>
+            </p:style>
+          </p:cxnSp>
+          <p:cxnSp>
+            <p:nvCxnSpPr>
+              <p:cNvPr id="531" name="直接连接符 530">
+                <a:extLst>
+                  <a:ext uri="{FF2B5EF4-FFF2-40B4-BE49-F238E27FC236}">
+                    <a16:creationId xmlns:a16="http://schemas.microsoft.com/office/drawing/2014/main" id="{07446E2E-C9C5-426D-B3BE-468C03016796}"/>
+                  </a:ext>
+                </a:extLst>
+              </p:cNvPr>
+              <p:cNvCxnSpPr>
+                <a:cxnSpLocks/>
+                <a:stCxn id="513" idx="2"/>
+                <a:endCxn id="605" idx="4"/>
+              </p:cNvCxnSpPr>
+              <p:nvPr/>
+            </p:nvCxnSpPr>
+            <p:spPr>
+              <a:xfrm flipH="1">
+                <a:off x="957389" y="2345678"/>
+                <a:ext cx="379231" cy="2848001"/>
+              </a:xfrm>
+              <a:prstGeom prst="line">
+                <a:avLst/>
+              </a:prstGeom>
+              <a:ln>
+                <a:solidFill>
+                  <a:schemeClr val="accent3">
+                    <a:lumMod val="60000"/>
+                    <a:lumOff val="40000"/>
+                  </a:schemeClr>
+                </a:solidFill>
+              </a:ln>
+            </p:spPr>
+            <p:style>
+              <a:lnRef idx="1">
+                <a:schemeClr val="accent1"/>
+              </a:lnRef>
+              <a:fillRef idx="0">
+                <a:schemeClr val="accent1"/>
+              </a:fillRef>
+              <a:effectRef idx="0">
+                <a:schemeClr val="accent1"/>
+              </a:effectRef>
+              <a:fontRef idx="minor">
+                <a:schemeClr val="tx1"/>
+              </a:fontRef>
+            </p:style>
+          </p:cxnSp>
+          <p:sp>
+            <p:nvSpPr>
+              <p:cNvPr id="625" name="箭头: 右 624">
+                <a:extLst>
+                  <a:ext uri="{FF2B5EF4-FFF2-40B4-BE49-F238E27FC236}">
+                    <a16:creationId xmlns:a16="http://schemas.microsoft.com/office/drawing/2014/main" id="{49C0FC55-71D6-429D-AE12-A43425E3F24F}"/>
+                  </a:ext>
+                </a:extLst>
+              </p:cNvPr>
+              <p:cNvSpPr/>
+              <p:nvPr/>
+            </p:nvSpPr>
+            <p:spPr>
+              <a:xfrm>
+                <a:off x="5801213" y="4835642"/>
+                <a:ext cx="685800" cy="190500"/>
+              </a:xfrm>
+              <a:prstGeom prst="rightArrow">
+                <a:avLst/>
+              </a:prstGeom>
+              <a:solidFill>
+                <a:srgbClr val="92D050"/>
+              </a:solidFill>
+              <a:ln>
+                <a:solidFill>
+                  <a:srgbClr val="92D050"/>
+                </a:solidFill>
+              </a:ln>
+            </p:spPr>
+            <p:style>
+              <a:lnRef idx="2">
+                <a:schemeClr val="accent4">
+                  <a:shade val="50000"/>
+                </a:schemeClr>
+              </a:lnRef>
+              <a:fillRef idx="1">
+                <a:schemeClr val="accent4"/>
+              </a:fillRef>
+              <a:effectRef idx="0">
+                <a:schemeClr val="accent4"/>
+              </a:effectRef>
+              <a:fontRef idx="minor">
+                <a:schemeClr val="lt1"/>
+              </a:fontRef>
+            </p:style>
+            <p:txBody>
+              <a:bodyPr rtlCol="0" anchor="ctr"/>
+              <a:lstStyle/>
+              <a:p>
+                <a:pPr algn="ctr"/>
+                <a:endParaRPr lang="zh-CN" altLang="en-US"/>
+              </a:p>
+            </p:txBody>
+          </p:sp>
+          <p:sp>
+            <p:nvSpPr>
+              <p:cNvPr id="627" name="箭头: 右 626">
+                <a:extLst>
+                  <a:ext uri="{FF2B5EF4-FFF2-40B4-BE49-F238E27FC236}">
+                    <a16:creationId xmlns:a16="http://schemas.microsoft.com/office/drawing/2014/main" id="{D57BB293-F80C-4B69-8FA0-AD2E7CF9A910}"/>
+                  </a:ext>
+                </a:extLst>
+              </p:cNvPr>
+              <p:cNvSpPr/>
+              <p:nvPr/>
+            </p:nvSpPr>
+            <p:spPr>
+              <a:xfrm>
+                <a:off x="5801213" y="1797167"/>
+                <a:ext cx="685800" cy="190500"/>
+              </a:xfrm>
+              <a:prstGeom prst="rightArrow">
+                <a:avLst/>
+              </a:prstGeom>
+              <a:solidFill>
+                <a:schemeClr val="accent4">
+                  <a:lumMod val="60000"/>
+                  <a:lumOff val="40000"/>
+                </a:schemeClr>
+              </a:solidFill>
+              <a:ln>
+                <a:solidFill>
+                  <a:schemeClr val="accent4">
+                    <a:lumMod val="60000"/>
+                    <a:lumOff val="40000"/>
+                  </a:schemeClr>
+                </a:solidFill>
+              </a:ln>
+            </p:spPr>
+            <p:style>
+              <a:lnRef idx="2">
+                <a:schemeClr val="accent4">
+                  <a:shade val="50000"/>
+                </a:schemeClr>
+              </a:lnRef>
+              <a:fillRef idx="1">
+                <a:schemeClr val="accent4"/>
+              </a:fillRef>
+              <a:effectRef idx="0">
+                <a:schemeClr val="accent4"/>
+              </a:effectRef>
+              <a:fontRef idx="minor">
+                <a:schemeClr val="lt1"/>
+              </a:fontRef>
+            </p:style>
+            <p:txBody>
+              <a:bodyPr rtlCol="0" anchor="ctr"/>
+              <a:lstStyle/>
+              <a:p>
+                <a:pPr algn="ctr"/>
+                <a:endParaRPr lang="zh-CN" altLang="en-US"/>
+              </a:p>
+            </p:txBody>
+          </p:sp>
+          <p:cxnSp>
+            <p:nvCxnSpPr>
+              <p:cNvPr id="529" name="直接连接符 528">
+                <a:extLst>
+                  <a:ext uri="{FF2B5EF4-FFF2-40B4-BE49-F238E27FC236}">
+                    <a16:creationId xmlns:a16="http://schemas.microsoft.com/office/drawing/2014/main" id="{BDADE602-F8FA-4A31-BD89-A95360F3CC41}"/>
+                  </a:ext>
+                </a:extLst>
+              </p:cNvPr>
+              <p:cNvCxnSpPr>
+                <a:cxnSpLocks/>
+                <a:stCxn id="516" idx="2"/>
+                <a:endCxn id="613" idx="0"/>
+              </p:cNvCxnSpPr>
+              <p:nvPr/>
+            </p:nvCxnSpPr>
+            <p:spPr>
+              <a:xfrm>
+                <a:off x="1756539" y="2784171"/>
+                <a:ext cx="449817" cy="2876941"/>
+              </a:xfrm>
+              <a:prstGeom prst="line">
+                <a:avLst/>
+              </a:prstGeom>
+              <a:ln>
+                <a:solidFill>
+                  <a:srgbClr val="FFC000"/>
+                </a:solidFill>
+              </a:ln>
+            </p:spPr>
+            <p:style>
+              <a:lnRef idx="1">
+                <a:schemeClr val="accent1"/>
+              </a:lnRef>
+              <a:fillRef idx="0">
+                <a:schemeClr val="accent1"/>
+              </a:fillRef>
+              <a:effectRef idx="0">
+                <a:schemeClr val="accent1"/>
+              </a:effectRef>
+              <a:fontRef idx="minor">
+                <a:schemeClr val="tx1"/>
+              </a:fontRef>
+            </p:style>
+          </p:cxnSp>
+          <p:sp>
+            <p:nvSpPr>
+              <p:cNvPr id="234" name="星形: 五角 233">
+                <a:extLst>
+                  <a:ext uri="{FF2B5EF4-FFF2-40B4-BE49-F238E27FC236}">
+                    <a16:creationId xmlns:a16="http://schemas.microsoft.com/office/drawing/2014/main" id="{7DDA0F1D-E154-46EB-BE54-A45463913591}"/>
+                  </a:ext>
+                </a:extLst>
+              </p:cNvPr>
+              <p:cNvSpPr/>
+              <p:nvPr/>
+            </p:nvSpPr>
+            <p:spPr>
+              <a:xfrm rot="20997962">
+                <a:off x="3246919" y="5519988"/>
+                <a:ext cx="104245" cy="105269"/>
+              </a:xfrm>
+              <a:prstGeom prst="star5">
+                <a:avLst/>
+              </a:prstGeom>
+              <a:solidFill>
+                <a:schemeClr val="accent6">
+                  <a:lumMod val="75000"/>
+                </a:schemeClr>
+              </a:solidFill>
+              <a:ln>
+                <a:solidFill>
+                  <a:schemeClr val="accent6">
+                    <a:lumMod val="75000"/>
+                  </a:schemeClr>
+                </a:solidFill>
+              </a:ln>
+            </p:spPr>
+            <p:style>
+              <a:lnRef idx="2">
+                <a:schemeClr val="accent1">
+                  <a:shade val="50000"/>
+                </a:schemeClr>
+              </a:lnRef>
+              <a:fillRef idx="1">
+                <a:schemeClr val="accent1"/>
+              </a:fillRef>
+              <a:effectRef idx="0">
+                <a:schemeClr val="accent1"/>
+              </a:effectRef>
+              <a:fontRef idx="minor">
+                <a:schemeClr val="lt1"/>
+              </a:fontRef>
+            </p:style>
+            <p:txBody>
+              <a:bodyPr rtlCol="0" anchor="ctr"/>
+              <a:lstStyle/>
+              <a:p>
+                <a:pPr algn="ctr"/>
+                <a:endParaRPr lang="zh-CN" altLang="en-US"/>
+              </a:p>
+            </p:txBody>
+          </p:sp>
+          <p:sp>
+            <p:nvSpPr>
+              <p:cNvPr id="235" name="星形: 五角 234">
+                <a:extLst>
+                  <a:ext uri="{FF2B5EF4-FFF2-40B4-BE49-F238E27FC236}">
+                    <a16:creationId xmlns:a16="http://schemas.microsoft.com/office/drawing/2014/main" id="{F7F58114-93DD-415F-A2C7-538384E520B9}"/>
+                  </a:ext>
+                </a:extLst>
+              </p:cNvPr>
+              <p:cNvSpPr/>
+              <p:nvPr/>
+            </p:nvSpPr>
+            <p:spPr>
+              <a:xfrm rot="1548584">
+                <a:off x="2379205" y="5158462"/>
+                <a:ext cx="105269" cy="104245"/>
+              </a:xfrm>
+              <a:prstGeom prst="star5">
+                <a:avLst/>
+              </a:prstGeom>
+              <a:solidFill>
+                <a:schemeClr val="accent6">
+                  <a:lumMod val="75000"/>
+                </a:schemeClr>
+              </a:solidFill>
+              <a:ln>
+                <a:solidFill>
+                  <a:schemeClr val="accent6">
+                    <a:lumMod val="75000"/>
+                  </a:schemeClr>
+                </a:solidFill>
+              </a:ln>
+            </p:spPr>
+            <p:style>
+              <a:lnRef idx="2">
+                <a:schemeClr val="accent1">
+                  <a:shade val="50000"/>
+                </a:schemeClr>
+              </a:lnRef>
+              <a:fillRef idx="1">
+                <a:schemeClr val="accent1"/>
+              </a:fillRef>
+              <a:effectRef idx="0">
+                <a:schemeClr val="accent1"/>
+              </a:effectRef>
+              <a:fontRef idx="minor">
+                <a:schemeClr val="lt1"/>
+              </a:fontRef>
+            </p:style>
+            <p:txBody>
+              <a:bodyPr rtlCol="0" anchor="ctr"/>
+              <a:lstStyle/>
+              <a:p>
+                <a:pPr algn="ctr"/>
+                <a:endParaRPr lang="zh-CN" altLang="en-US" dirty="0"/>
+              </a:p>
+            </p:txBody>
+          </p:sp>
+          <p:sp>
+            <p:nvSpPr>
+              <p:cNvPr id="236" name="星形: 五角 235">
+                <a:extLst>
+                  <a:ext uri="{FF2B5EF4-FFF2-40B4-BE49-F238E27FC236}">
+                    <a16:creationId xmlns:a16="http://schemas.microsoft.com/office/drawing/2014/main" id="{7895F05B-9B87-4F38-905E-C6ACFAC11FC1}"/>
+                  </a:ext>
+                </a:extLst>
+              </p:cNvPr>
+              <p:cNvSpPr/>
+              <p:nvPr/>
+            </p:nvSpPr>
+            <p:spPr>
+              <a:xfrm>
+                <a:off x="4955378" y="4502133"/>
+                <a:ext cx="92662" cy="105269"/>
+              </a:xfrm>
+              <a:prstGeom prst="star5">
+                <a:avLst/>
+              </a:prstGeom>
+              <a:solidFill>
+                <a:schemeClr val="accent6">
+                  <a:lumMod val="75000"/>
+                </a:schemeClr>
+              </a:solidFill>
+              <a:ln>
+                <a:solidFill>
+                  <a:schemeClr val="accent6">
+                    <a:lumMod val="75000"/>
+                  </a:schemeClr>
+                </a:solidFill>
+              </a:ln>
+            </p:spPr>
+            <p:style>
+              <a:lnRef idx="2">
+                <a:schemeClr val="accent1">
+                  <a:shade val="50000"/>
+                </a:schemeClr>
+              </a:lnRef>
+              <a:fillRef idx="1">
+                <a:schemeClr val="accent1"/>
+              </a:fillRef>
+              <a:effectRef idx="0">
+                <a:schemeClr val="accent1"/>
+              </a:effectRef>
+              <a:fontRef idx="minor">
+                <a:schemeClr val="lt1"/>
+              </a:fontRef>
+            </p:style>
+            <p:txBody>
+              <a:bodyPr rtlCol="0" anchor="ctr"/>
+              <a:lstStyle/>
+              <a:p>
+                <a:pPr algn="ctr"/>
+                <a:endParaRPr lang="zh-CN" altLang="en-US" dirty="0"/>
+              </a:p>
+            </p:txBody>
+          </p:sp>
+          <p:sp>
+            <p:nvSpPr>
+              <p:cNvPr id="51" name="箭头: 下 50">
+                <a:extLst>
+                  <a:ext uri="{FF2B5EF4-FFF2-40B4-BE49-F238E27FC236}">
+                    <a16:creationId xmlns:a16="http://schemas.microsoft.com/office/drawing/2014/main" id="{D725A393-D50F-43BA-86F0-D0DDE2AC148E}"/>
+                  </a:ext>
+                </a:extLst>
+              </p:cNvPr>
+              <p:cNvSpPr/>
+              <p:nvPr/>
+            </p:nvSpPr>
+            <p:spPr>
+              <a:xfrm>
+                <a:off x="2151142" y="3080606"/>
+                <a:ext cx="205563" cy="1178974"/>
+              </a:xfrm>
+              <a:prstGeom prst="downArrow">
+                <a:avLst>
+                  <a:gd name="adj1" fmla="val 50000"/>
+                  <a:gd name="adj2" fmla="val 122414"/>
+                </a:avLst>
+              </a:prstGeom>
+            </p:spPr>
+            <p:style>
+              <a:lnRef idx="1">
+                <a:schemeClr val="accent4"/>
+              </a:lnRef>
+              <a:fillRef idx="3">
+                <a:schemeClr val="accent4"/>
+              </a:fillRef>
+              <a:effectRef idx="2">
+                <a:schemeClr val="accent4"/>
+              </a:effectRef>
+              <a:fontRef idx="minor">
+                <a:schemeClr val="lt1"/>
+              </a:fontRef>
+            </p:style>
+            <p:txBody>
+              <a:bodyPr rtlCol="0" anchor="ctr"/>
+              <a:lstStyle/>
+              <a:p>
+                <a:pPr algn="ctr"/>
+                <a:endParaRPr lang="zh-CN" altLang="en-US"/>
+              </a:p>
+            </p:txBody>
+          </p:sp>
+          <p:sp>
+            <p:nvSpPr>
+              <p:cNvPr id="250" name="箭头: 下 249">
+                <a:extLst>
+                  <a:ext uri="{FF2B5EF4-FFF2-40B4-BE49-F238E27FC236}">
+                    <a16:creationId xmlns:a16="http://schemas.microsoft.com/office/drawing/2014/main" id="{C4DDC77E-7D51-4316-9B61-0FDE864BBFCF}"/>
+                  </a:ext>
+                </a:extLst>
+              </p:cNvPr>
+              <p:cNvSpPr/>
+              <p:nvPr/>
+            </p:nvSpPr>
+            <p:spPr>
+              <a:xfrm rot="10800000">
+                <a:off x="3923228" y="3073518"/>
+                <a:ext cx="205563" cy="1155582"/>
+              </a:xfrm>
+              <a:prstGeom prst="downArrow">
+                <a:avLst>
+                  <a:gd name="adj1" fmla="val 50000"/>
+                  <a:gd name="adj2" fmla="val 98276"/>
+                </a:avLst>
+              </a:prstGeom>
+            </p:spPr>
+            <p:style>
+              <a:lnRef idx="1">
+                <a:schemeClr val="accent6"/>
+              </a:lnRef>
+              <a:fillRef idx="3">
+                <a:schemeClr val="accent6"/>
+              </a:fillRef>
+              <a:effectRef idx="2">
+                <a:schemeClr val="accent6"/>
+              </a:effectRef>
+              <a:fontRef idx="minor">
+                <a:schemeClr val="lt1"/>
+              </a:fontRef>
+            </p:style>
+            <p:txBody>
+              <a:bodyPr rtlCol="0" anchor="ctr"/>
+              <a:lstStyle/>
+              <a:p>
+                <a:pPr algn="ctr"/>
+                <a:endParaRPr lang="zh-CN" altLang="en-US"/>
+              </a:p>
+            </p:txBody>
+          </p:sp>
+          <p:sp>
+            <p:nvSpPr>
+              <p:cNvPr id="53" name="文本框 52">
+                <a:extLst>
+                  <a:ext uri="{FF2B5EF4-FFF2-40B4-BE49-F238E27FC236}">
+                    <a16:creationId xmlns:a16="http://schemas.microsoft.com/office/drawing/2014/main" id="{72318F9E-E578-404C-9715-42086BD29664}"/>
+                  </a:ext>
+                </a:extLst>
+              </p:cNvPr>
+              <p:cNvSpPr txBox="1"/>
+              <p:nvPr/>
+            </p:nvSpPr>
+            <p:spPr>
+              <a:xfrm>
+                <a:off x="1150800" y="3296805"/>
+                <a:ext cx="902811" cy="307777"/>
+              </a:xfrm>
+              <a:prstGeom prst="rect">
+                <a:avLst/>
+              </a:prstGeom>
+              <a:noFill/>
+            </p:spPr>
+            <p:txBody>
+              <a:bodyPr wrap="none" rtlCol="0">
+                <a:spAutoFit/>
+              </a:bodyPr>
+              <a:lstStyle/>
+              <a:p>
+                <a:r>
+                  <a:rPr lang="zh-CN" altLang="en-US" sz="1400" b="1" dirty="0">
+                    <a:latin typeface="微软雅黑" panose="020B0503020204020204" pitchFamily="34" charset="-122"/>
+                    <a:ea typeface="微软雅黑" panose="020B0503020204020204" pitchFamily="34" charset="-122"/>
+                  </a:rPr>
+                  <a:t>全局引导</a:t>
+                </a:r>
+              </a:p>
+            </p:txBody>
+          </p:sp>
+          <p:sp>
+            <p:nvSpPr>
+              <p:cNvPr id="252" name="文本框 251">
+                <a:extLst>
+                  <a:ext uri="{FF2B5EF4-FFF2-40B4-BE49-F238E27FC236}">
+                    <a16:creationId xmlns:a16="http://schemas.microsoft.com/office/drawing/2014/main" id="{C9CBF080-1DF5-42F7-B496-0B87515EDABE}"/>
+                  </a:ext>
+                </a:extLst>
+              </p:cNvPr>
+              <p:cNvSpPr txBox="1"/>
+              <p:nvPr/>
+            </p:nvSpPr>
+            <p:spPr>
+              <a:xfrm>
+                <a:off x="4168312" y="3276253"/>
+                <a:ext cx="1082348" cy="307777"/>
+              </a:xfrm>
+              <a:prstGeom prst="rect">
+                <a:avLst/>
+              </a:prstGeom>
+              <a:noFill/>
+            </p:spPr>
+            <p:txBody>
+              <a:bodyPr wrap="none" rtlCol="0">
+                <a:spAutoFit/>
+              </a:bodyPr>
+              <a:lstStyle/>
+              <a:p>
+                <a:r>
+                  <a:rPr lang="zh-CN" altLang="en-US" sz="1400" b="1" dirty="0">
+                    <a:latin typeface="微软雅黑" panose="020B0503020204020204" pitchFamily="34" charset="-122"/>
+                    <a:ea typeface="微软雅黑" panose="020B0503020204020204" pitchFamily="34" charset="-122"/>
+                  </a:rPr>
+                  <a:t>实时重规划</a:t>
+                </a:r>
+              </a:p>
+            </p:txBody>
+          </p:sp>
+        </p:grpSp>
+        <mc:AlternateContent xmlns:mc="http://schemas.openxmlformats.org/markup-compatibility/2006">
+          <mc:Choice xmlns:a14="http://schemas.microsoft.com/office/drawing/2010/main" Requires="a14">
+            <p:sp>
+              <p:nvSpPr>
+                <p:cNvPr id="283" name="文本框 282">
+                  <a:extLst>
+                    <a:ext uri="{FF2B5EF4-FFF2-40B4-BE49-F238E27FC236}">
+                      <a16:creationId xmlns:a16="http://schemas.microsoft.com/office/drawing/2014/main" id="{D32D3581-37BE-430A-A095-76E70E6EC1A4}"/>
+                    </a:ext>
+                  </a:extLst>
+                </p:cNvPr>
+                <p:cNvSpPr txBox="1"/>
+                <p:nvPr/>
+              </p:nvSpPr>
+              <p:spPr>
+                <a:xfrm>
+                  <a:off x="1630260" y="5643905"/>
+                  <a:ext cx="473528" cy="276999"/>
+                </a:xfrm>
+                <a:prstGeom prst="rect">
+                  <a:avLst/>
+                </a:prstGeom>
+                <a:noFill/>
+              </p:spPr>
+              <p:txBody>
+                <a:bodyPr wrap="square" rtlCol="0">
+                  <a:spAutoFit/>
+                </a:bodyPr>
+                <a:lstStyle/>
+                <a:p>
+                  <a:pPr/>
+                  <a14:m>
+                    <m:oMathPara xmlns:m="http://schemas.openxmlformats.org/officeDocument/2006/math">
+                      <m:oMathParaPr>
+                        <m:jc m:val="centerGroup"/>
+                      </m:oMathParaPr>
+                      <m:oMath xmlns:m="http://schemas.openxmlformats.org/officeDocument/2006/math">
+                        <m:sSub>
+                          <m:sSubPr>
+                            <m:ctrlPr>
+                              <a:rPr lang="en-US" altLang="zh-CN" sz="1200" i="1" smtClean="0">
+                                <a:latin typeface="Cambria Math" panose="02040503050406030204" pitchFamily="18" charset="0"/>
+                              </a:rPr>
+                            </m:ctrlPr>
+                          </m:sSubPr>
+                          <m:e>
+                            <m:r>
+                              <a:rPr lang="en-US" altLang="zh-CN" sz="1200" b="0" i="1" smtClean="0">
+                                <a:latin typeface="Cambria Math" panose="02040503050406030204" pitchFamily="18" charset="0"/>
+                              </a:rPr>
+                              <m:t>𝐶</m:t>
+                            </m:r>
+                          </m:e>
+                          <m:sub>
+                            <m:r>
+                              <a:rPr lang="en-US" altLang="zh-CN" sz="1200" b="0" i="1" smtClean="0">
+                                <a:latin typeface="Cambria Math" panose="02040503050406030204" pitchFamily="18" charset="0"/>
+                              </a:rPr>
+                              <m:t>1</m:t>
+                            </m:r>
+                          </m:sub>
+                        </m:sSub>
+                      </m:oMath>
+                    </m:oMathPara>
+                  </a14:m>
+                  <a:endParaRPr lang="zh-CN" altLang="en-US" sz="1200" dirty="0"/>
+                </a:p>
+              </p:txBody>
+            </p:sp>
+          </mc:Choice>
+          <mc:Fallback>
+            <p:sp>
+              <p:nvSpPr>
+                <p:cNvPr id="283" name="文本框 282">
+                  <a:extLst>
+                    <a:ext uri="{FF2B5EF4-FFF2-40B4-BE49-F238E27FC236}">
+                      <a16:creationId xmlns:a16="http://schemas.microsoft.com/office/drawing/2014/main" id="{D32D3581-37BE-430A-A095-76E70E6EC1A4}"/>
+                    </a:ext>
+                  </a:extLst>
+                </p:cNvPr>
+                <p:cNvSpPr txBox="1">
+                  <a:spLocks noRot="1" noChangeAspect="1" noMove="1" noResize="1" noEditPoints="1" noAdjustHandles="1" noChangeArrowheads="1" noChangeShapeType="1" noTextEdit="1"/>
+                </p:cNvSpPr>
+                <p:nvPr/>
+              </p:nvSpPr>
+              <p:spPr>
+                <a:xfrm>
+                  <a:off x="1630260" y="5643905"/>
+                  <a:ext cx="473528" cy="276999"/>
+                </a:xfrm>
+                <a:prstGeom prst="rect">
+                  <a:avLst/>
+                </a:prstGeom>
+                <a:blipFill>
+                  <a:blip r:embed="rId14"/>
+                  <a:stretch>
+                    <a:fillRect/>
+                  </a:stretch>
+                </a:blipFill>
+              </p:spPr>
+              <p:txBody>
+                <a:bodyPr/>
+                <a:lstStyle/>
+                <a:p>
+                  <a:r>
+                    <a:rPr lang="zh-CN" altLang="en-US">
+                      <a:noFill/>
+                    </a:rPr>
+                    <a:t> </a:t>
+                  </a:r>
+                </a:p>
+              </p:txBody>
+            </p:sp>
+          </mc:Fallback>
+        </mc:AlternateContent>
+        <p:sp>
+          <p:nvSpPr>
+            <p:cNvPr id="359" name="文本框 358">
+              <a:extLst>
+                <a:ext uri="{FF2B5EF4-FFF2-40B4-BE49-F238E27FC236}">
+                  <a16:creationId xmlns:a16="http://schemas.microsoft.com/office/drawing/2014/main" id="{E610095C-E527-4ED5-B1FA-10625BAFBE23}"/>
+                </a:ext>
+              </a:extLst>
+            </p:cNvPr>
+            <p:cNvSpPr txBox="1"/>
+            <p:nvPr/>
+          </p:nvSpPr>
+          <p:spPr>
+            <a:xfrm>
+              <a:off x="2203303" y="768378"/>
+              <a:ext cx="1315177" cy="230832"/>
+            </a:xfrm>
+            <a:prstGeom prst="rect">
+              <a:avLst/>
+            </a:prstGeom>
+            <a:noFill/>
+          </p:spPr>
+          <p:txBody>
+            <a:bodyPr wrap="square" rtlCol="0">
+              <a:spAutoFit/>
+            </a:bodyPr>
+            <a:lstStyle/>
+            <a:p>
+              <a:r>
+                <a:rPr lang="zh-CN" altLang="en-US" sz="900" dirty="0">
+                  <a:solidFill>
+                    <a:srgbClr val="C00000"/>
+                  </a:solidFill>
+                  <a:latin typeface="微软雅黑" panose="020B0503020204020204" pitchFamily="34" charset="-122"/>
+                  <a:ea typeface="微软雅黑" panose="020B0503020204020204" pitchFamily="34" charset="-122"/>
+                </a:rPr>
+                <a:t>需重新规划的簇路径</a:t>
+              </a:r>
+            </a:p>
+          </p:txBody>
+        </p:sp>
+        <p:sp>
+          <p:nvSpPr>
+            <p:cNvPr id="361" name="文本框 360">
+              <a:extLst>
+                <a:ext uri="{FF2B5EF4-FFF2-40B4-BE49-F238E27FC236}">
+                  <a16:creationId xmlns:a16="http://schemas.microsoft.com/office/drawing/2014/main" id="{F4A9B701-AC29-4679-BBDB-EA09762F3529}"/>
+                </a:ext>
+              </a:extLst>
+            </p:cNvPr>
+            <p:cNvSpPr txBox="1"/>
+            <p:nvPr/>
+          </p:nvSpPr>
+          <p:spPr>
+            <a:xfrm>
+              <a:off x="2750611" y="2720411"/>
+              <a:ext cx="765960" cy="230832"/>
+            </a:xfrm>
+            <a:prstGeom prst="rect">
+              <a:avLst/>
+            </a:prstGeom>
+            <a:noFill/>
+          </p:spPr>
+          <p:txBody>
+            <a:bodyPr wrap="square" rtlCol="0">
+              <a:spAutoFit/>
+            </a:bodyPr>
+            <a:lstStyle/>
+            <a:p>
+              <a:r>
+                <a:rPr lang="zh-CN" altLang="en-US" sz="900" dirty="0">
+                  <a:solidFill>
+                    <a:schemeClr val="accent6">
+                      <a:lumMod val="75000"/>
+                    </a:schemeClr>
+                  </a:solidFill>
+                  <a:latin typeface="微软雅黑" panose="020B0503020204020204" pitchFamily="34" charset="-122"/>
+                  <a:ea typeface="微软雅黑" panose="020B0503020204020204" pitchFamily="34" charset="-122"/>
+                </a:rPr>
+                <a:t>无需重规划</a:t>
+              </a:r>
+            </a:p>
+          </p:txBody>
+        </p:sp>
+        <p:sp>
+          <p:nvSpPr>
+            <p:cNvPr id="75" name="流程图: 决策 74">
+              <a:extLst>
+                <a:ext uri="{FF2B5EF4-FFF2-40B4-BE49-F238E27FC236}">
+                  <a16:creationId xmlns:a16="http://schemas.microsoft.com/office/drawing/2014/main" id="{847C9905-0EBE-4410-83CA-1120069E5B48}"/>
+                </a:ext>
+              </a:extLst>
+            </p:cNvPr>
+            <p:cNvSpPr/>
+            <p:nvPr/>
+          </p:nvSpPr>
+          <p:spPr>
+            <a:xfrm>
+              <a:off x="8511540" y="2103120"/>
+              <a:ext cx="1859280" cy="678180"/>
+            </a:xfrm>
+            <a:prstGeom prst="flowChartDecision">
+              <a:avLst/>
+            </a:prstGeom>
+          </p:spPr>
+          <p:style>
+            <a:lnRef idx="2">
+              <a:schemeClr val="dk1"/>
+            </a:lnRef>
+            <a:fillRef idx="1">
+              <a:schemeClr val="lt1"/>
+            </a:fillRef>
+            <a:effectRef idx="0">
+              <a:schemeClr val="dk1"/>
+            </a:effectRef>
+            <a:fontRef idx="minor">
+              <a:schemeClr val="dk1"/>
+            </a:fontRef>
+          </p:style>
+          <p:txBody>
+            <a:bodyPr rtlCol="0" anchor="ctr"/>
+            <a:lstStyle/>
+            <a:p>
+              <a:pPr algn="ctr"/>
+              <a:endParaRPr lang="zh-CN" altLang="en-US"/>
+            </a:p>
+          </p:txBody>
+        </p:sp>
+        <p:sp>
+          <p:nvSpPr>
+            <p:cNvPr id="379" name="文本框 378">
+              <a:extLst>
+                <a:ext uri="{FF2B5EF4-FFF2-40B4-BE49-F238E27FC236}">
+                  <a16:creationId xmlns:a16="http://schemas.microsoft.com/office/drawing/2014/main" id="{AD077F02-C1E7-4DCF-9C47-36F1EDCC8581}"/>
+                </a:ext>
+              </a:extLst>
+            </p:cNvPr>
+            <p:cNvSpPr txBox="1"/>
+            <p:nvPr/>
+          </p:nvSpPr>
+          <p:spPr>
+            <a:xfrm>
+              <a:off x="8681515" y="2304786"/>
+              <a:ext cx="1559766" cy="276999"/>
+            </a:xfrm>
+            <a:prstGeom prst="rect">
+              <a:avLst/>
+            </a:prstGeom>
+            <a:noFill/>
+          </p:spPr>
+          <p:txBody>
+            <a:bodyPr wrap="square" rtlCol="0">
+              <a:spAutoFit/>
+            </a:bodyPr>
+            <a:lstStyle/>
+            <a:p>
+              <a:r>
+                <a:rPr lang="zh-CN" altLang="en-US" sz="1200" dirty="0"/>
+                <a:t>②全局路径是否碰撞</a:t>
+              </a:r>
+            </a:p>
+          </p:txBody>
+        </p:sp>
+        <p:cxnSp>
+          <p:nvCxnSpPr>
+            <p:cNvPr id="77" name="直接箭头连接符 76">
+              <a:extLst>
+                <a:ext uri="{FF2B5EF4-FFF2-40B4-BE49-F238E27FC236}">
+                  <a16:creationId xmlns:a16="http://schemas.microsoft.com/office/drawing/2014/main" id="{BF3E9FA1-8B00-4BF9-8122-A2845E318C85}"/>
+                </a:ext>
+              </a:extLst>
+            </p:cNvPr>
+            <p:cNvCxnSpPr>
+              <a:cxnSpLocks/>
+            </p:cNvCxnSpPr>
+            <p:nvPr/>
+          </p:nvCxnSpPr>
+          <p:spPr>
+            <a:xfrm flipH="1">
+              <a:off x="7563640" y="1851660"/>
+              <a:ext cx="2" cy="2108631"/>
+            </a:xfrm>
+            <a:prstGeom prst="straightConnector1">
+              <a:avLst/>
+            </a:prstGeom>
+            <a:ln>
+              <a:tailEnd type="triangle"/>
+            </a:ln>
+          </p:spPr>
+          <p:style>
+            <a:lnRef idx="2">
+              <a:schemeClr val="dk1"/>
+            </a:lnRef>
+            <a:fillRef idx="0">
+              <a:schemeClr val="dk1"/>
+            </a:fillRef>
+            <a:effectRef idx="1">
+              <a:schemeClr val="dk1"/>
+            </a:effectRef>
+            <a:fontRef idx="minor">
+              <a:schemeClr val="tx1"/>
+            </a:fontRef>
+          </p:style>
+        </p:cxnSp>
+        <p:cxnSp>
+          <p:nvCxnSpPr>
+            <p:cNvPr id="381" name="直接箭头连接符 380">
+              <a:extLst>
+                <a:ext uri="{FF2B5EF4-FFF2-40B4-BE49-F238E27FC236}">
+                  <a16:creationId xmlns:a16="http://schemas.microsoft.com/office/drawing/2014/main" id="{06F086E4-E148-4CAC-B939-6A5076ADDC64}"/>
+                </a:ext>
+              </a:extLst>
+            </p:cNvPr>
+            <p:cNvCxnSpPr>
+              <a:cxnSpLocks/>
+              <a:stCxn id="23" idx="2"/>
+              <a:endCxn id="26" idx="0"/>
+            </p:cNvCxnSpPr>
+            <p:nvPr/>
+          </p:nvCxnSpPr>
+          <p:spPr>
+            <a:xfrm>
+              <a:off x="7891300" y="4518660"/>
+              <a:ext cx="1" cy="390396"/>
+            </a:xfrm>
+            <a:prstGeom prst="straightConnector1">
+              <a:avLst/>
+            </a:prstGeom>
+            <a:ln>
+              <a:tailEnd type="triangle"/>
+            </a:ln>
+          </p:spPr>
+          <p:style>
+            <a:lnRef idx="2">
+              <a:schemeClr val="dk1"/>
+            </a:lnRef>
+            <a:fillRef idx="0">
+              <a:schemeClr val="dk1"/>
+            </a:fillRef>
+            <a:effectRef idx="1">
+              <a:schemeClr val="dk1"/>
+            </a:effectRef>
+            <a:fontRef idx="minor">
+              <a:schemeClr val="tx1"/>
+            </a:fontRef>
+          </p:style>
+        </p:cxnSp>
+        <p:cxnSp>
+          <p:nvCxnSpPr>
+            <p:cNvPr id="88" name="连接符: 肘形 87">
+              <a:extLst>
+                <a:ext uri="{FF2B5EF4-FFF2-40B4-BE49-F238E27FC236}">
+                  <a16:creationId xmlns:a16="http://schemas.microsoft.com/office/drawing/2014/main" id="{B3E72184-2193-49E8-9422-8BBD519A6202}"/>
+                </a:ext>
+              </a:extLst>
+            </p:cNvPr>
+            <p:cNvCxnSpPr>
+              <a:cxnSpLocks/>
+              <a:stCxn id="26" idx="3"/>
+              <a:endCxn id="370" idx="2"/>
+            </p:cNvCxnSpPr>
+            <p:nvPr/>
+          </p:nvCxnSpPr>
+          <p:spPr>
+            <a:xfrm flipV="1">
+              <a:off x="8694090" y="4730599"/>
+              <a:ext cx="1142612" cy="464208"/>
+            </a:xfrm>
+            <a:prstGeom prst="bentConnector2">
+              <a:avLst/>
+            </a:prstGeom>
+            <a:ln>
+              <a:tailEnd type="triangle"/>
+            </a:ln>
+          </p:spPr>
+          <p:style>
+            <a:lnRef idx="2">
+              <a:schemeClr val="dk1"/>
+            </a:lnRef>
+            <a:fillRef idx="0">
+              <a:schemeClr val="dk1"/>
+            </a:fillRef>
+            <a:effectRef idx="1">
+              <a:schemeClr val="dk1"/>
+            </a:effectRef>
+            <a:fontRef idx="minor">
+              <a:schemeClr val="tx1"/>
+            </a:fontRef>
+          </p:style>
+        </p:cxnSp>
+        <p:cxnSp>
+          <p:nvCxnSpPr>
+            <p:cNvPr id="385" name="连接符: 肘形 384">
+              <a:extLst>
+                <a:ext uri="{FF2B5EF4-FFF2-40B4-BE49-F238E27FC236}">
+                  <a16:creationId xmlns:a16="http://schemas.microsoft.com/office/drawing/2014/main" id="{8CE26109-64CA-429C-B054-62D5B7CED3B1}"/>
+                </a:ext>
+              </a:extLst>
+            </p:cNvPr>
+            <p:cNvCxnSpPr>
+              <a:cxnSpLocks/>
+              <a:stCxn id="370" idx="0"/>
+              <a:endCxn id="75" idx="2"/>
+            </p:cNvCxnSpPr>
+            <p:nvPr/>
+          </p:nvCxnSpPr>
+          <p:spPr>
+            <a:xfrm rot="16200000" flipV="1">
+              <a:off x="8995166" y="3227315"/>
+              <a:ext cx="1287551" cy="395522"/>
+            </a:xfrm>
+            <a:prstGeom prst="bentConnector3">
+              <a:avLst>
+                <a:gd name="adj1" fmla="val 50000"/>
+              </a:avLst>
+            </a:prstGeom>
+            <a:ln>
+              <a:tailEnd type="triangle"/>
+            </a:ln>
+          </p:spPr>
+          <p:style>
+            <a:lnRef idx="2">
+              <a:schemeClr val="dk1"/>
+            </a:lnRef>
+            <a:fillRef idx="0">
+              <a:schemeClr val="dk1"/>
+            </a:fillRef>
+            <a:effectRef idx="1">
+              <a:schemeClr val="dk1"/>
+            </a:effectRef>
+            <a:fontRef idx="minor">
+              <a:schemeClr val="tx1"/>
+            </a:fontRef>
+          </p:style>
+        </p:cxnSp>
+        <p:sp>
+          <p:nvSpPr>
+            <p:cNvPr id="99" name="文本框 98">
+              <a:extLst>
+                <a:ext uri="{FF2B5EF4-FFF2-40B4-BE49-F238E27FC236}">
+                  <a16:creationId xmlns:a16="http://schemas.microsoft.com/office/drawing/2014/main" id="{3D2139C9-46F5-4929-A41C-50FB6DE5F9FE}"/>
+                </a:ext>
+              </a:extLst>
+            </p:cNvPr>
+            <p:cNvSpPr txBox="1"/>
+            <p:nvPr/>
+          </p:nvSpPr>
+          <p:spPr>
+            <a:xfrm>
+              <a:off x="10276721" y="1953023"/>
+              <a:ext cx="338554" cy="276999"/>
+            </a:xfrm>
+            <a:prstGeom prst="rect">
+              <a:avLst/>
+            </a:prstGeom>
+            <a:noFill/>
+          </p:spPr>
+          <p:txBody>
+            <a:bodyPr wrap="none" rtlCol="0">
+              <a:spAutoFit/>
+            </a:bodyPr>
+            <a:lstStyle/>
+            <a:p>
+              <a:r>
+                <a:rPr lang="zh-CN" altLang="en-US" sz="1200" b="1" dirty="0"/>
+                <a:t>是</a:t>
+              </a:r>
+            </a:p>
+          </p:txBody>
+        </p:sp>
+        <p:sp>
+          <p:nvSpPr>
+            <p:cNvPr id="387" name="文本框 386">
+              <a:extLst>
+                <a:ext uri="{FF2B5EF4-FFF2-40B4-BE49-F238E27FC236}">
+                  <a16:creationId xmlns:a16="http://schemas.microsoft.com/office/drawing/2014/main" id="{5B6D0795-3715-4911-A6DB-C8D82C93E2D9}"/>
+                </a:ext>
+              </a:extLst>
+            </p:cNvPr>
+            <p:cNvSpPr txBox="1"/>
+            <p:nvPr/>
+          </p:nvSpPr>
+          <p:spPr>
+            <a:xfrm>
+              <a:off x="7840980" y="2697480"/>
+              <a:ext cx="338554" cy="276999"/>
+            </a:xfrm>
+            <a:prstGeom prst="rect">
+              <a:avLst/>
+            </a:prstGeom>
+            <a:noFill/>
+          </p:spPr>
+          <p:txBody>
+            <a:bodyPr wrap="none" rtlCol="0">
+              <a:spAutoFit/>
+            </a:bodyPr>
+            <a:lstStyle/>
+            <a:p>
+              <a:r>
+                <a:rPr lang="zh-CN" altLang="en-US" sz="1200" b="1" dirty="0"/>
+                <a:t>否</a:t>
+              </a:r>
+            </a:p>
+          </p:txBody>
+        </p:sp>
+        <p:cxnSp>
+          <p:nvCxnSpPr>
+            <p:cNvPr id="389" name="连接符: 肘形 388">
+              <a:extLst>
+                <a:ext uri="{FF2B5EF4-FFF2-40B4-BE49-F238E27FC236}">
+                  <a16:creationId xmlns:a16="http://schemas.microsoft.com/office/drawing/2014/main" id="{F75D99F3-FA99-4409-863D-06458B1E9FC6}"/>
+                </a:ext>
+              </a:extLst>
+            </p:cNvPr>
+            <p:cNvCxnSpPr>
+              <a:cxnSpLocks/>
+              <a:stCxn id="75" idx="1"/>
+            </p:cNvCxnSpPr>
+            <p:nvPr/>
+          </p:nvCxnSpPr>
+          <p:spPr>
+            <a:xfrm rot="10800000" flipV="1">
+              <a:off x="8176260" y="2442210"/>
+              <a:ext cx="335280" cy="1527810"/>
+            </a:xfrm>
+            <a:prstGeom prst="bentConnector2">
+              <a:avLst/>
+            </a:prstGeom>
+            <a:ln>
+              <a:tailEnd type="triangle"/>
+            </a:ln>
+          </p:spPr>
+          <p:style>
+            <a:lnRef idx="2">
+              <a:schemeClr val="dk1"/>
+            </a:lnRef>
+            <a:fillRef idx="0">
+              <a:schemeClr val="dk1"/>
+            </a:fillRef>
+            <a:effectRef idx="1">
+              <a:schemeClr val="dk1"/>
+            </a:effectRef>
+            <a:fontRef idx="minor">
+              <a:schemeClr val="tx1"/>
+            </a:fontRef>
+          </p:style>
+        </p:cxnSp>
+        <p:cxnSp>
+          <p:nvCxnSpPr>
+            <p:cNvPr id="391" name="连接符: 肘形 390">
+              <a:extLst>
+                <a:ext uri="{FF2B5EF4-FFF2-40B4-BE49-F238E27FC236}">
+                  <a16:creationId xmlns:a16="http://schemas.microsoft.com/office/drawing/2014/main" id="{463BFFA8-D9B5-4E59-8525-B1E20D93265D}"/>
+                </a:ext>
+              </a:extLst>
+            </p:cNvPr>
+            <p:cNvCxnSpPr>
+              <a:cxnSpLocks/>
+              <a:stCxn id="75" idx="3"/>
+              <a:endCxn id="21" idx="3"/>
+            </p:cNvCxnSpPr>
+            <p:nvPr/>
+          </p:nvCxnSpPr>
+          <p:spPr>
+            <a:xfrm flipV="1">
+              <a:off x="10370820" y="1535431"/>
+              <a:ext cx="7106" cy="906779"/>
+            </a:xfrm>
+            <a:prstGeom prst="bentConnector3">
+              <a:avLst>
+                <a:gd name="adj1" fmla="val 3317000"/>
+              </a:avLst>
+            </a:prstGeom>
+            <a:ln>
+              <a:tailEnd type="triangle"/>
+            </a:ln>
+          </p:spPr>
+          <p:style>
+            <a:lnRef idx="2">
+              <a:schemeClr val="dk1"/>
+            </a:lnRef>
+            <a:fillRef idx="0">
+              <a:schemeClr val="dk1"/>
+            </a:fillRef>
+            <a:effectRef idx="1">
+              <a:schemeClr val="dk1"/>
+            </a:effectRef>
+            <a:fontRef idx="minor">
+              <a:schemeClr val="tx1"/>
+            </a:fontRef>
+          </p:style>
+        </p:cxnSp>
+        <p:cxnSp>
+          <p:nvCxnSpPr>
+            <p:cNvPr id="398" name="直接箭头连接符 397">
+              <a:extLst>
+                <a:ext uri="{FF2B5EF4-FFF2-40B4-BE49-F238E27FC236}">
+                  <a16:creationId xmlns:a16="http://schemas.microsoft.com/office/drawing/2014/main" id="{3F994374-CA35-45D9-99D5-226049675EB2}"/>
+                </a:ext>
+              </a:extLst>
+            </p:cNvPr>
+            <p:cNvCxnSpPr>
+              <a:cxnSpLocks/>
+              <a:endCxn id="75" idx="0"/>
+            </p:cNvCxnSpPr>
+            <p:nvPr/>
+          </p:nvCxnSpPr>
+          <p:spPr>
+            <a:xfrm>
+              <a:off x="9441180" y="1828800"/>
+              <a:ext cx="0" cy="274320"/>
+            </a:xfrm>
+            <a:prstGeom prst="straightConnector1">
+              <a:avLst/>
+            </a:prstGeom>
+            <a:ln>
+              <a:tailEnd type="triangle"/>
+            </a:ln>
+          </p:spPr>
+          <p:style>
+            <a:lnRef idx="2">
+              <a:schemeClr val="dk1"/>
+            </a:lnRef>
+            <a:fillRef idx="0">
+              <a:schemeClr val="dk1"/>
+            </a:fillRef>
+            <a:effectRef idx="1">
+              <a:schemeClr val="dk1"/>
+            </a:effectRef>
+            <a:fontRef idx="minor">
+              <a:schemeClr val="tx1"/>
+            </a:fontRef>
+          </p:style>
+        </p:cxnSp>
+        <p:sp>
+          <p:nvSpPr>
+            <p:cNvPr id="118" name="文本框 117">
+              <a:extLst>
+                <a:ext uri="{FF2B5EF4-FFF2-40B4-BE49-F238E27FC236}">
+                  <a16:creationId xmlns:a16="http://schemas.microsoft.com/office/drawing/2014/main" id="{BAB7F00D-A2DF-496B-A23B-6E522E1830B8}"/>
+                </a:ext>
+              </a:extLst>
+            </p:cNvPr>
+            <p:cNvSpPr txBox="1"/>
+            <p:nvPr/>
+          </p:nvSpPr>
+          <p:spPr>
+            <a:xfrm>
+              <a:off x="6606363" y="3227203"/>
+              <a:ext cx="954107" cy="276999"/>
+            </a:xfrm>
+            <a:prstGeom prst="rect">
+              <a:avLst/>
+            </a:prstGeom>
+            <a:noFill/>
+          </p:spPr>
+          <p:txBody>
+            <a:bodyPr wrap="none" rtlCol="0">
+              <a:spAutoFit/>
+            </a:bodyPr>
+            <a:lstStyle/>
+            <a:p>
+              <a:r>
+                <a:rPr lang="zh-CN" altLang="en-US" sz="1200" b="1" dirty="0"/>
+                <a:t>关键点引导</a:t>
+              </a:r>
+            </a:p>
+          </p:txBody>
+        </p:sp>
+        <p:sp>
+          <p:nvSpPr>
+            <p:cNvPr id="404" name="文本框 403">
+              <a:extLst>
+                <a:ext uri="{FF2B5EF4-FFF2-40B4-BE49-F238E27FC236}">
+                  <a16:creationId xmlns:a16="http://schemas.microsoft.com/office/drawing/2014/main" id="{C161D7A7-A14E-4390-9092-3BC5ABE1FC9F}"/>
+                </a:ext>
+              </a:extLst>
+            </p:cNvPr>
+            <p:cNvSpPr txBox="1"/>
+            <p:nvPr/>
+          </p:nvSpPr>
+          <p:spPr>
+            <a:xfrm>
+              <a:off x="9892045" y="3215683"/>
+              <a:ext cx="800219" cy="276999"/>
+            </a:xfrm>
+            <a:prstGeom prst="rect">
+              <a:avLst/>
+            </a:prstGeom>
+            <a:noFill/>
+          </p:spPr>
+          <p:txBody>
+            <a:bodyPr wrap="none" rtlCol="0">
+              <a:spAutoFit/>
+            </a:bodyPr>
+            <a:lstStyle/>
+            <a:p>
+              <a:r>
+                <a:rPr lang="zh-CN" altLang="en-US" sz="1200" b="1" dirty="0"/>
+                <a:t>实时规划</a:t>
+              </a:r>
+            </a:p>
+          </p:txBody>
+        </p:sp>
+        <p:sp>
+          <p:nvSpPr>
+            <p:cNvPr id="721" name="星形: 五角 720">
+              <a:extLst>
+                <a:ext uri="{FF2B5EF4-FFF2-40B4-BE49-F238E27FC236}">
+                  <a16:creationId xmlns:a16="http://schemas.microsoft.com/office/drawing/2014/main" id="{9DE87FF4-F333-4E76-BBA7-97B7458E55FB}"/>
+                </a:ext>
+              </a:extLst>
+            </p:cNvPr>
+            <p:cNvSpPr/>
+            <p:nvPr/>
+          </p:nvSpPr>
+          <p:spPr>
+            <a:xfrm rot="3684013">
+              <a:off x="3000765" y="2518907"/>
+              <a:ext cx="137160" cy="137160"/>
+            </a:xfrm>
+            <a:prstGeom prst="star5">
+              <a:avLst/>
+            </a:prstGeom>
+            <a:solidFill>
+              <a:schemeClr val="accent6">
+                <a:lumMod val="75000"/>
+              </a:schemeClr>
+            </a:solidFill>
+            <a:ln>
+              <a:solidFill>
+                <a:schemeClr val="accent6">
+                  <a:lumMod val="75000"/>
+                </a:schemeClr>
+              </a:solidFill>
+            </a:ln>
+          </p:spPr>
+          <p:style>
+            <a:lnRef idx="2">
+              <a:schemeClr val="accent1">
+                <a:shade val="50000"/>
+              </a:schemeClr>
+            </a:lnRef>
+            <a:fillRef idx="1">
+              <a:schemeClr val="accent1"/>
+            </a:fillRef>
+            <a:effectRef idx="0">
+              <a:schemeClr val="accent1"/>
+            </a:effectRef>
+            <a:fontRef idx="minor">
+              <a:schemeClr val="lt1"/>
+            </a:fontRef>
+          </p:style>
+          <p:txBody>
+            <a:bodyPr rtlCol="0" anchor="ctr"/>
+            <a:lstStyle/>
+            <a:p>
+              <a:pPr algn="ctr"/>
+              <a:endParaRPr lang="zh-CN" altLang="en-US" dirty="0"/>
+            </a:p>
+          </p:txBody>
+        </p:sp>
+        <p:sp>
+          <p:nvSpPr>
+            <p:cNvPr id="722" name="文本框 721">
+              <a:extLst>
+                <a:ext uri="{FF2B5EF4-FFF2-40B4-BE49-F238E27FC236}">
+                  <a16:creationId xmlns:a16="http://schemas.microsoft.com/office/drawing/2014/main" id="{6CBE9503-2A84-47AB-B75B-B4C7044A672D}"/>
+                </a:ext>
+              </a:extLst>
+            </p:cNvPr>
+            <p:cNvSpPr txBox="1"/>
+            <p:nvPr/>
+          </p:nvSpPr>
+          <p:spPr>
+            <a:xfrm>
+              <a:off x="1813351" y="2026991"/>
+              <a:ext cx="765960" cy="230832"/>
+            </a:xfrm>
+            <a:prstGeom prst="rect">
+              <a:avLst/>
+            </a:prstGeom>
+            <a:noFill/>
+          </p:spPr>
+          <p:txBody>
+            <a:bodyPr wrap="square" rtlCol="0">
+              <a:spAutoFit/>
+            </a:bodyPr>
+            <a:lstStyle/>
+            <a:p>
+              <a:r>
+                <a:rPr lang="zh-CN" altLang="en-US" sz="900" dirty="0">
+                  <a:solidFill>
+                    <a:schemeClr val="accent6">
+                      <a:lumMod val="75000"/>
+                    </a:schemeClr>
+                  </a:solidFill>
+                  <a:latin typeface="微软雅黑" panose="020B0503020204020204" pitchFamily="34" charset="-122"/>
+                  <a:ea typeface="微软雅黑" panose="020B0503020204020204" pitchFamily="34" charset="-122"/>
+                </a:rPr>
+                <a:t>全局关键点</a:t>
+              </a:r>
+            </a:p>
+          </p:txBody>
+        </p:sp>
+        <p:cxnSp>
+          <p:nvCxnSpPr>
+            <p:cNvPr id="723" name="直接箭头连接符 722">
+              <a:extLst>
+                <a:ext uri="{FF2B5EF4-FFF2-40B4-BE49-F238E27FC236}">
+                  <a16:creationId xmlns:a16="http://schemas.microsoft.com/office/drawing/2014/main" id="{2C7110BC-5D24-4C87-9A82-AF54521489C2}"/>
+                </a:ext>
+              </a:extLst>
+            </p:cNvPr>
+            <p:cNvCxnSpPr>
+              <a:cxnSpLocks/>
+              <a:stCxn id="594" idx="2"/>
+              <a:endCxn id="595" idx="0"/>
+            </p:cNvCxnSpPr>
+            <p:nvPr/>
+          </p:nvCxnSpPr>
+          <p:spPr>
+            <a:xfrm flipH="1">
+              <a:off x="4809575" y="5359160"/>
+              <a:ext cx="218554" cy="174698"/>
+            </a:xfrm>
+            <a:prstGeom prst="straightConnector1">
+              <a:avLst/>
+            </a:prstGeom>
+            <a:ln w="12700">
+              <a:solidFill>
+                <a:srgbClr val="C00000"/>
+              </a:solidFill>
+              <a:tailEnd type="triangle"/>
+            </a:ln>
+          </p:spPr>
+          <p:style>
+            <a:lnRef idx="1">
+              <a:schemeClr val="accent1"/>
+            </a:lnRef>
+            <a:fillRef idx="0">
+              <a:schemeClr val="accent1"/>
+            </a:fillRef>
+            <a:effectRef idx="0">
+              <a:schemeClr val="accent1"/>
+            </a:effectRef>
+            <a:fontRef idx="minor">
+              <a:schemeClr val="tx1"/>
+            </a:fontRef>
+          </p:style>
+        </p:cxnSp>
+        <p:cxnSp>
+          <p:nvCxnSpPr>
+            <p:cNvPr id="724" name="直接箭头连接符 723">
+              <a:extLst>
+                <a:ext uri="{FF2B5EF4-FFF2-40B4-BE49-F238E27FC236}">
+                  <a16:creationId xmlns:a16="http://schemas.microsoft.com/office/drawing/2014/main" id="{CAF4C211-CA3F-43AC-BEA3-D1B53DB4FCED}"/>
+                </a:ext>
+              </a:extLst>
+            </p:cNvPr>
+            <p:cNvCxnSpPr>
+              <a:cxnSpLocks/>
+              <a:stCxn id="594" idx="1"/>
+            </p:cNvCxnSpPr>
+            <p:nvPr/>
+          </p:nvCxnSpPr>
+          <p:spPr>
+            <a:xfrm flipH="1" flipV="1">
+              <a:off x="4488181" y="4975860"/>
+              <a:ext cx="387548" cy="230900"/>
+            </a:xfrm>
+            <a:prstGeom prst="straightConnector1">
+              <a:avLst/>
+            </a:prstGeom>
+            <a:ln w="12700">
+              <a:solidFill>
+                <a:srgbClr val="00B050"/>
+              </a:solidFill>
+              <a:tailEnd type="triangle"/>
+            </a:ln>
+          </p:spPr>
+          <p:style>
+            <a:lnRef idx="1">
+              <a:schemeClr val="accent1"/>
+            </a:lnRef>
+            <a:fillRef idx="0">
+              <a:schemeClr val="accent1"/>
+            </a:fillRef>
+            <a:effectRef idx="0">
+              <a:schemeClr val="accent1"/>
+            </a:effectRef>
+            <a:fontRef idx="minor">
+              <a:schemeClr val="tx1"/>
+            </a:fontRef>
+          </p:style>
+        </p:cxnSp>
+        <p:cxnSp>
+          <p:nvCxnSpPr>
+            <p:cNvPr id="725" name="直接箭头连接符 724">
+              <a:extLst>
+                <a:ext uri="{FF2B5EF4-FFF2-40B4-BE49-F238E27FC236}">
+                  <a16:creationId xmlns:a16="http://schemas.microsoft.com/office/drawing/2014/main" id="{A03BA77E-BA9D-49C1-9AFF-71C9E10335F4}"/>
+                </a:ext>
+              </a:extLst>
+            </p:cNvPr>
+            <p:cNvCxnSpPr>
+              <a:cxnSpLocks/>
+              <a:stCxn id="594" idx="0"/>
+            </p:cNvCxnSpPr>
+            <p:nvPr/>
+          </p:nvCxnSpPr>
+          <p:spPr>
+            <a:xfrm flipV="1">
+              <a:off x="5028129" y="4747260"/>
+              <a:ext cx="0" cy="307100"/>
+            </a:xfrm>
+            <a:prstGeom prst="straightConnector1">
+              <a:avLst/>
+            </a:prstGeom>
+            <a:ln w="12700">
+              <a:solidFill>
+                <a:srgbClr val="00B050"/>
+              </a:solidFill>
+              <a:tailEnd type="triangle"/>
+            </a:ln>
+          </p:spPr>
+          <p:style>
+            <a:lnRef idx="1">
+              <a:schemeClr val="accent1"/>
+            </a:lnRef>
+            <a:fillRef idx="0">
+              <a:schemeClr val="accent1"/>
+            </a:fillRef>
+            <a:effectRef idx="0">
+              <a:schemeClr val="accent1"/>
+            </a:effectRef>
+            <a:fontRef idx="minor">
+              <a:schemeClr val="tx1"/>
+            </a:fontRef>
+          </p:style>
+        </p:cxnSp>
+        <p:sp>
+          <p:nvSpPr>
+            <p:cNvPr id="726" name="文本框 725">
+              <a:extLst>
+                <a:ext uri="{FF2B5EF4-FFF2-40B4-BE49-F238E27FC236}">
+                  <a16:creationId xmlns:a16="http://schemas.microsoft.com/office/drawing/2014/main" id="{80E16DBA-70B9-42EB-B858-CA57086B87F6}"/>
+                </a:ext>
+              </a:extLst>
+            </p:cNvPr>
+            <p:cNvSpPr txBox="1"/>
+            <p:nvPr/>
+          </p:nvSpPr>
+          <p:spPr>
+            <a:xfrm>
+              <a:off x="3962400" y="5060256"/>
+              <a:ext cx="967740" cy="230832"/>
+            </a:xfrm>
+            <a:prstGeom prst="rect">
+              <a:avLst/>
+            </a:prstGeom>
+            <a:noFill/>
+          </p:spPr>
+          <p:txBody>
+            <a:bodyPr wrap="square" rtlCol="0">
+              <a:spAutoFit/>
+            </a:bodyPr>
+            <a:lstStyle/>
+            <a:p>
+              <a:r>
+                <a:rPr lang="zh-CN" altLang="en-US" sz="900" dirty="0">
+                  <a:latin typeface="微软雅黑" panose="020B0503020204020204" pitchFamily="34" charset="-122"/>
+                  <a:ea typeface="微软雅黑" panose="020B0503020204020204" pitchFamily="34" charset="-122"/>
+                </a:rPr>
+                <a:t>通信保持引力</a:t>
+              </a:r>
+            </a:p>
+          </p:txBody>
+        </p:sp>
+        <p:sp>
+          <p:nvSpPr>
+            <p:cNvPr id="727" name="文本框 726">
+              <a:extLst>
+                <a:ext uri="{FF2B5EF4-FFF2-40B4-BE49-F238E27FC236}">
+                  <a16:creationId xmlns:a16="http://schemas.microsoft.com/office/drawing/2014/main" id="{09534741-FEED-45C9-80C5-1119FA503FBE}"/>
+                </a:ext>
+              </a:extLst>
+            </p:cNvPr>
+            <p:cNvSpPr txBox="1"/>
+            <p:nvPr/>
+          </p:nvSpPr>
+          <p:spPr>
+            <a:xfrm>
+              <a:off x="5173751" y="4987071"/>
+              <a:ext cx="914370" cy="230832"/>
+            </a:xfrm>
+            <a:prstGeom prst="rect">
+              <a:avLst/>
+            </a:prstGeom>
+            <a:noFill/>
+          </p:spPr>
+          <p:txBody>
+            <a:bodyPr wrap="square" rtlCol="0">
+              <a:spAutoFit/>
+            </a:bodyPr>
+            <a:lstStyle/>
+            <a:p>
+              <a:r>
+                <a:rPr lang="zh-CN" altLang="en-US" sz="900" dirty="0">
+                  <a:latin typeface="微软雅黑" panose="020B0503020204020204" pitchFamily="34" charset="-122"/>
+                  <a:ea typeface="微软雅黑" panose="020B0503020204020204" pitchFamily="34" charset="-122"/>
+                </a:rPr>
+                <a:t>目标导向引力</a:t>
+              </a:r>
+            </a:p>
+          </p:txBody>
+        </p:sp>
+        <p:sp>
+          <p:nvSpPr>
+            <p:cNvPr id="728" name="文本框 727">
+              <a:extLst>
+                <a:ext uri="{FF2B5EF4-FFF2-40B4-BE49-F238E27FC236}">
+                  <a16:creationId xmlns:a16="http://schemas.microsoft.com/office/drawing/2014/main" id="{CFB679A7-347E-4AFA-A7E0-D007BAA10681}"/>
+                </a:ext>
+              </a:extLst>
+            </p:cNvPr>
+            <p:cNvSpPr txBox="1"/>
+            <p:nvPr/>
+          </p:nvSpPr>
+          <p:spPr>
+            <a:xfrm>
+              <a:off x="4866806" y="5471736"/>
+              <a:ext cx="1099654" cy="230832"/>
+            </a:xfrm>
+            <a:prstGeom prst="rect">
+              <a:avLst/>
+            </a:prstGeom>
+            <a:noFill/>
+          </p:spPr>
+          <p:txBody>
+            <a:bodyPr wrap="square" rtlCol="0">
+              <a:spAutoFit/>
+            </a:bodyPr>
+            <a:lstStyle/>
+            <a:p>
+              <a:r>
+                <a:rPr lang="zh-CN" altLang="en-US" sz="900" dirty="0">
+                  <a:latin typeface="微软雅黑" panose="020B0503020204020204" pitchFamily="34" charset="-122"/>
+                  <a:ea typeface="微软雅黑" panose="020B0503020204020204" pitchFamily="34" charset="-122"/>
+                </a:rPr>
+                <a:t>碰撞避免斥力</a:t>
+              </a:r>
+            </a:p>
+          </p:txBody>
+        </p:sp>
+      </p:grpSp>
+    </p:spTree>
+    <p:extLst>
+      <p:ext uri="{BB962C8B-B14F-4D97-AF65-F5344CB8AC3E}">
+        <p14:creationId xmlns:p14="http://schemas.microsoft.com/office/powerpoint/2010/main" val="1505521911"/>
+      </p:ext>
+    </p:extLst>
+  </p:cSld>
+  <p:clrMapOvr>
+    <a:masterClrMapping/>
+  </p:clrMapOvr>
+</p:sld>
+</file>
+
+<file path=ppt/slides/slide6.xml><?xml version="1.0" encoding="utf-8"?>
+<p:sld xmlns:a="http://schemas.openxmlformats.org/drawingml/2006/main" xmlns:r="http://schemas.openxmlformats.org/officeDocument/2006/relationships" xmlns:p="http://schemas.openxmlformats.org/presentationml/2006/main">
+  <p:cSld>
+    <p:spTree>
+      <p:nvGrpSpPr>
+        <p:cNvPr id="1" name=""/>
+        <p:cNvGrpSpPr/>
+        <p:nvPr/>
+      </p:nvGrpSpPr>
+      <p:grpSpPr>
+        <a:xfrm>
+          <a:off x="0" y="0"/>
+          <a:ext cx="0" cy="0"/>
+          <a:chOff x="0" y="0"/>
+          <a:chExt cx="0" cy="0"/>
+        </a:xfrm>
+      </p:grpSpPr>
+      <p:grpSp>
+        <p:nvGrpSpPr>
           <p:cNvPr id="4" name="组合 3">
             <a:extLst>
               <a:ext uri="{FF2B5EF4-FFF2-40B4-BE49-F238E27FC236}">
@@ -47679,6 +55958,294 @@
           </p:txBody>
         </p:sp>
       </p:grpSp>
+      <p:pic>
+        <p:nvPicPr>
+          <p:cNvPr id="94" name="图片 93">
+            <a:extLst>
+              <a:ext uri="{FF2B5EF4-FFF2-40B4-BE49-F238E27FC236}">
+                <a16:creationId xmlns:a16="http://schemas.microsoft.com/office/drawing/2014/main" id="{5B3676A3-FDDC-4EB6-A06C-385AD90887FC}"/>
+              </a:ext>
+            </a:extLst>
+          </p:cNvPr>
+          <p:cNvPicPr>
+            <a:picLocks noChangeAspect="1"/>
+          </p:cNvPicPr>
+          <p:nvPr/>
+        </p:nvPicPr>
+        <p:blipFill>
+          <a:blip r:embed="rId4">
+            <a:extLst>
+              <a:ext uri="{28A0092B-C50C-407E-A947-70E740481C1C}">
+                <a14:useLocalDpi xmlns:a14="http://schemas.microsoft.com/office/drawing/2010/main" val="0"/>
+              </a:ext>
+            </a:extLst>
+          </a:blip>
+          <a:stretch>
+            <a:fillRect/>
+          </a:stretch>
+        </p:blipFill>
+        <p:spPr>
+          <a:xfrm>
+            <a:off x="6794725" y="5675518"/>
+            <a:ext cx="185425" cy="174172"/>
+          </a:xfrm>
+          <a:prstGeom prst="rect">
+            <a:avLst/>
+          </a:prstGeom>
+        </p:spPr>
+      </p:pic>
+      <p:pic>
+        <p:nvPicPr>
+          <p:cNvPr id="95" name="图片 94">
+            <a:extLst>
+              <a:ext uri="{FF2B5EF4-FFF2-40B4-BE49-F238E27FC236}">
+                <a16:creationId xmlns:a16="http://schemas.microsoft.com/office/drawing/2014/main" id="{A6CB1F7B-3B6D-49C0-A4B6-D81ABB05F1DD}"/>
+              </a:ext>
+            </a:extLst>
+          </p:cNvPr>
+          <p:cNvPicPr>
+            <a:picLocks noChangeAspect="1"/>
+          </p:cNvPicPr>
+          <p:nvPr/>
+        </p:nvPicPr>
+        <p:blipFill>
+          <a:blip r:embed="rId4">
+            <a:extLst>
+              <a:ext uri="{28A0092B-C50C-407E-A947-70E740481C1C}">
+                <a14:useLocalDpi xmlns:a14="http://schemas.microsoft.com/office/drawing/2010/main" val="0"/>
+              </a:ext>
+            </a:extLst>
+          </a:blip>
+          <a:stretch>
+            <a:fillRect/>
+          </a:stretch>
+        </p:blipFill>
+        <p:spPr>
+          <a:xfrm>
+            <a:off x="7302153" y="6039245"/>
+            <a:ext cx="210574" cy="197795"/>
+          </a:xfrm>
+          <a:prstGeom prst="rect">
+            <a:avLst/>
+          </a:prstGeom>
+        </p:spPr>
+      </p:pic>
+      <p:cxnSp>
+        <p:nvCxnSpPr>
+          <p:cNvPr id="96" name="直接箭头连接符 95">
+            <a:extLst>
+              <a:ext uri="{FF2B5EF4-FFF2-40B4-BE49-F238E27FC236}">
+                <a16:creationId xmlns:a16="http://schemas.microsoft.com/office/drawing/2014/main" id="{5CED62D6-04C7-41E0-AA27-DF528F227CF8}"/>
+              </a:ext>
+            </a:extLst>
+          </p:cNvPr>
+          <p:cNvCxnSpPr>
+            <a:cxnSpLocks/>
+          </p:cNvCxnSpPr>
+          <p:nvPr/>
+        </p:nvCxnSpPr>
+        <p:spPr>
+          <a:xfrm flipH="1">
+            <a:off x="7283088" y="6265709"/>
+            <a:ext cx="83352" cy="206037"/>
+          </a:xfrm>
+          <a:prstGeom prst="straightConnector1">
+            <a:avLst/>
+          </a:prstGeom>
+          <a:ln w="12700">
+            <a:solidFill>
+              <a:srgbClr val="C00000"/>
+            </a:solidFill>
+            <a:tailEnd type="triangle"/>
+          </a:ln>
+        </p:spPr>
+        <p:style>
+          <a:lnRef idx="1">
+            <a:schemeClr val="accent1"/>
+          </a:lnRef>
+          <a:fillRef idx="0">
+            <a:schemeClr val="accent1"/>
+          </a:fillRef>
+          <a:effectRef idx="0">
+            <a:schemeClr val="accent1"/>
+          </a:effectRef>
+          <a:fontRef idx="minor">
+            <a:schemeClr val="tx1"/>
+          </a:fontRef>
+        </p:style>
+      </p:cxnSp>
+      <p:cxnSp>
+        <p:nvCxnSpPr>
+          <p:cNvPr id="97" name="直接箭头连接符 96">
+            <a:extLst>
+              <a:ext uri="{FF2B5EF4-FFF2-40B4-BE49-F238E27FC236}">
+                <a16:creationId xmlns:a16="http://schemas.microsoft.com/office/drawing/2014/main" id="{06C5E0F9-BCE8-4449-B037-284616A9CF0F}"/>
+              </a:ext>
+            </a:extLst>
+          </p:cNvPr>
+          <p:cNvCxnSpPr>
+            <a:cxnSpLocks/>
+          </p:cNvCxnSpPr>
+          <p:nvPr/>
+        </p:nvCxnSpPr>
+        <p:spPr>
+          <a:xfrm flipH="1" flipV="1">
+            <a:off x="6993548" y="5870118"/>
+            <a:ext cx="312992" cy="193851"/>
+          </a:xfrm>
+          <a:prstGeom prst="straightConnector1">
+            <a:avLst/>
+          </a:prstGeom>
+          <a:ln w="12700">
+            <a:solidFill>
+              <a:srgbClr val="00B050"/>
+            </a:solidFill>
+            <a:tailEnd type="triangle"/>
+          </a:ln>
+        </p:spPr>
+        <p:style>
+          <a:lnRef idx="1">
+            <a:schemeClr val="accent1"/>
+          </a:lnRef>
+          <a:fillRef idx="0">
+            <a:schemeClr val="accent1"/>
+          </a:fillRef>
+          <a:effectRef idx="0">
+            <a:schemeClr val="accent1"/>
+          </a:effectRef>
+          <a:fontRef idx="minor">
+            <a:schemeClr val="tx1"/>
+          </a:fontRef>
+        </p:style>
+      </p:cxnSp>
+      <p:cxnSp>
+        <p:nvCxnSpPr>
+          <p:cNvPr id="106" name="直接箭头连接符 105">
+            <a:extLst>
+              <a:ext uri="{FF2B5EF4-FFF2-40B4-BE49-F238E27FC236}">
+                <a16:creationId xmlns:a16="http://schemas.microsoft.com/office/drawing/2014/main" id="{7AE6ACA9-A103-4A30-BE72-A8FA828FDD5F}"/>
+              </a:ext>
+            </a:extLst>
+          </p:cNvPr>
+          <p:cNvCxnSpPr>
+            <a:cxnSpLocks/>
+            <a:endCxn id="108" idx="1"/>
+          </p:cNvCxnSpPr>
+          <p:nvPr/>
+        </p:nvCxnSpPr>
+        <p:spPr>
+          <a:xfrm>
+            <a:off x="7460940" y="6242485"/>
+            <a:ext cx="227411" cy="106613"/>
+          </a:xfrm>
+          <a:prstGeom prst="straightConnector1">
+            <a:avLst/>
+          </a:prstGeom>
+          <a:ln w="12700">
+            <a:solidFill>
+              <a:srgbClr val="00B050"/>
+            </a:solidFill>
+            <a:tailEnd type="triangle"/>
+          </a:ln>
+        </p:spPr>
+        <p:style>
+          <a:lnRef idx="1">
+            <a:schemeClr val="accent1"/>
+          </a:lnRef>
+          <a:fillRef idx="0">
+            <a:schemeClr val="accent1"/>
+          </a:fillRef>
+          <a:effectRef idx="0">
+            <a:schemeClr val="accent1"/>
+          </a:effectRef>
+          <a:fontRef idx="minor">
+            <a:schemeClr val="tx1"/>
+          </a:fontRef>
+        </p:style>
+      </p:cxnSp>
+      <p:sp>
+        <p:nvSpPr>
+          <p:cNvPr id="107" name="文本框 106">
+            <a:extLst>
+              <a:ext uri="{FF2B5EF4-FFF2-40B4-BE49-F238E27FC236}">
+                <a16:creationId xmlns:a16="http://schemas.microsoft.com/office/drawing/2014/main" id="{45E9448F-B43E-4B00-A248-9FC374562F2B}"/>
+              </a:ext>
+            </a:extLst>
+          </p:cNvPr>
+          <p:cNvSpPr txBox="1"/>
+          <p:nvPr/>
+        </p:nvSpPr>
+        <p:spPr>
+          <a:xfrm>
+            <a:off x="6596546" y="5944176"/>
+            <a:ext cx="1056212" cy="194213"/>
+          </a:xfrm>
+          <a:prstGeom prst="rect">
+            <a:avLst/>
+          </a:prstGeom>
+          <a:noFill/>
+        </p:spPr>
+        <p:txBody>
+          <a:bodyPr wrap="square" rtlCol="0">
+            <a:spAutoFit/>
+          </a:bodyPr>
+          <a:lstStyle/>
+          <a:p>
+            <a:r>
+              <a:rPr lang="en-US" altLang="zh-CN" sz="900" dirty="0">
+                <a:latin typeface="微软雅黑" panose="020B0503020204020204" pitchFamily="34" charset="-122"/>
+                <a:ea typeface="微软雅黑" panose="020B0503020204020204" pitchFamily="34" charset="-122"/>
+              </a:rPr>
+              <a:t>MST</a:t>
+            </a:r>
+            <a:r>
+              <a:rPr lang="zh-CN" altLang="en-US" sz="900" dirty="0">
+                <a:latin typeface="微软雅黑" panose="020B0503020204020204" pitchFamily="34" charset="-122"/>
+                <a:ea typeface="微软雅黑" panose="020B0503020204020204" pitchFamily="34" charset="-122"/>
+              </a:rPr>
+              <a:t>通信力</a:t>
+            </a:r>
+          </a:p>
+        </p:txBody>
+      </p:sp>
+      <p:sp>
+        <p:nvSpPr>
+          <p:cNvPr id="108" name="文本框 107">
+            <a:extLst>
+              <a:ext uri="{FF2B5EF4-FFF2-40B4-BE49-F238E27FC236}">
+                <a16:creationId xmlns:a16="http://schemas.microsoft.com/office/drawing/2014/main" id="{4D4CF310-9C6F-49CF-B910-736D77085DB2}"/>
+              </a:ext>
+            </a:extLst>
+          </p:cNvPr>
+          <p:cNvSpPr txBox="1"/>
+          <p:nvPr/>
+        </p:nvSpPr>
+        <p:spPr>
+          <a:xfrm>
+            <a:off x="7688351" y="6251991"/>
+            <a:ext cx="914370" cy="194213"/>
+          </a:xfrm>
+          <a:prstGeom prst="rect">
+            <a:avLst/>
+          </a:prstGeom>
+          <a:noFill/>
+        </p:spPr>
+        <p:txBody>
+          <a:bodyPr wrap="square" rtlCol="0">
+            <a:spAutoFit/>
+          </a:bodyPr>
+          <a:lstStyle/>
+          <a:p>
+            <a:r>
+              <a:rPr lang="zh-CN" altLang="en-US" sz="900" dirty="0">
+                <a:latin typeface="微软雅黑" panose="020B0503020204020204" pitchFamily="34" charset="-122"/>
+                <a:ea typeface="微软雅黑" panose="020B0503020204020204" pitchFamily="34" charset="-122"/>
+              </a:rPr>
+              <a:t>目标吸引力</a:t>
+            </a:r>
+          </a:p>
+        </p:txBody>
+      </p:sp>
     </p:spTree>
     <p:extLst>
       <p:ext uri="{BB962C8B-B14F-4D97-AF65-F5344CB8AC3E}">
